--- a/presentation/MS_presentation_300726.pptx
+++ b/presentation/MS_presentation_300726.pptx
@@ -4,16 +4,24 @@
   <p:sldMasterIdLst>
     <p:sldMasterId id="2147483648" r:id="rId1"/>
   </p:sldMasterIdLst>
+  <p:notesMasterIdLst>
+    <p:notesMasterId r:id="rId16"/>
+  </p:notesMasterIdLst>
   <p:sldIdLst>
     <p:sldId id="257" r:id="rId2"/>
-    <p:sldId id="256" r:id="rId3"/>
-    <p:sldId id="262" r:id="rId4"/>
-    <p:sldId id="266" r:id="rId5"/>
+    <p:sldId id="270" r:id="rId3"/>
+    <p:sldId id="271" r:id="rId4"/>
+    <p:sldId id="272" r:id="rId5"/>
     <p:sldId id="260" r:id="rId6"/>
     <p:sldId id="261" r:id="rId7"/>
-    <p:sldId id="258" r:id="rId8"/>
-    <p:sldId id="259" r:id="rId9"/>
-    <p:sldId id="267" r:id="rId10"/>
+    <p:sldId id="256" r:id="rId8"/>
+    <p:sldId id="262" r:id="rId9"/>
+    <p:sldId id="266" r:id="rId10"/>
+    <p:sldId id="268" r:id="rId11"/>
+    <p:sldId id="269" r:id="rId12"/>
+    <p:sldId id="258" r:id="rId13"/>
+    <p:sldId id="259" r:id="rId14"/>
+    <p:sldId id="267" r:id="rId15"/>
   </p:sldIdLst>
   <p:sldSz cx="12192000" cy="6858000"/>
   <p:notesSz cx="6858000" cy="9144000"/>
@@ -112,7 +120,567 @@
       </a:defRPr>
     </a:lvl9pPr>
   </p:defaultTextStyle>
+  <p:extLst>
+    <p:ext uri="{EFAFB233-063F-42B5-8137-9DF3F51BA10A}">
+      <p15:sldGuideLst xmlns:p15="http://schemas.microsoft.com/office/powerpoint/2012/main"/>
+    </p:ext>
+  </p:extLst>
 </p:presentation>
+</file>
+
+<file path=ppt/notesMasters/notesMaster1.xml><?xml version="1.0" encoding="utf-8"?>
+<p:notesMaster xmlns:a="http://schemas.openxmlformats.org/drawingml/2006/main" xmlns:r="http://schemas.openxmlformats.org/officeDocument/2006/relationships" xmlns:p="http://schemas.openxmlformats.org/presentationml/2006/main">
+  <p:cSld>
+    <p:bg>
+      <p:bgRef idx="1001">
+        <a:schemeClr val="bg1"/>
+      </p:bgRef>
+    </p:bg>
+    <p:spTree>
+      <p:nvGrpSpPr>
+        <p:cNvPr id="1" name=""/>
+        <p:cNvGrpSpPr/>
+        <p:nvPr/>
+      </p:nvGrpSpPr>
+      <p:grpSpPr>
+        <a:xfrm>
+          <a:off x="0" y="0"/>
+          <a:ext cx="0" cy="0"/>
+          <a:chOff x="0" y="0"/>
+          <a:chExt cx="0" cy="0"/>
+        </a:xfrm>
+      </p:grpSpPr>
+      <p:sp>
+        <p:nvSpPr>
+          <p:cNvPr id="2" name="Kopfzeilenplatzhalter 1"/>
+          <p:cNvSpPr>
+            <a:spLocks noGrp="1"/>
+          </p:cNvSpPr>
+          <p:nvPr>
+            <p:ph type="hdr" sz="quarter"/>
+          </p:nvPr>
+        </p:nvSpPr>
+        <p:spPr>
+          <a:xfrm>
+            <a:off x="0" y="0"/>
+            <a:ext cx="2971800" cy="458788"/>
+          </a:xfrm>
+          <a:prstGeom prst="rect">
+            <a:avLst/>
+          </a:prstGeom>
+        </p:spPr>
+        <p:txBody>
+          <a:bodyPr vert="horz" lIns="91440" tIns="45720" rIns="91440" bIns="45720" rtlCol="0"/>
+          <a:lstStyle>
+            <a:lvl1pPr algn="l">
+              <a:defRPr sz="1200"/>
+            </a:lvl1pPr>
+          </a:lstStyle>
+          <a:p>
+            <a:endParaRPr lang="de-DE"/>
+          </a:p>
+        </p:txBody>
+      </p:sp>
+      <p:sp>
+        <p:nvSpPr>
+          <p:cNvPr id="3" name="Datumsplatzhalter 2"/>
+          <p:cNvSpPr>
+            <a:spLocks noGrp="1"/>
+          </p:cNvSpPr>
+          <p:nvPr>
+            <p:ph type="dt" idx="1"/>
+          </p:nvPr>
+        </p:nvSpPr>
+        <p:spPr>
+          <a:xfrm>
+            <a:off x="3884613" y="0"/>
+            <a:ext cx="2971800" cy="458788"/>
+          </a:xfrm>
+          <a:prstGeom prst="rect">
+            <a:avLst/>
+          </a:prstGeom>
+        </p:spPr>
+        <p:txBody>
+          <a:bodyPr vert="horz" lIns="91440" tIns="45720" rIns="91440" bIns="45720" rtlCol="0"/>
+          <a:lstStyle>
+            <a:lvl1pPr algn="r">
+              <a:defRPr sz="1200"/>
+            </a:lvl1pPr>
+          </a:lstStyle>
+          <a:p>
+            <a:fld id="{C513BE9F-D760-47FC-B634-50E109F412A8}" type="datetimeFigureOut">
+              <a:rPr lang="de-DE" smtClean="0"/>
+              <a:t>29.07.2026</a:t>
+            </a:fld>
+            <a:endParaRPr lang="de-DE"/>
+          </a:p>
+        </p:txBody>
+      </p:sp>
+      <p:sp>
+        <p:nvSpPr>
+          <p:cNvPr id="4" name="Folienbildplatzhalter 3"/>
+          <p:cNvSpPr>
+            <a:spLocks noGrp="1" noRot="1" noChangeAspect="1"/>
+          </p:cNvSpPr>
+          <p:nvPr>
+            <p:ph type="sldImg" idx="2"/>
+          </p:nvPr>
+        </p:nvSpPr>
+        <p:spPr>
+          <a:xfrm>
+            <a:off x="685800" y="1143000"/>
+            <a:ext cx="5486400" cy="3086100"/>
+          </a:xfrm>
+          <a:prstGeom prst="rect">
+            <a:avLst/>
+          </a:prstGeom>
+          <a:noFill/>
+          <a:ln w="12700">
+            <a:solidFill>
+              <a:prstClr val="black"/>
+            </a:solidFill>
+          </a:ln>
+        </p:spPr>
+        <p:txBody>
+          <a:bodyPr vert="horz" lIns="91440" tIns="45720" rIns="91440" bIns="45720" rtlCol="0" anchor="ctr"/>
+          <a:lstStyle/>
+          <a:p>
+            <a:endParaRPr lang="de-DE"/>
+          </a:p>
+        </p:txBody>
+      </p:sp>
+      <p:sp>
+        <p:nvSpPr>
+          <p:cNvPr id="5" name="Notizenplatzhalter 4"/>
+          <p:cNvSpPr>
+            <a:spLocks noGrp="1"/>
+          </p:cNvSpPr>
+          <p:nvPr>
+            <p:ph type="body" sz="quarter" idx="3"/>
+          </p:nvPr>
+        </p:nvSpPr>
+        <p:spPr>
+          <a:xfrm>
+            <a:off x="685800" y="4400550"/>
+            <a:ext cx="5486400" cy="3600450"/>
+          </a:xfrm>
+          <a:prstGeom prst="rect">
+            <a:avLst/>
+          </a:prstGeom>
+        </p:spPr>
+        <p:txBody>
+          <a:bodyPr vert="horz" lIns="91440" tIns="45720" rIns="91440" bIns="45720" rtlCol="0"/>
+          <a:lstStyle/>
+          <a:p>
+            <a:pPr lvl="0"/>
+            <a:r>
+              <a:rPr lang="de-DE"/>
+              <a:t>Mastertextformat bearbeiten</a:t>
+            </a:r>
+          </a:p>
+          <a:p>
+            <a:pPr lvl="1"/>
+            <a:r>
+              <a:rPr lang="de-DE"/>
+              <a:t>Zweite Ebene</a:t>
+            </a:r>
+          </a:p>
+          <a:p>
+            <a:pPr lvl="2"/>
+            <a:r>
+              <a:rPr lang="de-DE"/>
+              <a:t>Dritte Ebene</a:t>
+            </a:r>
+          </a:p>
+          <a:p>
+            <a:pPr lvl="3"/>
+            <a:r>
+              <a:rPr lang="de-DE"/>
+              <a:t>Vierte Ebene</a:t>
+            </a:r>
+          </a:p>
+          <a:p>
+            <a:pPr lvl="4"/>
+            <a:r>
+              <a:rPr lang="de-DE"/>
+              <a:t>Fünfte Ebene</a:t>
+            </a:r>
+          </a:p>
+        </p:txBody>
+      </p:sp>
+      <p:sp>
+        <p:nvSpPr>
+          <p:cNvPr id="6" name="Fußzeilenplatzhalter 5"/>
+          <p:cNvSpPr>
+            <a:spLocks noGrp="1"/>
+          </p:cNvSpPr>
+          <p:nvPr>
+            <p:ph type="ftr" sz="quarter" idx="4"/>
+          </p:nvPr>
+        </p:nvSpPr>
+        <p:spPr>
+          <a:xfrm>
+            <a:off x="0" y="8685213"/>
+            <a:ext cx="2971800" cy="458787"/>
+          </a:xfrm>
+          <a:prstGeom prst="rect">
+            <a:avLst/>
+          </a:prstGeom>
+        </p:spPr>
+        <p:txBody>
+          <a:bodyPr vert="horz" lIns="91440" tIns="45720" rIns="91440" bIns="45720" rtlCol="0" anchor="b"/>
+          <a:lstStyle>
+            <a:lvl1pPr algn="l">
+              <a:defRPr sz="1200"/>
+            </a:lvl1pPr>
+          </a:lstStyle>
+          <a:p>
+            <a:endParaRPr lang="de-DE"/>
+          </a:p>
+        </p:txBody>
+      </p:sp>
+      <p:sp>
+        <p:nvSpPr>
+          <p:cNvPr id="7" name="Foliennummernplatzhalter 6"/>
+          <p:cNvSpPr>
+            <a:spLocks noGrp="1"/>
+          </p:cNvSpPr>
+          <p:nvPr>
+            <p:ph type="sldNum" sz="quarter" idx="5"/>
+          </p:nvPr>
+        </p:nvSpPr>
+        <p:spPr>
+          <a:xfrm>
+            <a:off x="3884613" y="8685213"/>
+            <a:ext cx="2971800" cy="458787"/>
+          </a:xfrm>
+          <a:prstGeom prst="rect">
+            <a:avLst/>
+          </a:prstGeom>
+        </p:spPr>
+        <p:txBody>
+          <a:bodyPr vert="horz" lIns="91440" tIns="45720" rIns="91440" bIns="45720" rtlCol="0" anchor="b"/>
+          <a:lstStyle>
+            <a:lvl1pPr algn="r">
+              <a:defRPr sz="1200"/>
+            </a:lvl1pPr>
+          </a:lstStyle>
+          <a:p>
+            <a:fld id="{E84ED224-99CB-478D-B20B-99CDA3E10D3A}" type="slidenum">
+              <a:rPr lang="de-DE" smtClean="0"/>
+              <a:t>‹Nr.›</a:t>
+            </a:fld>
+            <a:endParaRPr lang="de-DE"/>
+          </a:p>
+        </p:txBody>
+      </p:sp>
+    </p:spTree>
+    <p:extLst>
+      <p:ext uri="{BB962C8B-B14F-4D97-AF65-F5344CB8AC3E}">
+        <p14:creationId xmlns:p14="http://schemas.microsoft.com/office/powerpoint/2010/main" val="1221788875"/>
+      </p:ext>
+    </p:extLst>
+  </p:cSld>
+  <p:clrMap bg1="lt1" tx1="dk1" bg2="lt2" tx2="dk2" accent1="accent1" accent2="accent2" accent3="accent3" accent4="accent4" accent5="accent5" accent6="accent6" hlink="hlink" folHlink="folHlink"/>
+  <p:notesStyle>
+    <a:lvl1pPr marL="0" algn="l" defTabSz="914400" rtl="0" eaLnBrk="1" latinLnBrk="0" hangingPunct="1">
+      <a:defRPr sz="1200" kern="1200">
+        <a:solidFill>
+          <a:schemeClr val="tx1"/>
+        </a:solidFill>
+        <a:latin typeface="+mn-lt"/>
+        <a:ea typeface="+mn-ea"/>
+        <a:cs typeface="+mn-cs"/>
+      </a:defRPr>
+    </a:lvl1pPr>
+    <a:lvl2pPr marL="457200" algn="l" defTabSz="914400" rtl="0" eaLnBrk="1" latinLnBrk="0" hangingPunct="1">
+      <a:defRPr sz="1200" kern="1200">
+        <a:solidFill>
+          <a:schemeClr val="tx1"/>
+        </a:solidFill>
+        <a:latin typeface="+mn-lt"/>
+        <a:ea typeface="+mn-ea"/>
+        <a:cs typeface="+mn-cs"/>
+      </a:defRPr>
+    </a:lvl2pPr>
+    <a:lvl3pPr marL="914400" algn="l" defTabSz="914400" rtl="0" eaLnBrk="1" latinLnBrk="0" hangingPunct="1">
+      <a:defRPr sz="1200" kern="1200">
+        <a:solidFill>
+          <a:schemeClr val="tx1"/>
+        </a:solidFill>
+        <a:latin typeface="+mn-lt"/>
+        <a:ea typeface="+mn-ea"/>
+        <a:cs typeface="+mn-cs"/>
+      </a:defRPr>
+    </a:lvl3pPr>
+    <a:lvl4pPr marL="1371600" algn="l" defTabSz="914400" rtl="0" eaLnBrk="1" latinLnBrk="0" hangingPunct="1">
+      <a:defRPr sz="1200" kern="1200">
+        <a:solidFill>
+          <a:schemeClr val="tx1"/>
+        </a:solidFill>
+        <a:latin typeface="+mn-lt"/>
+        <a:ea typeface="+mn-ea"/>
+        <a:cs typeface="+mn-cs"/>
+      </a:defRPr>
+    </a:lvl4pPr>
+    <a:lvl5pPr marL="1828800" algn="l" defTabSz="914400" rtl="0" eaLnBrk="1" latinLnBrk="0" hangingPunct="1">
+      <a:defRPr sz="1200" kern="1200">
+        <a:solidFill>
+          <a:schemeClr val="tx1"/>
+        </a:solidFill>
+        <a:latin typeface="+mn-lt"/>
+        <a:ea typeface="+mn-ea"/>
+        <a:cs typeface="+mn-cs"/>
+      </a:defRPr>
+    </a:lvl5pPr>
+    <a:lvl6pPr marL="2286000" algn="l" defTabSz="914400" rtl="0" eaLnBrk="1" latinLnBrk="0" hangingPunct="1">
+      <a:defRPr sz="1200" kern="1200">
+        <a:solidFill>
+          <a:schemeClr val="tx1"/>
+        </a:solidFill>
+        <a:latin typeface="+mn-lt"/>
+        <a:ea typeface="+mn-ea"/>
+        <a:cs typeface="+mn-cs"/>
+      </a:defRPr>
+    </a:lvl6pPr>
+    <a:lvl7pPr marL="2743200" algn="l" defTabSz="914400" rtl="0" eaLnBrk="1" latinLnBrk="0" hangingPunct="1">
+      <a:defRPr sz="1200" kern="1200">
+        <a:solidFill>
+          <a:schemeClr val="tx1"/>
+        </a:solidFill>
+        <a:latin typeface="+mn-lt"/>
+        <a:ea typeface="+mn-ea"/>
+        <a:cs typeface="+mn-cs"/>
+      </a:defRPr>
+    </a:lvl7pPr>
+    <a:lvl8pPr marL="3200400" algn="l" defTabSz="914400" rtl="0" eaLnBrk="1" latinLnBrk="0" hangingPunct="1">
+      <a:defRPr sz="1200" kern="1200">
+        <a:solidFill>
+          <a:schemeClr val="tx1"/>
+        </a:solidFill>
+        <a:latin typeface="+mn-lt"/>
+        <a:ea typeface="+mn-ea"/>
+        <a:cs typeface="+mn-cs"/>
+      </a:defRPr>
+    </a:lvl8pPr>
+    <a:lvl9pPr marL="3657600" algn="l" defTabSz="914400" rtl="0" eaLnBrk="1" latinLnBrk="0" hangingPunct="1">
+      <a:defRPr sz="1200" kern="1200">
+        <a:solidFill>
+          <a:schemeClr val="tx1"/>
+        </a:solidFill>
+        <a:latin typeface="+mn-lt"/>
+        <a:ea typeface="+mn-ea"/>
+        <a:cs typeface="+mn-cs"/>
+      </a:defRPr>
+    </a:lvl9pPr>
+  </p:notesStyle>
+</p:notesMaster>
+</file>
+
+<file path=ppt/notesSlides/notesSlide1.xml><?xml version="1.0" encoding="utf-8"?>
+<p:notes xmlns:a="http://schemas.openxmlformats.org/drawingml/2006/main" xmlns:r="http://schemas.openxmlformats.org/officeDocument/2006/relationships" xmlns:p="http://schemas.openxmlformats.org/presentationml/2006/main">
+  <p:cSld>
+    <p:spTree>
+      <p:nvGrpSpPr>
+        <p:cNvPr id="1" name=""/>
+        <p:cNvGrpSpPr/>
+        <p:nvPr/>
+      </p:nvGrpSpPr>
+      <p:grpSpPr>
+        <a:xfrm>
+          <a:off x="0" y="0"/>
+          <a:ext cx="0" cy="0"/>
+          <a:chOff x="0" y="0"/>
+          <a:chExt cx="0" cy="0"/>
+        </a:xfrm>
+      </p:grpSpPr>
+      <p:sp>
+        <p:nvSpPr>
+          <p:cNvPr id="2" name="Folienbildplatzhalter 1"/>
+          <p:cNvSpPr>
+            <a:spLocks noGrp="1" noRot="1" noChangeAspect="1"/>
+          </p:cNvSpPr>
+          <p:nvPr>
+            <p:ph type="sldImg"/>
+          </p:nvPr>
+        </p:nvSpPr>
+        <p:spPr/>
+        <p:txBody>
+          <a:bodyPr/>
+          <a:lstStyle/>
+          <a:p>
+            <a:endParaRPr lang="de-DE"/>
+          </a:p>
+        </p:txBody>
+      </p:sp>
+      <p:sp>
+        <p:nvSpPr>
+          <p:cNvPr id="3" name="Notizenplatzhalter 2"/>
+          <p:cNvSpPr>
+            <a:spLocks noGrp="1"/>
+          </p:cNvSpPr>
+          <p:nvPr>
+            <p:ph type="body" idx="1"/>
+          </p:nvPr>
+        </p:nvSpPr>
+        <p:spPr/>
+        <p:txBody>
+          <a:bodyPr/>
+          <a:lstStyle/>
+          <a:p>
+            <a:endParaRPr lang="de-DE" dirty="0"/>
+          </a:p>
+        </p:txBody>
+      </p:sp>
+      <p:sp>
+        <p:nvSpPr>
+          <p:cNvPr id="4" name="Foliennummernplatzhalter 3"/>
+          <p:cNvSpPr>
+            <a:spLocks noGrp="1"/>
+          </p:cNvSpPr>
+          <p:nvPr>
+            <p:ph type="sldNum" sz="quarter" idx="5"/>
+          </p:nvPr>
+        </p:nvSpPr>
+        <p:spPr/>
+        <p:txBody>
+          <a:bodyPr/>
+          <a:lstStyle/>
+          <a:p>
+            <a:fld id="{E84ED224-99CB-478D-B20B-99CDA3E10D3A}" type="slidenum">
+              <a:rPr lang="de-DE" smtClean="0"/>
+              <a:t>10</a:t>
+            </a:fld>
+            <a:endParaRPr lang="de-DE"/>
+          </a:p>
+        </p:txBody>
+      </p:sp>
+    </p:spTree>
+    <p:extLst>
+      <p:ext uri="{BB962C8B-B14F-4D97-AF65-F5344CB8AC3E}">
+        <p14:creationId xmlns:p14="http://schemas.microsoft.com/office/powerpoint/2010/main" val="1154090607"/>
+      </p:ext>
+    </p:extLst>
+  </p:cSld>
+  <p:clrMapOvr>
+    <a:masterClrMapping/>
+  </p:clrMapOvr>
+</p:notes>
+</file>
+
+<file path=ppt/notesSlides/notesSlide2.xml><?xml version="1.0" encoding="utf-8"?>
+<p:notes xmlns:a="http://schemas.openxmlformats.org/drawingml/2006/main" xmlns:r="http://schemas.openxmlformats.org/officeDocument/2006/relationships" xmlns:p="http://schemas.openxmlformats.org/presentationml/2006/main">
+  <p:cSld>
+    <p:spTree>
+      <p:nvGrpSpPr>
+        <p:cNvPr id="1" name="">
+          <a:extLst>
+            <a:ext uri="{FF2B5EF4-FFF2-40B4-BE49-F238E27FC236}">
+              <a16:creationId xmlns:a16="http://schemas.microsoft.com/office/drawing/2014/main" id="{7F498DA0-BEAB-8C2A-3D97-7166AD133037}"/>
+            </a:ext>
+          </a:extLst>
+        </p:cNvPr>
+        <p:cNvGrpSpPr/>
+        <p:nvPr/>
+      </p:nvGrpSpPr>
+      <p:grpSpPr>
+        <a:xfrm>
+          <a:off x="0" y="0"/>
+          <a:ext cx="0" cy="0"/>
+          <a:chOff x="0" y="0"/>
+          <a:chExt cx="0" cy="0"/>
+        </a:xfrm>
+      </p:grpSpPr>
+      <p:sp>
+        <p:nvSpPr>
+          <p:cNvPr id="2" name="Folienbildplatzhalter 1">
+            <a:extLst>
+              <a:ext uri="{FF2B5EF4-FFF2-40B4-BE49-F238E27FC236}">
+                <a16:creationId xmlns:a16="http://schemas.microsoft.com/office/drawing/2014/main" id="{D422B4B1-11F3-3CB7-185E-59D0C742D156}"/>
+              </a:ext>
+            </a:extLst>
+          </p:cNvPr>
+          <p:cNvSpPr>
+            <a:spLocks noGrp="1" noRot="1" noChangeAspect="1"/>
+          </p:cNvSpPr>
+          <p:nvPr>
+            <p:ph type="sldImg"/>
+          </p:nvPr>
+        </p:nvSpPr>
+        <p:spPr/>
+        <p:txBody>
+          <a:bodyPr/>
+          <a:lstStyle/>
+          <a:p>
+            <a:endParaRPr lang="de-DE"/>
+          </a:p>
+        </p:txBody>
+      </p:sp>
+      <p:sp>
+        <p:nvSpPr>
+          <p:cNvPr id="3" name="Notizenplatzhalter 2">
+            <a:extLst>
+              <a:ext uri="{FF2B5EF4-FFF2-40B4-BE49-F238E27FC236}">
+                <a16:creationId xmlns:a16="http://schemas.microsoft.com/office/drawing/2014/main" id="{4BBC6CED-5C19-82D7-ACC7-671CC39AAA03}"/>
+              </a:ext>
+            </a:extLst>
+          </p:cNvPr>
+          <p:cNvSpPr>
+            <a:spLocks noGrp="1"/>
+          </p:cNvSpPr>
+          <p:nvPr>
+            <p:ph type="body" idx="1"/>
+          </p:nvPr>
+        </p:nvSpPr>
+        <p:spPr/>
+        <p:txBody>
+          <a:bodyPr/>
+          <a:lstStyle/>
+          <a:p>
+            <a:endParaRPr lang="de-DE" dirty="0"/>
+          </a:p>
+        </p:txBody>
+      </p:sp>
+      <p:sp>
+        <p:nvSpPr>
+          <p:cNvPr id="4" name="Foliennummernplatzhalter 3">
+            <a:extLst>
+              <a:ext uri="{FF2B5EF4-FFF2-40B4-BE49-F238E27FC236}">
+                <a16:creationId xmlns:a16="http://schemas.microsoft.com/office/drawing/2014/main" id="{EDBFF3AC-CA2A-5FDF-C1D0-2A953AFD5102}"/>
+              </a:ext>
+            </a:extLst>
+          </p:cNvPr>
+          <p:cNvSpPr>
+            <a:spLocks noGrp="1"/>
+          </p:cNvSpPr>
+          <p:nvPr>
+            <p:ph type="sldNum" sz="quarter" idx="5"/>
+          </p:nvPr>
+        </p:nvSpPr>
+        <p:spPr/>
+        <p:txBody>
+          <a:bodyPr/>
+          <a:lstStyle/>
+          <a:p>
+            <a:fld id="{E84ED224-99CB-478D-B20B-99CDA3E10D3A}" type="slidenum">
+              <a:rPr lang="de-DE" smtClean="0"/>
+              <a:t>11</a:t>
+            </a:fld>
+            <a:endParaRPr lang="de-DE"/>
+          </a:p>
+        </p:txBody>
+      </p:sp>
+    </p:spTree>
+    <p:extLst>
+      <p:ext uri="{BB962C8B-B14F-4D97-AF65-F5344CB8AC3E}">
+        <p14:creationId xmlns:p14="http://schemas.microsoft.com/office/powerpoint/2010/main" val="2416632946"/>
+      </p:ext>
+    </p:extLst>
+  </p:cSld>
+  <p:clrMapOvr>
+    <a:masterClrMapping/>
+  </p:clrMapOvr>
+</p:notes>
 </file>
 
 <file path=ppt/slideLayouts/slideLayout1.xml><?xml version="1.0" encoding="utf-8"?>
@@ -262,7 +830,7 @@
           <a:p>
             <a:fld id="{AA6097CB-95AD-42A3-B3C6-49BA0286B305}" type="datetimeFigureOut">
               <a:rPr lang="de-DE" smtClean="0"/>
-              <a:t>26.07.2026</a:t>
+              <a:t>29.07.2026</a:t>
             </a:fld>
             <a:endParaRPr lang="de-DE"/>
           </a:p>
@@ -460,7 +1028,7 @@
           <a:p>
             <a:fld id="{AA6097CB-95AD-42A3-B3C6-49BA0286B305}" type="datetimeFigureOut">
               <a:rPr lang="de-DE" smtClean="0"/>
-              <a:t>26.07.2026</a:t>
+              <a:t>29.07.2026</a:t>
             </a:fld>
             <a:endParaRPr lang="de-DE"/>
           </a:p>
@@ -668,7 +1236,7 @@
           <a:p>
             <a:fld id="{AA6097CB-95AD-42A3-B3C6-49BA0286B305}" type="datetimeFigureOut">
               <a:rPr lang="de-DE" smtClean="0"/>
-              <a:t>26.07.2026</a:t>
+              <a:t>29.07.2026</a:t>
             </a:fld>
             <a:endParaRPr lang="de-DE"/>
           </a:p>
@@ -866,7 +1434,7 @@
           <a:p>
             <a:fld id="{AA6097CB-95AD-42A3-B3C6-49BA0286B305}" type="datetimeFigureOut">
               <a:rPr lang="de-DE" smtClean="0"/>
-              <a:t>26.07.2026</a:t>
+              <a:t>29.07.2026</a:t>
             </a:fld>
             <a:endParaRPr lang="de-DE"/>
           </a:p>
@@ -1141,7 +1709,7 @@
           <a:p>
             <a:fld id="{AA6097CB-95AD-42A3-B3C6-49BA0286B305}" type="datetimeFigureOut">
               <a:rPr lang="de-DE" smtClean="0"/>
-              <a:t>26.07.2026</a:t>
+              <a:t>29.07.2026</a:t>
             </a:fld>
             <a:endParaRPr lang="de-DE"/>
           </a:p>
@@ -1406,7 +1974,7 @@
           <a:p>
             <a:fld id="{AA6097CB-95AD-42A3-B3C6-49BA0286B305}" type="datetimeFigureOut">
               <a:rPr lang="de-DE" smtClean="0"/>
-              <a:t>26.07.2026</a:t>
+              <a:t>29.07.2026</a:t>
             </a:fld>
             <a:endParaRPr lang="de-DE"/>
           </a:p>
@@ -1818,7 +2386,7 @@
           <a:p>
             <a:fld id="{AA6097CB-95AD-42A3-B3C6-49BA0286B305}" type="datetimeFigureOut">
               <a:rPr lang="de-DE" smtClean="0"/>
-              <a:t>26.07.2026</a:t>
+              <a:t>29.07.2026</a:t>
             </a:fld>
             <a:endParaRPr lang="de-DE"/>
           </a:p>
@@ -1959,7 +2527,7 @@
           <a:p>
             <a:fld id="{AA6097CB-95AD-42A3-B3C6-49BA0286B305}" type="datetimeFigureOut">
               <a:rPr lang="de-DE" smtClean="0"/>
-              <a:t>26.07.2026</a:t>
+              <a:t>29.07.2026</a:t>
             </a:fld>
             <a:endParaRPr lang="de-DE"/>
           </a:p>
@@ -2072,7 +2640,7 @@
           <a:p>
             <a:fld id="{AA6097CB-95AD-42A3-B3C6-49BA0286B305}" type="datetimeFigureOut">
               <a:rPr lang="de-DE" smtClean="0"/>
-              <a:t>26.07.2026</a:t>
+              <a:t>29.07.2026</a:t>
             </a:fld>
             <a:endParaRPr lang="de-DE"/>
           </a:p>
@@ -2383,7 +2951,7 @@
           <a:p>
             <a:fld id="{AA6097CB-95AD-42A3-B3C6-49BA0286B305}" type="datetimeFigureOut">
               <a:rPr lang="de-DE" smtClean="0"/>
-              <a:t>26.07.2026</a:t>
+              <a:t>29.07.2026</a:t>
             </a:fld>
             <a:endParaRPr lang="de-DE"/>
           </a:p>
@@ -2671,7 +3239,7 @@
           <a:p>
             <a:fld id="{AA6097CB-95AD-42A3-B3C6-49BA0286B305}" type="datetimeFigureOut">
               <a:rPr lang="de-DE" smtClean="0"/>
-              <a:t>26.07.2026</a:t>
+              <a:t>29.07.2026</a:t>
             </a:fld>
             <a:endParaRPr lang="de-DE"/>
           </a:p>
@@ -2912,7 +3480,7 @@
           <a:p>
             <a:fld id="{AA6097CB-95AD-42A3-B3C6-49BA0286B305}" type="datetimeFigureOut">
               <a:rPr lang="de-DE" smtClean="0"/>
-              <a:t>26.07.2026</a:t>
+              <a:t>29.07.2026</a:t>
             </a:fld>
             <a:endParaRPr lang="de-DE"/>
           </a:p>
@@ -3585,12 +4153,18 @@
 </p:sld>
 </file>
 
-<file path=ppt/slides/slide2.xml><?xml version="1.0" encoding="utf-8"?>
+<file path=ppt/slides/slide10.xml><?xml version="1.0" encoding="utf-8"?>
 <p:sld xmlns:a="http://schemas.openxmlformats.org/drawingml/2006/main" xmlns:r="http://schemas.openxmlformats.org/officeDocument/2006/relationships" xmlns:p="http://schemas.openxmlformats.org/presentationml/2006/main">
   <p:cSld>
     <p:spTree>
       <p:nvGrpSpPr>
-        <p:cNvPr id="1" name=""/>
+        <p:cNvPr id="1" name="">
+          <a:extLst>
+            <a:ext uri="{FF2B5EF4-FFF2-40B4-BE49-F238E27FC236}">
+              <a16:creationId xmlns:a16="http://schemas.microsoft.com/office/drawing/2014/main" id="{F9628124-D9A0-24AD-76FC-DDE4E75CCCE7}"/>
+            </a:ext>
+          </a:extLst>
+        </p:cNvPr>
         <p:cNvGrpSpPr/>
         <p:nvPr/>
       </p:nvGrpSpPr>
@@ -3604,10 +4178,10 @@
       </p:grpSpPr>
       <p:sp>
         <p:nvSpPr>
-          <p:cNvPr id="5" name="Rechteck: abgerundete Ecken 4">
-            <a:extLst>
-              <a:ext uri="{FF2B5EF4-FFF2-40B4-BE49-F238E27FC236}">
-                <a16:creationId xmlns:a16="http://schemas.microsoft.com/office/drawing/2014/main" id="{F45792B4-6B91-1C2D-41B6-8BABC018F566}"/>
+          <p:cNvPr id="28" name="Rechteck: abgerundete Ecken 27">
+            <a:extLst>
+              <a:ext uri="{FF2B5EF4-FFF2-40B4-BE49-F238E27FC236}">
+                <a16:creationId xmlns:a16="http://schemas.microsoft.com/office/drawing/2014/main" id="{739DAC38-E88D-1D30-89DB-6BC2780766BB}"/>
               </a:ext>
             </a:extLst>
           </p:cNvPr>
@@ -3616,14 +4190,14 @@
         </p:nvSpPr>
         <p:spPr>
           <a:xfrm>
-            <a:off x="10432025" y="6331974"/>
-            <a:ext cx="1563329" cy="432620"/>
+            <a:off x="314632" y="366208"/>
+            <a:ext cx="3333136" cy="523219"/>
           </a:xfrm>
           <a:prstGeom prst="roundRect">
             <a:avLst/>
           </a:prstGeom>
           <a:solidFill>
-            <a:srgbClr val="002060"/>
+            <a:schemeClr val="tx1"/>
           </a:solidFill>
         </p:spPr>
         <p:style>
@@ -3647,85 +4221,16 @@
           <a:lstStyle/>
           <a:p>
             <a:pPr algn="ctr"/>
-            <a:endParaRPr lang="de-DE"/>
-          </a:p>
-        </p:txBody>
-      </p:sp>
-      <p:sp>
-        <p:nvSpPr>
-          <p:cNvPr id="7" name="Textfeld 6">
-            <a:extLst>
-              <a:ext uri="{FF2B5EF4-FFF2-40B4-BE49-F238E27FC236}">
-                <a16:creationId xmlns:a16="http://schemas.microsoft.com/office/drawing/2014/main" id="{8565CCB5-21F8-2B1E-F77F-85305388AE72}"/>
-              </a:ext>
-            </a:extLst>
-          </p:cNvPr>
-          <p:cNvSpPr txBox="1"/>
-          <p:nvPr/>
-        </p:nvSpPr>
-        <p:spPr>
-          <a:xfrm>
-            <a:off x="10432026" y="6363618"/>
-            <a:ext cx="1759974" cy="369332"/>
-          </a:xfrm>
-          <a:prstGeom prst="rect">
-            <a:avLst/>
-          </a:prstGeom>
-          <a:noFill/>
-        </p:spPr>
-        <p:txBody>
-          <a:bodyPr wrap="square" rtlCol="0">
-            <a:spAutoFit/>
-          </a:bodyPr>
-          <a:lstStyle/>
-          <a:p>
-            <a:r>
-              <a:rPr lang="de-DE" dirty="0">
-                <a:solidFill>
-                  <a:schemeClr val="bg1"/>
-                </a:solidFill>
-              </a:rPr>
-              <a:t>Tobias Daiger</a:t>
-            </a:r>
-          </a:p>
-        </p:txBody>
-      </p:sp>
-      <p:pic>
-        <p:nvPicPr>
-          <p:cNvPr id="9" name="Grafik 8">
-            <a:extLst>
-              <a:ext uri="{FF2B5EF4-FFF2-40B4-BE49-F238E27FC236}">
-                <a16:creationId xmlns:a16="http://schemas.microsoft.com/office/drawing/2014/main" id="{74F02DB5-F33D-AD37-EC67-05F093E20909}"/>
-              </a:ext>
-            </a:extLst>
-          </p:cNvPr>
-          <p:cNvPicPr>
-            <a:picLocks noChangeAspect="1"/>
-          </p:cNvPicPr>
-          <p:nvPr/>
-        </p:nvPicPr>
-        <p:blipFill>
-          <a:blip r:embed="rId2"/>
-          <a:stretch>
-            <a:fillRect/>
-          </a:stretch>
-        </p:blipFill>
-        <p:spPr>
-          <a:xfrm>
-            <a:off x="595282" y="69706"/>
-            <a:ext cx="9712032" cy="6262268"/>
-          </a:xfrm>
-          <a:prstGeom prst="rect">
-            <a:avLst/>
-          </a:prstGeom>
-        </p:spPr>
-      </p:pic>
-      <p:sp>
-        <p:nvSpPr>
-          <p:cNvPr id="11" name="Rechteck: abgerundete Ecken 10">
-            <a:extLst>
-              <a:ext uri="{FF2B5EF4-FFF2-40B4-BE49-F238E27FC236}">
-                <a16:creationId xmlns:a16="http://schemas.microsoft.com/office/drawing/2014/main" id="{2903E302-FC51-E93A-65E2-60B6E8C169D7}"/>
+            <a:endParaRPr lang="de-DE" dirty="0"/>
+          </a:p>
+        </p:txBody>
+      </p:sp>
+      <p:sp>
+        <p:nvSpPr>
+          <p:cNvPr id="24" name="Rechteck: abgerundete Ecken 23">
+            <a:extLst>
+              <a:ext uri="{FF2B5EF4-FFF2-40B4-BE49-F238E27FC236}">
+                <a16:creationId xmlns:a16="http://schemas.microsoft.com/office/drawing/2014/main" id="{42C469DC-64D0-C7A7-A467-526250A7024D}"/>
               </a:ext>
             </a:extLst>
           </p:cNvPr>
@@ -3734,14 +4239,14 @@
         </p:nvSpPr>
         <p:spPr>
           <a:xfrm>
-            <a:off x="4264790" y="211393"/>
-            <a:ext cx="1936955" cy="629265"/>
+            <a:off x="7647035" y="5270464"/>
+            <a:ext cx="1563329" cy="432620"/>
           </a:xfrm>
           <a:prstGeom prst="roundRect">
             <a:avLst/>
           </a:prstGeom>
           <a:solidFill>
-            <a:schemeClr val="accent2"/>
+            <a:schemeClr val="tx1"/>
           </a:solidFill>
         </p:spPr>
         <p:style>
@@ -3765,234 +4270,16 @@
           <a:lstStyle/>
           <a:p>
             <a:pPr algn="ctr"/>
-            <a:endParaRPr lang="de-DE"/>
-          </a:p>
-        </p:txBody>
-      </p:sp>
-      <p:sp>
-        <p:nvSpPr>
-          <p:cNvPr id="13" name="Textfeld 12">
-            <a:extLst>
-              <a:ext uri="{FF2B5EF4-FFF2-40B4-BE49-F238E27FC236}">
-                <a16:creationId xmlns:a16="http://schemas.microsoft.com/office/drawing/2014/main" id="{C4C83508-9AA4-90B1-7C54-C0C91AF95019}"/>
-              </a:ext>
-            </a:extLst>
-          </p:cNvPr>
-          <p:cNvSpPr txBox="1"/>
-          <p:nvPr/>
-        </p:nvSpPr>
-        <p:spPr>
-          <a:xfrm>
-            <a:off x="4604002" y="270387"/>
-            <a:ext cx="1774723" cy="461665"/>
-          </a:xfrm>
-          <a:prstGeom prst="rect">
-            <a:avLst/>
-          </a:prstGeom>
-          <a:noFill/>
-        </p:spPr>
-        <p:txBody>
-          <a:bodyPr wrap="square" rtlCol="0">
-            <a:spAutoFit/>
-          </a:bodyPr>
-          <a:lstStyle/>
-          <a:p>
-            <a:r>
-              <a:rPr lang="de-DE" sz="2400" b="1" dirty="0">
-                <a:solidFill>
-                  <a:schemeClr val="bg1"/>
-                </a:solidFill>
-              </a:rPr>
-              <a:t>Testing</a:t>
-            </a:r>
-          </a:p>
-        </p:txBody>
-      </p:sp>
-    </p:spTree>
-    <p:extLst>
-      <p:ext uri="{BB962C8B-B14F-4D97-AF65-F5344CB8AC3E}">
-        <p14:creationId xmlns:p14="http://schemas.microsoft.com/office/powerpoint/2010/main" val="2457927386"/>
-      </p:ext>
-    </p:extLst>
-  </p:cSld>
-  <p:clrMapOvr>
-    <a:masterClrMapping/>
-  </p:clrMapOvr>
-</p:sld>
-</file>
-
-<file path=ppt/slides/slide3.xml><?xml version="1.0" encoding="utf-8"?>
-<p:sld xmlns:a="http://schemas.openxmlformats.org/drawingml/2006/main" xmlns:r="http://schemas.openxmlformats.org/officeDocument/2006/relationships" xmlns:p="http://schemas.openxmlformats.org/presentationml/2006/main">
-  <p:cSld>
-    <p:spTree>
-      <p:nvGrpSpPr>
-        <p:cNvPr id="1" name="">
-          <a:extLst>
-            <a:ext uri="{FF2B5EF4-FFF2-40B4-BE49-F238E27FC236}">
-              <a16:creationId xmlns:a16="http://schemas.microsoft.com/office/drawing/2014/main" id="{51F831FF-6E06-0538-BD9B-D311B1CE648D}"/>
-            </a:ext>
-          </a:extLst>
-        </p:cNvPr>
-        <p:cNvGrpSpPr/>
-        <p:nvPr/>
-      </p:nvGrpSpPr>
-      <p:grpSpPr>
-        <a:xfrm>
-          <a:off x="0" y="0"/>
-          <a:ext cx="0" cy="0"/>
-          <a:chOff x="0" y="0"/>
-          <a:chExt cx="0" cy="0"/>
-        </a:xfrm>
-      </p:grpSpPr>
-      <p:pic>
-        <p:nvPicPr>
-          <p:cNvPr id="3" name="Grafik 2">
-            <a:extLst>
-              <a:ext uri="{FF2B5EF4-FFF2-40B4-BE49-F238E27FC236}">
-                <a16:creationId xmlns:a16="http://schemas.microsoft.com/office/drawing/2014/main" id="{9F0F8AB2-9E63-5D52-6E9A-1E1CD018E5B5}"/>
-              </a:ext>
-            </a:extLst>
-          </p:cNvPr>
-          <p:cNvPicPr>
-            <a:picLocks noChangeAspect="1"/>
-          </p:cNvPicPr>
-          <p:nvPr/>
-        </p:nvPicPr>
-        <p:blipFill>
-          <a:blip r:embed="rId2">
-            <a:extLst>
-              <a:ext uri="{28A0092B-C50C-407E-A947-70E740481C1C}">
-                <a14:useLocalDpi xmlns:a14="http://schemas.microsoft.com/office/drawing/2010/main" val="0"/>
-              </a:ext>
-            </a:extLst>
-          </a:blip>
-          <a:stretch>
-            <a:fillRect/>
-          </a:stretch>
-        </p:blipFill>
-        <p:spPr>
-          <a:xfrm>
-            <a:off x="1060040" y="1188320"/>
-            <a:ext cx="4762500" cy="3571875"/>
-          </a:xfrm>
-          <a:prstGeom prst="rect">
-            <a:avLst/>
-          </a:prstGeom>
-        </p:spPr>
-      </p:pic>
-      <p:pic>
-        <p:nvPicPr>
-          <p:cNvPr id="5" name="Grafik 4">
-            <a:extLst>
-              <a:ext uri="{FF2B5EF4-FFF2-40B4-BE49-F238E27FC236}">
-                <a16:creationId xmlns:a16="http://schemas.microsoft.com/office/drawing/2014/main" id="{ED7B69D5-7422-EA29-918D-CCABFD860DFF}"/>
-              </a:ext>
-            </a:extLst>
-          </p:cNvPr>
-          <p:cNvPicPr>
-            <a:picLocks noChangeAspect="1"/>
-          </p:cNvPicPr>
-          <p:nvPr/>
-        </p:nvPicPr>
-        <p:blipFill>
-          <a:blip r:embed="rId3">
-            <a:extLst>
-              <a:ext uri="{28A0092B-C50C-407E-A947-70E740481C1C}">
-                <a14:useLocalDpi xmlns:a14="http://schemas.microsoft.com/office/drawing/2010/main" val="0"/>
-              </a:ext>
-            </a:extLst>
-          </a:blip>
-          <a:stretch>
-            <a:fillRect/>
-          </a:stretch>
-        </p:blipFill>
-        <p:spPr>
-          <a:xfrm>
-            <a:off x="7346847" y="1188320"/>
-            <a:ext cx="3790950" cy="5048250"/>
-          </a:xfrm>
-          <a:prstGeom prst="rect">
-            <a:avLst/>
-          </a:prstGeom>
-        </p:spPr>
-      </p:pic>
-      <p:sp>
-        <p:nvSpPr>
-          <p:cNvPr id="7" name="Textfeld 6">
-            <a:extLst>
-              <a:ext uri="{FF2B5EF4-FFF2-40B4-BE49-F238E27FC236}">
-                <a16:creationId xmlns:a16="http://schemas.microsoft.com/office/drawing/2014/main" id="{EA350B8D-D4BB-9AFF-552B-DFEF0A1FD48D}"/>
-              </a:ext>
-            </a:extLst>
-          </p:cNvPr>
-          <p:cNvSpPr txBox="1"/>
-          <p:nvPr/>
-        </p:nvSpPr>
-        <p:spPr>
-          <a:xfrm>
-            <a:off x="8020971" y="6409246"/>
-            <a:ext cx="3293807" cy="369332"/>
-          </a:xfrm>
-          <a:prstGeom prst="rect">
-            <a:avLst/>
-          </a:prstGeom>
-          <a:noFill/>
-        </p:spPr>
-        <p:txBody>
-          <a:bodyPr wrap="square" rtlCol="0">
-            <a:spAutoFit/>
-          </a:bodyPr>
-          <a:lstStyle/>
-          <a:p>
-            <a:r>
-              <a:rPr lang="de-DE" dirty="0" err="1"/>
-              <a:t>EntleBucher</a:t>
-            </a:r>
             <a:endParaRPr lang="de-DE" dirty="0"/>
           </a:p>
         </p:txBody>
       </p:sp>
       <p:sp>
         <p:nvSpPr>
-          <p:cNvPr id="9" name="Textfeld 8">
-            <a:extLst>
-              <a:ext uri="{FF2B5EF4-FFF2-40B4-BE49-F238E27FC236}">
-                <a16:creationId xmlns:a16="http://schemas.microsoft.com/office/drawing/2014/main" id="{D10B3259-4B83-1874-FA06-8290FCFC4B83}"/>
-              </a:ext>
-            </a:extLst>
-          </p:cNvPr>
-          <p:cNvSpPr txBox="1"/>
-          <p:nvPr/>
-        </p:nvSpPr>
-        <p:spPr>
-          <a:xfrm>
-            <a:off x="1762738" y="5041365"/>
-            <a:ext cx="3293807" cy="369332"/>
-          </a:xfrm>
-          <a:prstGeom prst="rect">
-            <a:avLst/>
-          </a:prstGeom>
-          <a:noFill/>
-        </p:spPr>
-        <p:txBody>
-          <a:bodyPr wrap="square" rtlCol="0">
-            <a:spAutoFit/>
-          </a:bodyPr>
-          <a:lstStyle/>
-          <a:p>
-            <a:r>
-              <a:rPr lang="de-DE" dirty="0"/>
-              <a:t>Appenzeller</a:t>
-            </a:r>
-          </a:p>
-        </p:txBody>
-      </p:sp>
-      <p:sp>
-        <p:nvSpPr>
-          <p:cNvPr id="11" name="Rechteck: abgerundete Ecken 10">
-            <a:extLst>
-              <a:ext uri="{FF2B5EF4-FFF2-40B4-BE49-F238E27FC236}">
-                <a16:creationId xmlns:a16="http://schemas.microsoft.com/office/drawing/2014/main" id="{3C60246F-A52F-976D-64B5-EC2067068E25}"/>
+          <p:cNvPr id="23" name="Rechteck: abgerundete Ecken 22">
+            <a:extLst>
+              <a:ext uri="{FF2B5EF4-FFF2-40B4-BE49-F238E27FC236}">
+                <a16:creationId xmlns:a16="http://schemas.microsoft.com/office/drawing/2014/main" id="{238FB204-6084-A622-50D0-F6278FFE191F}"/>
               </a:ext>
             </a:extLst>
           </p:cNvPr>
@@ -4001,14 +4288,14 @@
         </p:nvSpPr>
         <p:spPr>
           <a:xfrm>
-            <a:off x="4301611" y="330813"/>
-            <a:ext cx="1936955" cy="629265"/>
+            <a:off x="1795615" y="5241602"/>
+            <a:ext cx="1563329" cy="432620"/>
           </a:xfrm>
           <a:prstGeom prst="roundRect">
             <a:avLst/>
           </a:prstGeom>
           <a:solidFill>
-            <a:schemeClr val="accent2"/>
+            <a:schemeClr val="tx1"/>
           </a:solidFill>
         </p:spPr>
         <p:style>
@@ -4032,16 +4319,16 @@
           <a:lstStyle/>
           <a:p>
             <a:pPr algn="ctr"/>
-            <a:endParaRPr lang="de-DE"/>
-          </a:p>
-        </p:txBody>
-      </p:sp>
-      <p:sp>
-        <p:nvSpPr>
-          <p:cNvPr id="13" name="Textfeld 12">
-            <a:extLst>
-              <a:ext uri="{FF2B5EF4-FFF2-40B4-BE49-F238E27FC236}">
-                <a16:creationId xmlns:a16="http://schemas.microsoft.com/office/drawing/2014/main" id="{F33070F6-C8B2-7A5A-384B-E297120A3A9E}"/>
+            <a:endParaRPr lang="de-DE" dirty="0"/>
+          </a:p>
+        </p:txBody>
+      </p:sp>
+      <p:sp>
+        <p:nvSpPr>
+          <p:cNvPr id="7" name="Textfeld 6">
+            <a:extLst>
+              <a:ext uri="{FF2B5EF4-FFF2-40B4-BE49-F238E27FC236}">
+                <a16:creationId xmlns:a16="http://schemas.microsoft.com/office/drawing/2014/main" id="{703BA531-CA49-8AB8-11D2-EE9A1EDC05D8}"/>
               </a:ext>
             </a:extLst>
           </p:cNvPr>
@@ -4050,8 +4337,8 @@
         </p:nvSpPr>
         <p:spPr>
           <a:xfrm>
-            <a:off x="4640823" y="389807"/>
-            <a:ext cx="1774723" cy="461665"/>
+            <a:off x="7987170" y="5304890"/>
+            <a:ext cx="883061" cy="369332"/>
           </a:xfrm>
           <a:prstGeom prst="rect">
             <a:avLst/>
@@ -4065,22 +4352,61 @@
           <a:lstStyle/>
           <a:p>
             <a:r>
-              <a:rPr lang="de-DE" sz="2400" b="1" dirty="0">
+              <a:rPr lang="de-DE" dirty="0">
                 <a:solidFill>
                   <a:schemeClr val="bg1"/>
                 </a:solidFill>
               </a:rPr>
-              <a:t>Testing</a:t>
-            </a:r>
-          </a:p>
-        </p:txBody>
-      </p:sp>
-      <p:sp>
-        <p:nvSpPr>
-          <p:cNvPr id="4" name="Rechteck: abgerundete Ecken 3">
-            <a:extLst>
-              <a:ext uri="{FF2B5EF4-FFF2-40B4-BE49-F238E27FC236}">
-                <a16:creationId xmlns:a16="http://schemas.microsoft.com/office/drawing/2014/main" id="{FC718E7D-D760-6945-33C5-07123BB63CF0}"/>
+              <a:t>Vizsla</a:t>
+            </a:r>
+          </a:p>
+        </p:txBody>
+      </p:sp>
+      <p:sp>
+        <p:nvSpPr>
+          <p:cNvPr id="9" name="Textfeld 8">
+            <a:extLst>
+              <a:ext uri="{FF2B5EF4-FFF2-40B4-BE49-F238E27FC236}">
+                <a16:creationId xmlns:a16="http://schemas.microsoft.com/office/drawing/2014/main" id="{E5FF8781-D6C2-16C9-A191-C2DAC5CD5893}"/>
+              </a:ext>
+            </a:extLst>
+          </p:cNvPr>
+          <p:cNvSpPr txBox="1"/>
+          <p:nvPr/>
+        </p:nvSpPr>
+        <p:spPr>
+          <a:xfrm>
+            <a:off x="2234378" y="5277340"/>
+            <a:ext cx="685804" cy="369332"/>
+          </a:xfrm>
+          <a:prstGeom prst="rect">
+            <a:avLst/>
+          </a:prstGeom>
+          <a:noFill/>
+        </p:spPr>
+        <p:txBody>
+          <a:bodyPr wrap="square" rtlCol="0">
+            <a:spAutoFit/>
+          </a:bodyPr>
+          <a:lstStyle/>
+          <a:p>
+            <a:r>
+              <a:rPr lang="de-DE" dirty="0">
+                <a:solidFill>
+                  <a:schemeClr val="bg1"/>
+                </a:solidFill>
+              </a:rPr>
+              <a:t>Merz</a:t>
+            </a:r>
+          </a:p>
+        </p:txBody>
+      </p:sp>
+      <p:sp>
+        <p:nvSpPr>
+          <p:cNvPr id="11" name="Rechteck: abgerundete Ecken 10">
+            <a:extLst>
+              <a:ext uri="{FF2B5EF4-FFF2-40B4-BE49-F238E27FC236}">
+                <a16:creationId xmlns:a16="http://schemas.microsoft.com/office/drawing/2014/main" id="{0EDB19E0-8B97-86EA-0953-12401C204065}"/>
               </a:ext>
             </a:extLst>
           </p:cNvPr>
@@ -4089,14 +4415,14 @@
         </p:nvSpPr>
         <p:spPr>
           <a:xfrm>
-            <a:off x="10432025" y="6331974"/>
-            <a:ext cx="1563329" cy="432620"/>
+            <a:off x="4301611" y="330813"/>
+            <a:ext cx="1936955" cy="629265"/>
           </a:xfrm>
           <a:prstGeom prst="roundRect">
             <a:avLst/>
           </a:prstGeom>
           <a:solidFill>
-            <a:srgbClr val="002060"/>
+            <a:schemeClr val="accent2"/>
           </a:solidFill>
         </p:spPr>
         <p:style>
@@ -4126,10 +4452,10 @@
       </p:sp>
       <p:sp>
         <p:nvSpPr>
-          <p:cNvPr id="8" name="Textfeld 7">
-            <a:extLst>
-              <a:ext uri="{FF2B5EF4-FFF2-40B4-BE49-F238E27FC236}">
-                <a16:creationId xmlns:a16="http://schemas.microsoft.com/office/drawing/2014/main" id="{F5F6AA3F-B3F7-A8E2-F9B9-30E6E2566B79}"/>
+          <p:cNvPr id="13" name="Textfeld 12">
+            <a:extLst>
+              <a:ext uri="{FF2B5EF4-FFF2-40B4-BE49-F238E27FC236}">
+                <a16:creationId xmlns:a16="http://schemas.microsoft.com/office/drawing/2014/main" id="{DE1C3D12-6945-509B-8554-2B6E6D1B59A5}"/>
               </a:ext>
             </a:extLst>
           </p:cNvPr>
@@ -4138,8 +4464,8 @@
         </p:nvSpPr>
         <p:spPr>
           <a:xfrm>
-            <a:off x="10432026" y="6363618"/>
-            <a:ext cx="1759974" cy="369332"/>
+            <a:off x="4640823" y="389807"/>
+            <a:ext cx="1774723" cy="461665"/>
           </a:xfrm>
           <a:prstGeom prst="rect">
             <a:avLst/>
@@ -4153,22 +4479,124 @@
           <a:lstStyle/>
           <a:p>
             <a:r>
-              <a:rPr lang="de-DE" dirty="0">
+              <a:rPr lang="de-DE" sz="2400" b="1" dirty="0">
                 <a:solidFill>
                   <a:schemeClr val="bg1"/>
                 </a:solidFill>
               </a:rPr>
-              <a:t>Tobias Daiger</a:t>
-            </a:r>
-          </a:p>
-        </p:txBody>
-      </p:sp>
-      <p:sp>
-        <p:nvSpPr>
-          <p:cNvPr id="2" name="Ungleich 1">
-            <a:extLst>
-              <a:ext uri="{FF2B5EF4-FFF2-40B4-BE49-F238E27FC236}">
-                <a16:creationId xmlns:a16="http://schemas.microsoft.com/office/drawing/2014/main" id="{7D7F50D0-AECA-8481-513E-F6C43733F3B4}"/>
+              <a:t>Testing</a:t>
+            </a:r>
+          </a:p>
+        </p:txBody>
+      </p:sp>
+      <p:pic>
+        <p:nvPicPr>
+          <p:cNvPr id="12" name="Grafik 11">
+            <a:extLst>
+              <a:ext uri="{FF2B5EF4-FFF2-40B4-BE49-F238E27FC236}">
+                <a16:creationId xmlns:a16="http://schemas.microsoft.com/office/drawing/2014/main" id="{CEC59020-EBFC-8E4A-7C8A-DB608A591E0F}"/>
+              </a:ext>
+            </a:extLst>
+          </p:cNvPr>
+          <p:cNvPicPr>
+            <a:picLocks noChangeAspect="1"/>
+          </p:cNvPicPr>
+          <p:nvPr/>
+        </p:nvPicPr>
+        <p:blipFill>
+          <a:blip r:embed="rId3">
+            <a:extLst>
+              <a:ext uri="{28A0092B-C50C-407E-A947-70E740481C1C}">
+                <a14:useLocalDpi xmlns:a14="http://schemas.microsoft.com/office/drawing/2010/main" val="0"/>
+              </a:ext>
+            </a:extLst>
+          </a:blip>
+          <a:stretch>
+            <a:fillRect/>
+          </a:stretch>
+        </p:blipFill>
+        <p:spPr>
+          <a:xfrm>
+            <a:off x="1253392" y="1113005"/>
+            <a:ext cx="2884521" cy="4026310"/>
+          </a:xfrm>
+          <a:prstGeom prst="roundRect">
+            <a:avLst/>
+          </a:prstGeom>
+        </p:spPr>
+      </p:pic>
+      <p:pic>
+        <p:nvPicPr>
+          <p:cNvPr id="15" name="Grafik 14">
+            <a:extLst>
+              <a:ext uri="{FF2B5EF4-FFF2-40B4-BE49-F238E27FC236}">
+                <a16:creationId xmlns:a16="http://schemas.microsoft.com/office/drawing/2014/main" id="{AB629F80-F016-999F-0244-D019472D02B6}"/>
+              </a:ext>
+            </a:extLst>
+          </p:cNvPr>
+          <p:cNvPicPr>
+            <a:picLocks noChangeAspect="1"/>
+          </p:cNvPicPr>
+          <p:nvPr/>
+        </p:nvPicPr>
+        <p:blipFill>
+          <a:blip r:embed="rId4">
+            <a:extLst>
+              <a:ext uri="{28A0092B-C50C-407E-A947-70E740481C1C}">
+                <a14:useLocalDpi xmlns:a14="http://schemas.microsoft.com/office/drawing/2010/main" val="0"/>
+              </a:ext>
+            </a:extLst>
+          </a:blip>
+          <a:stretch>
+            <a:fillRect/>
+          </a:stretch>
+        </p:blipFill>
+        <p:spPr>
+          <a:xfrm>
+            <a:off x="6415546" y="1065026"/>
+            <a:ext cx="4026310" cy="4026310"/>
+          </a:xfrm>
+          <a:prstGeom prst="roundRect">
+            <a:avLst/>
+          </a:prstGeom>
+        </p:spPr>
+      </p:pic>
+      <p:pic>
+        <p:nvPicPr>
+          <p:cNvPr id="19" name="Grafik 18">
+            <a:extLst>
+              <a:ext uri="{FF2B5EF4-FFF2-40B4-BE49-F238E27FC236}">
+                <a16:creationId xmlns:a16="http://schemas.microsoft.com/office/drawing/2014/main" id="{F86218F9-A275-D071-63A3-5DE827057C65}"/>
+              </a:ext>
+            </a:extLst>
+          </p:cNvPr>
+          <p:cNvPicPr>
+            <a:picLocks noChangeAspect="1"/>
+          </p:cNvPicPr>
+          <p:nvPr/>
+        </p:nvPicPr>
+        <p:blipFill>
+          <a:blip r:embed="rId5"/>
+          <a:stretch>
+            <a:fillRect/>
+          </a:stretch>
+        </p:blipFill>
+        <p:spPr>
+          <a:xfrm>
+            <a:off x="1654992" y="6007032"/>
+            <a:ext cx="8087032" cy="268904"/>
+          </a:xfrm>
+          <a:prstGeom prst="rect">
+            <a:avLst/>
+          </a:prstGeom>
+        </p:spPr>
+      </p:pic>
+      <p:sp>
+        <p:nvSpPr>
+          <p:cNvPr id="26" name="Ungleich 25">
+            <a:extLst>
+              <a:ext uri="{FF2B5EF4-FFF2-40B4-BE49-F238E27FC236}">
+                <a16:creationId xmlns:a16="http://schemas.microsoft.com/office/drawing/2014/main" id="{EEC3CF23-0C2A-235E-A08B-9C60D0EA4E9C}"/>
               </a:ext>
             </a:extLst>
           </p:cNvPr>
@@ -4177,8 +4605,8 @@
         </p:nvSpPr>
         <p:spPr>
           <a:xfrm>
-            <a:off x="6096000" y="3154373"/>
-            <a:ext cx="920537" cy="767114"/>
+            <a:off x="4788311" y="2524333"/>
+            <a:ext cx="1200142" cy="1034944"/>
           </a:xfrm>
           <a:prstGeom prst="mathNotEqual">
             <a:avLst/>
@@ -4213,10 +4641,65 @@
           </a:p>
         </p:txBody>
       </p:sp>
+      <p:sp>
+        <p:nvSpPr>
+          <p:cNvPr id="27" name="Textfeld 26">
+            <a:extLst>
+              <a:ext uri="{FF2B5EF4-FFF2-40B4-BE49-F238E27FC236}">
+                <a16:creationId xmlns:a16="http://schemas.microsoft.com/office/drawing/2014/main" id="{D44B7211-C95B-5438-CCD1-129013D3EC75}"/>
+              </a:ext>
+            </a:extLst>
+          </p:cNvPr>
+          <p:cNvSpPr txBox="1"/>
+          <p:nvPr/>
+        </p:nvSpPr>
+        <p:spPr>
+          <a:xfrm>
+            <a:off x="491612" y="359029"/>
+            <a:ext cx="3333136" cy="523220"/>
+          </a:xfrm>
+          <a:prstGeom prst="rect">
+            <a:avLst/>
+          </a:prstGeom>
+          <a:noFill/>
+        </p:spPr>
+        <p:txBody>
+          <a:bodyPr wrap="square" rtlCol="0">
+            <a:spAutoFit/>
+          </a:bodyPr>
+          <a:lstStyle/>
+          <a:p>
+            <a:r>
+              <a:rPr lang="de-DE" sz="2800" dirty="0">
+                <a:solidFill>
+                  <a:schemeClr val="bg1"/>
+                </a:solidFill>
+              </a:rPr>
+              <a:t>…</a:t>
+            </a:r>
+            <a:r>
+              <a:rPr lang="de-DE" sz="2800" dirty="0" err="1">
+                <a:solidFill>
+                  <a:schemeClr val="bg1"/>
+                </a:solidFill>
+              </a:rPr>
+              <a:t>What</a:t>
+            </a:r>
+            <a:r>
+              <a:rPr lang="de-DE" sz="2800" dirty="0">
+                <a:solidFill>
+                  <a:schemeClr val="bg1"/>
+                </a:solidFill>
+              </a:rPr>
+              <a:t> Dog am I?</a:t>
+            </a:r>
+          </a:p>
+        </p:txBody>
+      </p:sp>
     </p:spTree>
     <p:extLst>
       <p:ext uri="{BB962C8B-B14F-4D97-AF65-F5344CB8AC3E}">
-        <p14:creationId xmlns:p14="http://schemas.microsoft.com/office/powerpoint/2010/main" val="3984335355"/>
+        <p14:creationId xmlns:p14="http://schemas.microsoft.com/office/powerpoint/2010/main" val="1648502809"/>
       </p:ext>
     </p:extLst>
   </p:cSld>
@@ -4226,7 +4709,7 @@
 </p:sld>
 </file>
 
-<file path=ppt/slides/slide4.xml><?xml version="1.0" encoding="utf-8"?>
+<file path=ppt/slides/slide11.xml><?xml version="1.0" encoding="utf-8"?>
 <p:sld xmlns:a="http://schemas.openxmlformats.org/drawingml/2006/main" xmlns:r="http://schemas.openxmlformats.org/officeDocument/2006/relationships" xmlns:p="http://schemas.openxmlformats.org/presentationml/2006/main">
   <p:cSld>
     <p:spTree>
@@ -4234,7 +4717,7 @@
         <p:cNvPr id="1" name="">
           <a:extLst>
             <a:ext uri="{FF2B5EF4-FFF2-40B4-BE49-F238E27FC236}">
-              <a16:creationId xmlns:a16="http://schemas.microsoft.com/office/drawing/2014/main" id="{524055C5-3F4C-5D4D-9A2B-A82354B87329}"/>
+              <a16:creationId xmlns:a16="http://schemas.microsoft.com/office/drawing/2014/main" id="{E57D325A-A8B4-519D-D1E6-524FF29C8C4D}"/>
             </a:ext>
           </a:extLst>
         </p:cNvPr>
@@ -4249,155 +4732,12 @@
           <a:chExt cx="0" cy="0"/>
         </a:xfrm>
       </p:grpSpPr>
-      <p:pic>
-        <p:nvPicPr>
-          <p:cNvPr id="3" name="Grafik 2">
-            <a:extLst>
-              <a:ext uri="{FF2B5EF4-FFF2-40B4-BE49-F238E27FC236}">
-                <a16:creationId xmlns:a16="http://schemas.microsoft.com/office/drawing/2014/main" id="{9E67B456-BA30-B1DD-D4DE-3D0473C8BB94}"/>
-              </a:ext>
-            </a:extLst>
-          </p:cNvPr>
-          <p:cNvPicPr>
-            <a:picLocks noChangeAspect="1"/>
-          </p:cNvPicPr>
-          <p:nvPr/>
-        </p:nvPicPr>
-        <p:blipFill>
-          <a:blip r:embed="rId2">
-            <a:extLst>
-              <a:ext uri="{28A0092B-C50C-407E-A947-70E740481C1C}">
-                <a14:useLocalDpi xmlns:a14="http://schemas.microsoft.com/office/drawing/2010/main" val="0"/>
-              </a:ext>
-            </a:extLst>
-          </a:blip>
-          <a:stretch>
-            <a:fillRect/>
-          </a:stretch>
-        </p:blipFill>
-        <p:spPr>
-          <a:xfrm>
-            <a:off x="774904" y="1761050"/>
-            <a:ext cx="4762500" cy="3571875"/>
-          </a:xfrm>
-          <a:prstGeom prst="rect">
-            <a:avLst/>
-          </a:prstGeom>
-        </p:spPr>
-      </p:pic>
-      <p:pic>
-        <p:nvPicPr>
-          <p:cNvPr id="5" name="Grafik 4">
-            <a:extLst>
-              <a:ext uri="{FF2B5EF4-FFF2-40B4-BE49-F238E27FC236}">
-                <a16:creationId xmlns:a16="http://schemas.microsoft.com/office/drawing/2014/main" id="{EA3CBCBC-B0DF-401F-4343-199468851314}"/>
-              </a:ext>
-            </a:extLst>
-          </p:cNvPr>
-          <p:cNvPicPr>
-            <a:picLocks noChangeAspect="1"/>
-          </p:cNvPicPr>
-          <p:nvPr/>
-        </p:nvPicPr>
-        <p:blipFill>
-          <a:blip r:embed="rId3">
-            <a:extLst>
-              <a:ext uri="{28A0092B-C50C-407E-A947-70E740481C1C}">
-                <a14:useLocalDpi xmlns:a14="http://schemas.microsoft.com/office/drawing/2010/main" val="0"/>
-              </a:ext>
-            </a:extLst>
-          </a:blip>
-          <a:stretch>
-            <a:fillRect/>
-          </a:stretch>
-        </p:blipFill>
-        <p:spPr>
-          <a:xfrm>
-            <a:off x="6751135" y="1761050"/>
-            <a:ext cx="4762500" cy="3571875"/>
-          </a:xfrm>
-          <a:prstGeom prst="rect">
-            <a:avLst/>
-          </a:prstGeom>
-        </p:spPr>
-      </p:pic>
-      <p:sp>
-        <p:nvSpPr>
-          <p:cNvPr id="7" name="Textfeld 6">
-            <a:extLst>
-              <a:ext uri="{FF2B5EF4-FFF2-40B4-BE49-F238E27FC236}">
-                <a16:creationId xmlns:a16="http://schemas.microsoft.com/office/drawing/2014/main" id="{89A9045D-9EC2-CB46-623C-BC01A8F7EA9E}"/>
-              </a:ext>
-            </a:extLst>
-          </p:cNvPr>
-          <p:cNvSpPr txBox="1"/>
-          <p:nvPr/>
-        </p:nvSpPr>
-        <p:spPr>
-          <a:xfrm>
-            <a:off x="7808655" y="5542811"/>
-            <a:ext cx="3293807" cy="369332"/>
-          </a:xfrm>
-          <a:prstGeom prst="rect">
-            <a:avLst/>
-          </a:prstGeom>
-          <a:noFill/>
-        </p:spPr>
-        <p:txBody>
-          <a:bodyPr wrap="square" rtlCol="0">
-            <a:spAutoFit/>
-          </a:bodyPr>
-          <a:lstStyle/>
-          <a:p>
-            <a:r>
-              <a:rPr lang="de-DE" dirty="0"/>
-              <a:t>Pembroke</a:t>
-            </a:r>
-          </a:p>
-        </p:txBody>
-      </p:sp>
-      <p:sp>
-        <p:nvSpPr>
-          <p:cNvPr id="9" name="Textfeld 8">
-            <a:extLst>
-              <a:ext uri="{FF2B5EF4-FFF2-40B4-BE49-F238E27FC236}">
-                <a16:creationId xmlns:a16="http://schemas.microsoft.com/office/drawing/2014/main" id="{8D8079A4-5CB8-3952-E89B-8E16E2EE0CA5}"/>
-              </a:ext>
-            </a:extLst>
-          </p:cNvPr>
-          <p:cNvSpPr txBox="1"/>
-          <p:nvPr/>
-        </p:nvSpPr>
-        <p:spPr>
-          <a:xfrm>
-            <a:off x="1457937" y="5542811"/>
-            <a:ext cx="3293807" cy="369332"/>
-          </a:xfrm>
-          <a:prstGeom prst="rect">
-            <a:avLst/>
-          </a:prstGeom>
-          <a:noFill/>
-        </p:spPr>
-        <p:txBody>
-          <a:bodyPr wrap="square" rtlCol="0">
-            <a:spAutoFit/>
-          </a:bodyPr>
-          <a:lstStyle/>
-          <a:p>
-            <a:r>
-              <a:rPr lang="de-DE" dirty="0" err="1"/>
-              <a:t>Basenji</a:t>
-            </a:r>
-            <a:endParaRPr lang="de-DE" dirty="0"/>
-          </a:p>
-        </p:txBody>
-      </p:sp>
-      <p:sp>
-        <p:nvSpPr>
-          <p:cNvPr id="11" name="Rechteck: abgerundete Ecken 10">
-            <a:extLst>
-              <a:ext uri="{FF2B5EF4-FFF2-40B4-BE49-F238E27FC236}">
-                <a16:creationId xmlns:a16="http://schemas.microsoft.com/office/drawing/2014/main" id="{65583149-71BB-675C-C768-0076C2CD8977}"/>
+      <p:sp>
+        <p:nvSpPr>
+          <p:cNvPr id="24" name="Rechteck: abgerundete Ecken 23">
+            <a:extLst>
+              <a:ext uri="{FF2B5EF4-FFF2-40B4-BE49-F238E27FC236}">
+                <a16:creationId xmlns:a16="http://schemas.microsoft.com/office/drawing/2014/main" id="{8B410BB0-496D-48F1-84CC-BEED41B8ADD3}"/>
               </a:ext>
             </a:extLst>
           </p:cNvPr>
@@ -4406,14 +4746,14 @@
         </p:nvSpPr>
         <p:spPr>
           <a:xfrm>
-            <a:off x="4301611" y="330813"/>
-            <a:ext cx="1936955" cy="629265"/>
+            <a:off x="7647035" y="5270464"/>
+            <a:ext cx="1563329" cy="432620"/>
           </a:xfrm>
           <a:prstGeom prst="roundRect">
             <a:avLst/>
           </a:prstGeom>
           <a:solidFill>
-            <a:schemeClr val="accent2"/>
+            <a:schemeClr val="tx1"/>
           </a:solidFill>
         </p:spPr>
         <p:style>
@@ -4437,55 +4777,16 @@
           <a:lstStyle/>
           <a:p>
             <a:pPr algn="ctr"/>
-            <a:endParaRPr lang="de-DE"/>
-          </a:p>
-        </p:txBody>
-      </p:sp>
-      <p:sp>
-        <p:nvSpPr>
-          <p:cNvPr id="13" name="Textfeld 12">
-            <a:extLst>
-              <a:ext uri="{FF2B5EF4-FFF2-40B4-BE49-F238E27FC236}">
-                <a16:creationId xmlns:a16="http://schemas.microsoft.com/office/drawing/2014/main" id="{33893C1A-6C84-93F4-6BBF-98302923FD32}"/>
-              </a:ext>
-            </a:extLst>
-          </p:cNvPr>
-          <p:cNvSpPr txBox="1"/>
-          <p:nvPr/>
-        </p:nvSpPr>
-        <p:spPr>
-          <a:xfrm>
-            <a:off x="4640823" y="389807"/>
-            <a:ext cx="1774723" cy="461665"/>
-          </a:xfrm>
-          <a:prstGeom prst="rect">
-            <a:avLst/>
-          </a:prstGeom>
-          <a:noFill/>
-        </p:spPr>
-        <p:txBody>
-          <a:bodyPr wrap="square" rtlCol="0">
-            <a:spAutoFit/>
-          </a:bodyPr>
-          <a:lstStyle/>
-          <a:p>
-            <a:r>
-              <a:rPr lang="de-DE" sz="2400" b="1" dirty="0">
-                <a:solidFill>
-                  <a:schemeClr val="bg1"/>
-                </a:solidFill>
-              </a:rPr>
-              <a:t>Testing</a:t>
-            </a:r>
-          </a:p>
-        </p:txBody>
-      </p:sp>
-      <p:sp>
-        <p:nvSpPr>
-          <p:cNvPr id="4" name="Rechteck: abgerundete Ecken 3">
-            <a:extLst>
-              <a:ext uri="{FF2B5EF4-FFF2-40B4-BE49-F238E27FC236}">
-                <a16:creationId xmlns:a16="http://schemas.microsoft.com/office/drawing/2014/main" id="{B5513ADF-AF4C-1262-938D-CBD320179587}"/>
+            <a:endParaRPr lang="de-DE" dirty="0"/>
+          </a:p>
+        </p:txBody>
+      </p:sp>
+      <p:sp>
+        <p:nvSpPr>
+          <p:cNvPr id="23" name="Rechteck: abgerundete Ecken 22">
+            <a:extLst>
+              <a:ext uri="{FF2B5EF4-FFF2-40B4-BE49-F238E27FC236}">
+                <a16:creationId xmlns:a16="http://schemas.microsoft.com/office/drawing/2014/main" id="{E4E753CD-6A2D-9330-4563-7CD1806DBD40}"/>
               </a:ext>
             </a:extLst>
           </p:cNvPr>
@@ -4494,14 +4795,14 @@
         </p:nvSpPr>
         <p:spPr>
           <a:xfrm>
-            <a:off x="10432025" y="6331974"/>
+            <a:off x="1795615" y="5241602"/>
             <a:ext cx="1563329" cy="432620"/>
           </a:xfrm>
           <a:prstGeom prst="roundRect">
             <a:avLst/>
           </a:prstGeom>
           <a:solidFill>
-            <a:srgbClr val="002060"/>
+            <a:schemeClr val="tx1"/>
           </a:solidFill>
         </p:spPr>
         <p:style>
@@ -4525,16 +4826,16 @@
           <a:lstStyle/>
           <a:p>
             <a:pPr algn="ctr"/>
-            <a:endParaRPr lang="de-DE"/>
-          </a:p>
-        </p:txBody>
-      </p:sp>
-      <p:sp>
-        <p:nvSpPr>
-          <p:cNvPr id="8" name="Textfeld 7">
-            <a:extLst>
-              <a:ext uri="{FF2B5EF4-FFF2-40B4-BE49-F238E27FC236}">
-                <a16:creationId xmlns:a16="http://schemas.microsoft.com/office/drawing/2014/main" id="{D77068B1-A6AE-B490-B297-E85B80D86973}"/>
+            <a:endParaRPr lang="de-DE" dirty="0"/>
+          </a:p>
+        </p:txBody>
+      </p:sp>
+      <p:sp>
+        <p:nvSpPr>
+          <p:cNvPr id="7" name="Textfeld 6">
+            <a:extLst>
+              <a:ext uri="{FF2B5EF4-FFF2-40B4-BE49-F238E27FC236}">
+                <a16:creationId xmlns:a16="http://schemas.microsoft.com/office/drawing/2014/main" id="{542F1454-93B3-CCBF-24C1-BB7E42E83175}"/>
               </a:ext>
             </a:extLst>
           </p:cNvPr>
@@ -4543,8 +4844,8 @@
         </p:nvSpPr>
         <p:spPr>
           <a:xfrm>
-            <a:off x="10432026" y="6363618"/>
-            <a:ext cx="1759974" cy="369332"/>
+            <a:off x="7904361" y="5297155"/>
+            <a:ext cx="1048675" cy="369332"/>
           </a:xfrm>
           <a:prstGeom prst="rect">
             <a:avLst/>
@@ -4563,17 +4864,56 @@
                   <a:schemeClr val="bg1"/>
                 </a:solidFill>
               </a:rPr>
-              <a:t>Tobias Daiger</a:t>
-            </a:r>
-          </a:p>
-        </p:txBody>
-      </p:sp>
-      <p:sp>
-        <p:nvSpPr>
-          <p:cNvPr id="6" name="Ungleich 5">
-            <a:extLst>
-              <a:ext uri="{FF2B5EF4-FFF2-40B4-BE49-F238E27FC236}">
-                <a16:creationId xmlns:a16="http://schemas.microsoft.com/office/drawing/2014/main" id="{D3D57287-6564-759C-441D-A1562F126B0B}"/>
+              <a:t>Auch Ich</a:t>
+            </a:r>
+          </a:p>
+        </p:txBody>
+      </p:sp>
+      <p:sp>
+        <p:nvSpPr>
+          <p:cNvPr id="9" name="Textfeld 8">
+            <a:extLst>
+              <a:ext uri="{FF2B5EF4-FFF2-40B4-BE49-F238E27FC236}">
+                <a16:creationId xmlns:a16="http://schemas.microsoft.com/office/drawing/2014/main" id="{4F55CE9A-3757-9D12-5647-BD43AE0BECB6}"/>
+              </a:ext>
+            </a:extLst>
+          </p:cNvPr>
+          <p:cNvSpPr txBox="1"/>
+          <p:nvPr/>
+        </p:nvSpPr>
+        <p:spPr>
+          <a:xfrm>
+            <a:off x="2234378" y="5277340"/>
+            <a:ext cx="685804" cy="369332"/>
+          </a:xfrm>
+          <a:prstGeom prst="rect">
+            <a:avLst/>
+          </a:prstGeom>
+          <a:noFill/>
+        </p:spPr>
+        <p:txBody>
+          <a:bodyPr wrap="square" rtlCol="0">
+            <a:spAutoFit/>
+          </a:bodyPr>
+          <a:lstStyle/>
+          <a:p>
+            <a:r>
+              <a:rPr lang="de-DE" dirty="0">
+                <a:solidFill>
+                  <a:schemeClr val="bg1"/>
+                </a:solidFill>
+              </a:rPr>
+              <a:t>Ich</a:t>
+            </a:r>
+          </a:p>
+        </p:txBody>
+      </p:sp>
+      <p:sp>
+        <p:nvSpPr>
+          <p:cNvPr id="11" name="Rechteck: abgerundete Ecken 10">
+            <a:extLst>
+              <a:ext uri="{FF2B5EF4-FFF2-40B4-BE49-F238E27FC236}">
+                <a16:creationId xmlns:a16="http://schemas.microsoft.com/office/drawing/2014/main" id="{9E8478EA-E178-0CF1-2369-2168A152A4A6}"/>
               </a:ext>
             </a:extLst>
           </p:cNvPr>
@@ -4582,12 +4922,15 @@
         </p:nvSpPr>
         <p:spPr>
           <a:xfrm>
-            <a:off x="5635731" y="3163430"/>
-            <a:ext cx="920537" cy="767114"/>
-          </a:xfrm>
-          <a:prstGeom prst="mathNotEqual">
-            <a:avLst/>
-          </a:prstGeom>
+            <a:off x="4301611" y="330813"/>
+            <a:ext cx="1936955" cy="629265"/>
+          </a:xfrm>
+          <a:prstGeom prst="roundRect">
+            <a:avLst/>
+          </a:prstGeom>
+          <a:solidFill>
+            <a:schemeClr val="accent2"/>
+          </a:solidFill>
         </p:spPr>
         <p:style>
           <a:lnRef idx="2">
@@ -4610,56 +4953,55 @@
           <a:lstStyle/>
           <a:p>
             <a:pPr algn="ctr"/>
-            <a:endParaRPr lang="de-DE">
-              <a:solidFill>
-                <a:schemeClr val="tx1"/>
-              </a:solidFill>
-            </a:endParaRPr>
-          </a:p>
-        </p:txBody>
-      </p:sp>
-    </p:spTree>
-    <p:extLst>
-      <p:ext uri="{BB962C8B-B14F-4D97-AF65-F5344CB8AC3E}">
-        <p14:creationId xmlns:p14="http://schemas.microsoft.com/office/powerpoint/2010/main" val="2097350114"/>
-      </p:ext>
-    </p:extLst>
-  </p:cSld>
-  <p:clrMapOvr>
-    <a:masterClrMapping/>
-  </p:clrMapOvr>
-</p:sld>
-</file>
-
-<file path=ppt/slides/slide5.xml><?xml version="1.0" encoding="utf-8"?>
-<p:sld xmlns:a="http://schemas.openxmlformats.org/drawingml/2006/main" xmlns:r="http://schemas.openxmlformats.org/officeDocument/2006/relationships" xmlns:p="http://schemas.openxmlformats.org/presentationml/2006/main">
-  <p:cSld>
-    <p:spTree>
-      <p:nvGrpSpPr>
-        <p:cNvPr id="1" name="">
-          <a:extLst>
-            <a:ext uri="{FF2B5EF4-FFF2-40B4-BE49-F238E27FC236}">
-              <a16:creationId xmlns:a16="http://schemas.microsoft.com/office/drawing/2014/main" id="{D2FE29ED-83BE-52E1-22C8-1CE347DF7E3E}"/>
-            </a:ext>
-          </a:extLst>
-        </p:cNvPr>
-        <p:cNvGrpSpPr/>
-        <p:nvPr/>
-      </p:nvGrpSpPr>
-      <p:grpSpPr>
-        <a:xfrm>
-          <a:off x="0" y="0"/>
-          <a:ext cx="0" cy="0"/>
-          <a:chOff x="0" y="0"/>
-          <a:chExt cx="0" cy="0"/>
-        </a:xfrm>
-      </p:grpSpPr>
-      <p:sp>
-        <p:nvSpPr>
-          <p:cNvPr id="5" name="Rechteck: abgerundete Ecken 4">
-            <a:extLst>
-              <a:ext uri="{FF2B5EF4-FFF2-40B4-BE49-F238E27FC236}">
-                <a16:creationId xmlns:a16="http://schemas.microsoft.com/office/drawing/2014/main" id="{1E388296-D728-2024-ADB0-EEC258160A19}"/>
+            <a:endParaRPr lang="de-DE"/>
+          </a:p>
+        </p:txBody>
+      </p:sp>
+      <p:sp>
+        <p:nvSpPr>
+          <p:cNvPr id="13" name="Textfeld 12">
+            <a:extLst>
+              <a:ext uri="{FF2B5EF4-FFF2-40B4-BE49-F238E27FC236}">
+                <a16:creationId xmlns:a16="http://schemas.microsoft.com/office/drawing/2014/main" id="{5043CD37-8690-8C63-3387-B66D094B6EB7}"/>
+              </a:ext>
+            </a:extLst>
+          </p:cNvPr>
+          <p:cNvSpPr txBox="1"/>
+          <p:nvPr/>
+        </p:nvSpPr>
+        <p:spPr>
+          <a:xfrm>
+            <a:off x="4640823" y="389807"/>
+            <a:ext cx="1774723" cy="461665"/>
+          </a:xfrm>
+          <a:prstGeom prst="rect">
+            <a:avLst/>
+          </a:prstGeom>
+          <a:noFill/>
+        </p:spPr>
+        <p:txBody>
+          <a:bodyPr wrap="square" rtlCol="0">
+            <a:spAutoFit/>
+          </a:bodyPr>
+          <a:lstStyle/>
+          <a:p>
+            <a:r>
+              <a:rPr lang="de-DE" sz="2400" b="1" dirty="0">
+                <a:solidFill>
+                  <a:schemeClr val="bg1"/>
+                </a:solidFill>
+              </a:rPr>
+              <a:t>Testing</a:t>
+            </a:r>
+          </a:p>
+        </p:txBody>
+      </p:sp>
+      <p:sp>
+        <p:nvSpPr>
+          <p:cNvPr id="26" name="Ungleich 25">
+            <a:extLst>
+              <a:ext uri="{FF2B5EF4-FFF2-40B4-BE49-F238E27FC236}">
+                <a16:creationId xmlns:a16="http://schemas.microsoft.com/office/drawing/2014/main" id="{05855A35-B618-0F1A-BC41-E9C34CA73DCF}"/>
               </a:ext>
             </a:extLst>
           </p:cNvPr>
@@ -4668,15 +5010,12 @@
         </p:nvSpPr>
         <p:spPr>
           <a:xfrm>
-            <a:off x="10432025" y="6331974"/>
-            <a:ext cx="1563329" cy="432620"/>
-          </a:xfrm>
-          <a:prstGeom prst="roundRect">
-            <a:avLst/>
-          </a:prstGeom>
-          <a:solidFill>
-            <a:srgbClr val="002060"/>
-          </a:solidFill>
+            <a:off x="4788311" y="2524333"/>
+            <a:ext cx="1200142" cy="1034944"/>
+          </a:xfrm>
+          <a:prstGeom prst="mathNotEqual">
+            <a:avLst/>
+          </a:prstGeom>
         </p:spPr>
         <p:style>
           <a:lnRef idx="2">
@@ -4699,46 +5038,11 @@
           <a:lstStyle/>
           <a:p>
             <a:pPr algn="ctr"/>
-            <a:endParaRPr lang="de-DE"/>
-          </a:p>
-        </p:txBody>
-      </p:sp>
-      <p:sp>
-        <p:nvSpPr>
-          <p:cNvPr id="7" name="Textfeld 6">
-            <a:extLst>
-              <a:ext uri="{FF2B5EF4-FFF2-40B4-BE49-F238E27FC236}">
-                <a16:creationId xmlns:a16="http://schemas.microsoft.com/office/drawing/2014/main" id="{87C67DD6-9C63-3569-403D-08981BAF1C1D}"/>
-              </a:ext>
-            </a:extLst>
-          </p:cNvPr>
-          <p:cNvSpPr txBox="1"/>
-          <p:nvPr/>
-        </p:nvSpPr>
-        <p:spPr>
-          <a:xfrm>
-            <a:off x="10432026" y="6363618"/>
-            <a:ext cx="1759974" cy="369332"/>
-          </a:xfrm>
-          <a:prstGeom prst="rect">
-            <a:avLst/>
-          </a:prstGeom>
-          <a:noFill/>
-        </p:spPr>
-        <p:txBody>
-          <a:bodyPr wrap="square" rtlCol="0">
-            <a:spAutoFit/>
-          </a:bodyPr>
-          <a:lstStyle/>
-          <a:p>
-            <a:r>
-              <a:rPr lang="de-DE" dirty="0">
-                <a:solidFill>
-                  <a:schemeClr val="bg1"/>
-                </a:solidFill>
-              </a:rPr>
-              <a:t>Tobias Daiger</a:t>
-            </a:r>
+            <a:endParaRPr lang="de-DE">
+              <a:solidFill>
+                <a:schemeClr val="tx1"/>
+              </a:solidFill>
+            </a:endParaRPr>
           </a:p>
         </p:txBody>
       </p:sp>
@@ -4747,7 +5051,7 @@
           <p:cNvPr id="3" name="Grafik 2">
             <a:extLst>
               <a:ext uri="{FF2B5EF4-FFF2-40B4-BE49-F238E27FC236}">
-                <a16:creationId xmlns:a16="http://schemas.microsoft.com/office/drawing/2014/main" id="{0EBBC054-9103-9E4A-D162-498267138E0B}"/>
+                <a16:creationId xmlns:a16="http://schemas.microsoft.com/office/drawing/2014/main" id="{7973447B-0007-0173-E480-E3135F2AF00A}"/>
               </a:ext>
             </a:extLst>
           </p:cNvPr>
@@ -4757,7 +5061,7 @@
           <p:nvPr/>
         </p:nvPicPr>
         <p:blipFill>
-          <a:blip r:embed="rId2">
+          <a:blip r:embed="rId3">
             <a:extLst>
               <a:ext uri="{28A0092B-C50C-407E-A947-70E740481C1C}">
                 <a14:useLocalDpi xmlns:a14="http://schemas.microsoft.com/office/drawing/2010/main" val="0"/>
@@ -4770,56 +5074,86 @@
         </p:blipFill>
         <p:spPr>
           <a:xfrm>
-            <a:off x="1061687" y="310595"/>
-            <a:ext cx="10440941" cy="5873029"/>
+            <a:off x="1321747" y="1183778"/>
+            <a:ext cx="2696953" cy="3593690"/>
+          </a:xfrm>
+          <a:prstGeom prst="roundRect">
+            <a:avLst/>
+          </a:prstGeom>
+        </p:spPr>
+      </p:pic>
+      <p:pic>
+        <p:nvPicPr>
+          <p:cNvPr id="5" name="Grafik 4">
+            <a:extLst>
+              <a:ext uri="{FF2B5EF4-FFF2-40B4-BE49-F238E27FC236}">
+                <a16:creationId xmlns:a16="http://schemas.microsoft.com/office/drawing/2014/main" id="{9AD2ED93-53EF-139F-F7C5-E39938FFFD43}"/>
+              </a:ext>
+            </a:extLst>
+          </p:cNvPr>
+          <p:cNvPicPr>
+            <a:picLocks noChangeAspect="1"/>
+          </p:cNvPicPr>
+          <p:nvPr/>
+        </p:nvPicPr>
+        <p:blipFill>
+          <a:blip r:embed="rId4"/>
+          <a:stretch>
+            <a:fillRect/>
+          </a:stretch>
+        </p:blipFill>
+        <p:spPr>
+          <a:xfrm>
+            <a:off x="1165761" y="5999222"/>
+            <a:ext cx="9043685" cy="278267"/>
           </a:xfrm>
           <a:prstGeom prst="rect">
             <a:avLst/>
           </a:prstGeom>
         </p:spPr>
       </p:pic>
-    </p:spTree>
-    <p:extLst>
-      <p:ext uri="{BB962C8B-B14F-4D97-AF65-F5344CB8AC3E}">
-        <p14:creationId xmlns:p14="http://schemas.microsoft.com/office/powerpoint/2010/main" val="969845168"/>
-      </p:ext>
-    </p:extLst>
-  </p:cSld>
-  <p:clrMapOvr>
-    <a:masterClrMapping/>
-  </p:clrMapOvr>
-</p:sld>
-</file>
-
-<file path=ppt/slides/slide6.xml><?xml version="1.0" encoding="utf-8"?>
-<p:sld xmlns:a="http://schemas.openxmlformats.org/drawingml/2006/main" xmlns:r="http://schemas.openxmlformats.org/officeDocument/2006/relationships" xmlns:p="http://schemas.openxmlformats.org/presentationml/2006/main">
-  <p:cSld>
-    <p:spTree>
-      <p:nvGrpSpPr>
-        <p:cNvPr id="1" name="">
-          <a:extLst>
-            <a:ext uri="{FF2B5EF4-FFF2-40B4-BE49-F238E27FC236}">
-              <a16:creationId xmlns:a16="http://schemas.microsoft.com/office/drawing/2014/main" id="{C9DC0F14-AA66-4CD9-5411-E7DEAF170A26}"/>
-            </a:ext>
-          </a:extLst>
-        </p:cNvPr>
-        <p:cNvGrpSpPr/>
-        <p:nvPr/>
-      </p:nvGrpSpPr>
-      <p:grpSpPr>
-        <a:xfrm>
-          <a:off x="0" y="0"/>
-          <a:ext cx="0" cy="0"/>
-          <a:chOff x="0" y="0"/>
-          <a:chExt cx="0" cy="0"/>
-        </a:xfrm>
-      </p:grpSpPr>
-      <p:sp>
-        <p:nvSpPr>
-          <p:cNvPr id="5" name="Rechteck: abgerundete Ecken 4">
-            <a:extLst>
-              <a:ext uri="{FF2B5EF4-FFF2-40B4-BE49-F238E27FC236}">
-                <a16:creationId xmlns:a16="http://schemas.microsoft.com/office/drawing/2014/main" id="{F49622D1-15D0-8A20-26A3-B6BC8D44F758}"/>
+      <p:pic>
+        <p:nvPicPr>
+          <p:cNvPr id="8" name="Grafik 7">
+            <a:extLst>
+              <a:ext uri="{FF2B5EF4-FFF2-40B4-BE49-F238E27FC236}">
+                <a16:creationId xmlns:a16="http://schemas.microsoft.com/office/drawing/2014/main" id="{3FD0B2AA-A185-6D3F-9C56-0A817EC50EB6}"/>
+              </a:ext>
+            </a:extLst>
+          </p:cNvPr>
+          <p:cNvPicPr>
+            <a:picLocks noChangeAspect="1"/>
+          </p:cNvPicPr>
+          <p:nvPr/>
+        </p:nvPicPr>
+        <p:blipFill>
+          <a:blip r:embed="rId5">
+            <a:extLst>
+              <a:ext uri="{28A0092B-C50C-407E-A947-70E740481C1C}">
+                <a14:useLocalDpi xmlns:a14="http://schemas.microsoft.com/office/drawing/2010/main" val="0"/>
+              </a:ext>
+            </a:extLst>
+          </a:blip>
+          <a:stretch>
+            <a:fillRect/>
+          </a:stretch>
+        </p:blipFill>
+        <p:spPr>
+          <a:xfrm>
+            <a:off x="7154722" y="1183778"/>
+            <a:ext cx="2547954" cy="3825757"/>
+          </a:xfrm>
+          <a:prstGeom prst="roundRect">
+            <a:avLst/>
+          </a:prstGeom>
+        </p:spPr>
+      </p:pic>
+      <p:sp>
+        <p:nvSpPr>
+          <p:cNvPr id="14" name="Rechteck: abgerundete Ecken 13">
+            <a:extLst>
+              <a:ext uri="{FF2B5EF4-FFF2-40B4-BE49-F238E27FC236}">
+                <a16:creationId xmlns:a16="http://schemas.microsoft.com/office/drawing/2014/main" id="{D590801A-21AA-6046-0FE2-14F9F41E811A}"/>
               </a:ext>
             </a:extLst>
           </p:cNvPr>
@@ -4828,14 +5162,14 @@
         </p:nvSpPr>
         <p:spPr>
           <a:xfrm>
-            <a:off x="10432025" y="6331974"/>
-            <a:ext cx="1563329" cy="432620"/>
+            <a:off x="314632" y="366208"/>
+            <a:ext cx="3333136" cy="523219"/>
           </a:xfrm>
           <a:prstGeom prst="roundRect">
             <a:avLst/>
           </a:prstGeom>
           <a:solidFill>
-            <a:srgbClr val="002060"/>
+            <a:schemeClr val="tx1"/>
           </a:solidFill>
         </p:spPr>
         <p:style>
@@ -4859,16 +5193,16 @@
           <a:lstStyle/>
           <a:p>
             <a:pPr algn="ctr"/>
-            <a:endParaRPr lang="de-DE"/>
-          </a:p>
-        </p:txBody>
-      </p:sp>
-      <p:sp>
-        <p:nvSpPr>
-          <p:cNvPr id="7" name="Textfeld 6">
-            <a:extLst>
-              <a:ext uri="{FF2B5EF4-FFF2-40B4-BE49-F238E27FC236}">
-                <a16:creationId xmlns:a16="http://schemas.microsoft.com/office/drawing/2014/main" id="{E4828F9E-EB1B-FFEC-E594-CD717055576D}"/>
+            <a:endParaRPr lang="de-DE" dirty="0"/>
+          </a:p>
+        </p:txBody>
+      </p:sp>
+      <p:sp>
+        <p:nvSpPr>
+          <p:cNvPr id="17" name="Textfeld 16">
+            <a:extLst>
+              <a:ext uri="{FF2B5EF4-FFF2-40B4-BE49-F238E27FC236}">
+                <a16:creationId xmlns:a16="http://schemas.microsoft.com/office/drawing/2014/main" id="{860B9E28-C507-C6C6-E347-7159178B4C5C}"/>
               </a:ext>
             </a:extLst>
           </p:cNvPr>
@@ -4877,8 +5211,8 @@
         </p:nvSpPr>
         <p:spPr>
           <a:xfrm>
-            <a:off x="10432026" y="6363618"/>
-            <a:ext cx="1759974" cy="369332"/>
+            <a:off x="491612" y="359029"/>
+            <a:ext cx="3333136" cy="523220"/>
           </a:xfrm>
           <a:prstGeom prst="rect">
             <a:avLst/>
@@ -4892,56 +5226,36 @@
           <a:lstStyle/>
           <a:p>
             <a:r>
-              <a:rPr lang="de-DE" dirty="0">
+              <a:rPr lang="de-DE" sz="2800" dirty="0">
                 <a:solidFill>
                   <a:schemeClr val="bg1"/>
                 </a:solidFill>
               </a:rPr>
-              <a:t>Tobias Daiger</a:t>
-            </a:r>
-          </a:p>
-        </p:txBody>
-      </p:sp>
-      <p:pic>
-        <p:nvPicPr>
-          <p:cNvPr id="3" name="Grafik 2">
-            <a:extLst>
-              <a:ext uri="{FF2B5EF4-FFF2-40B4-BE49-F238E27FC236}">
-                <a16:creationId xmlns:a16="http://schemas.microsoft.com/office/drawing/2014/main" id="{BB2AAA90-B8A7-031E-B8FC-91576E50F467}"/>
-              </a:ext>
-            </a:extLst>
-          </p:cNvPr>
-          <p:cNvPicPr>
-            <a:picLocks noChangeAspect="1"/>
-          </p:cNvPicPr>
-          <p:nvPr/>
-        </p:nvPicPr>
-        <p:blipFill>
-          <a:blip r:embed="rId2">
-            <a:extLst>
-              <a:ext uri="{28A0092B-C50C-407E-A947-70E740481C1C}">
-                <a14:useLocalDpi xmlns:a14="http://schemas.microsoft.com/office/drawing/2010/main" val="0"/>
-              </a:ext>
-            </a:extLst>
-          </a:blip>
-          <a:stretch>
-            <a:fillRect/>
-          </a:stretch>
-        </p:blipFill>
-        <p:spPr>
-          <a:xfrm>
-            <a:off x="1276478" y="266951"/>
-            <a:ext cx="10465489" cy="5886837"/>
-          </a:xfrm>
-          <a:prstGeom prst="rect">
-            <a:avLst/>
-          </a:prstGeom>
-        </p:spPr>
-      </p:pic>
+              <a:t>…</a:t>
+            </a:r>
+            <a:r>
+              <a:rPr lang="de-DE" sz="2800" dirty="0" err="1">
+                <a:solidFill>
+                  <a:schemeClr val="bg1"/>
+                </a:solidFill>
+              </a:rPr>
+              <a:t>What</a:t>
+            </a:r>
+            <a:r>
+              <a:rPr lang="de-DE" sz="2800" dirty="0">
+                <a:solidFill>
+                  <a:schemeClr val="bg1"/>
+                </a:solidFill>
+              </a:rPr>
+              <a:t> Dog am I?</a:t>
+            </a:r>
+          </a:p>
+        </p:txBody>
+      </p:sp>
     </p:spTree>
     <p:extLst>
       <p:ext uri="{BB962C8B-B14F-4D97-AF65-F5344CB8AC3E}">
-        <p14:creationId xmlns:p14="http://schemas.microsoft.com/office/powerpoint/2010/main" val="1315307909"/>
+        <p14:creationId xmlns:p14="http://schemas.microsoft.com/office/powerpoint/2010/main" val="4242782416"/>
       </p:ext>
     </p:extLst>
   </p:cSld>
@@ -4951,7 +5265,7 @@
 </p:sld>
 </file>
 
-<file path=ppt/slides/slide7.xml><?xml version="1.0" encoding="utf-8"?>
+<file path=ppt/slides/slide12.xml><?xml version="1.0" encoding="utf-8"?>
 <p:sld xmlns:a="http://schemas.openxmlformats.org/drawingml/2006/main" xmlns:r="http://schemas.openxmlformats.org/officeDocument/2006/relationships" xmlns:p="http://schemas.openxmlformats.org/presentationml/2006/main">
   <p:cSld>
     <p:spTree>
@@ -5204,7 +5518,7 @@
 </p:sld>
 </file>
 
-<file path=ppt/slides/slide8.xml><?xml version="1.0" encoding="utf-8"?>
+<file path=ppt/slides/slide13.xml><?xml version="1.0" encoding="utf-8"?>
 <p:sld xmlns:a="http://schemas.openxmlformats.org/drawingml/2006/main" xmlns:r="http://schemas.openxmlformats.org/officeDocument/2006/relationships" xmlns:p="http://schemas.openxmlformats.org/presentationml/2006/main">
   <p:cSld>
     <p:spTree>
@@ -5457,7 +5771,7 @@
 </p:sld>
 </file>
 
-<file path=ppt/slides/slide9.xml><?xml version="1.0" encoding="utf-8"?>
+<file path=ppt/slides/slide14.xml><?xml version="1.0" encoding="utf-8"?>
 <p:sld xmlns:a="http://schemas.openxmlformats.org/drawingml/2006/main" xmlns:r="http://schemas.openxmlformats.org/officeDocument/2006/relationships" xmlns:p="http://schemas.openxmlformats.org/presentationml/2006/main">
   <p:cSld>
     <p:spTree>
@@ -5975,6 +6289,3299 @@
 </p:sld>
 </file>
 
+<file path=ppt/slides/slide2.xml><?xml version="1.0" encoding="utf-8"?>
+<p:sld xmlns:a="http://schemas.openxmlformats.org/drawingml/2006/main" xmlns:r="http://schemas.openxmlformats.org/officeDocument/2006/relationships" xmlns:p="http://schemas.openxmlformats.org/presentationml/2006/main">
+  <p:cSld>
+    <p:spTree>
+      <p:nvGrpSpPr>
+        <p:cNvPr id="1" name=""/>
+        <p:cNvGrpSpPr/>
+        <p:nvPr/>
+      </p:nvGrpSpPr>
+      <p:grpSpPr>
+        <a:xfrm>
+          <a:off x="0" y="0"/>
+          <a:ext cx="0" cy="0"/>
+          <a:chOff x="0" y="0"/>
+          <a:chExt cx="0" cy="0"/>
+        </a:xfrm>
+      </p:grpSpPr>
+      <p:sp>
+        <p:nvSpPr>
+          <p:cNvPr id="23" name="Rechteck: abgerundete Ecken 22">
+            <a:extLst>
+              <a:ext uri="{FF2B5EF4-FFF2-40B4-BE49-F238E27FC236}">
+                <a16:creationId xmlns:a16="http://schemas.microsoft.com/office/drawing/2014/main" id="{BC50F3CB-68D5-D92C-15F6-CB686BDD3A03}"/>
+              </a:ext>
+            </a:extLst>
+          </p:cNvPr>
+          <p:cNvSpPr/>
+          <p:nvPr/>
+        </p:nvSpPr>
+        <p:spPr>
+          <a:xfrm>
+            <a:off x="8485083" y="3697689"/>
+            <a:ext cx="2129504" cy="432620"/>
+          </a:xfrm>
+          <a:prstGeom prst="roundRect">
+            <a:avLst/>
+          </a:prstGeom>
+          <a:solidFill>
+            <a:schemeClr val="tx1"/>
+          </a:solidFill>
+        </p:spPr>
+        <p:style>
+          <a:lnRef idx="2">
+            <a:schemeClr val="accent1">
+              <a:shade val="15000"/>
+            </a:schemeClr>
+          </a:lnRef>
+          <a:fillRef idx="1">
+            <a:schemeClr val="accent1"/>
+          </a:fillRef>
+          <a:effectRef idx="0">
+            <a:schemeClr val="accent1"/>
+          </a:effectRef>
+          <a:fontRef idx="minor">
+            <a:schemeClr val="lt1"/>
+          </a:fontRef>
+        </p:style>
+        <p:txBody>
+          <a:bodyPr rtlCol="0" anchor="ctr"/>
+          <a:lstStyle/>
+          <a:p>
+            <a:pPr algn="ctr"/>
+            <a:endParaRPr lang="de-DE"/>
+          </a:p>
+        </p:txBody>
+      </p:sp>
+      <p:pic>
+        <p:nvPicPr>
+          <p:cNvPr id="7" name="Grafik 6">
+            <a:extLst>
+              <a:ext uri="{FF2B5EF4-FFF2-40B4-BE49-F238E27FC236}">
+                <a16:creationId xmlns:a16="http://schemas.microsoft.com/office/drawing/2014/main" id="{28D5F628-4BB6-C580-D61F-A7F6CAEB99E8}"/>
+              </a:ext>
+            </a:extLst>
+          </p:cNvPr>
+          <p:cNvPicPr>
+            <a:picLocks noChangeAspect="1"/>
+          </p:cNvPicPr>
+          <p:nvPr/>
+        </p:nvPicPr>
+        <p:blipFill>
+          <a:blip r:embed="rId2">
+            <a:extLst>
+              <a:ext uri="{28A0092B-C50C-407E-A947-70E740481C1C}">
+                <a14:useLocalDpi xmlns:a14="http://schemas.microsoft.com/office/drawing/2010/main" val="0"/>
+              </a:ext>
+            </a:extLst>
+          </a:blip>
+          <a:stretch>
+            <a:fillRect/>
+          </a:stretch>
+        </p:blipFill>
+        <p:spPr>
+          <a:xfrm>
+            <a:off x="724097" y="368283"/>
+            <a:ext cx="2124179" cy="2661879"/>
+          </a:xfrm>
+          <a:prstGeom prst="roundRect">
+            <a:avLst/>
+          </a:prstGeom>
+        </p:spPr>
+      </p:pic>
+      <p:pic>
+        <p:nvPicPr>
+          <p:cNvPr id="9" name="Grafik 8">
+            <a:extLst>
+              <a:ext uri="{FF2B5EF4-FFF2-40B4-BE49-F238E27FC236}">
+                <a16:creationId xmlns:a16="http://schemas.microsoft.com/office/drawing/2014/main" id="{8CEF13AD-8241-499A-93C0-DCC886371096}"/>
+              </a:ext>
+            </a:extLst>
+          </p:cNvPr>
+          <p:cNvPicPr>
+            <a:picLocks noChangeAspect="1"/>
+          </p:cNvPicPr>
+          <p:nvPr/>
+        </p:nvPicPr>
+        <p:blipFill>
+          <a:blip r:embed="rId3">
+            <a:extLst>
+              <a:ext uri="{28A0092B-C50C-407E-A947-70E740481C1C}">
+                <a14:useLocalDpi xmlns:a14="http://schemas.microsoft.com/office/drawing/2010/main" val="0"/>
+              </a:ext>
+            </a:extLst>
+          </a:blip>
+          <a:stretch>
+            <a:fillRect/>
+          </a:stretch>
+        </p:blipFill>
+        <p:spPr>
+          <a:xfrm>
+            <a:off x="8201996" y="4479048"/>
+            <a:ext cx="2129504" cy="1815402"/>
+          </a:xfrm>
+          <a:prstGeom prst="roundRect">
+            <a:avLst/>
+          </a:prstGeom>
+        </p:spPr>
+      </p:pic>
+      <p:pic>
+        <p:nvPicPr>
+          <p:cNvPr id="11" name="Grafik 10">
+            <a:extLst>
+              <a:ext uri="{FF2B5EF4-FFF2-40B4-BE49-F238E27FC236}">
+                <a16:creationId xmlns:a16="http://schemas.microsoft.com/office/drawing/2014/main" id="{EAF6EC40-4E88-28AA-DD93-561ED5064F47}"/>
+              </a:ext>
+            </a:extLst>
+          </p:cNvPr>
+          <p:cNvPicPr>
+            <a:picLocks noChangeAspect="1"/>
+          </p:cNvPicPr>
+          <p:nvPr/>
+        </p:nvPicPr>
+        <p:blipFill>
+          <a:blip r:embed="rId4">
+            <a:extLst>
+              <a:ext uri="{28A0092B-C50C-407E-A947-70E740481C1C}">
+                <a14:useLocalDpi xmlns:a14="http://schemas.microsoft.com/office/drawing/2010/main" val="0"/>
+              </a:ext>
+            </a:extLst>
+          </a:blip>
+          <a:stretch>
+            <a:fillRect/>
+          </a:stretch>
+        </p:blipFill>
+        <p:spPr>
+          <a:xfrm>
+            <a:off x="3259434" y="171321"/>
+            <a:ext cx="2454252" cy="1975114"/>
+          </a:xfrm>
+          <a:prstGeom prst="roundRect">
+            <a:avLst/>
+          </a:prstGeom>
+        </p:spPr>
+      </p:pic>
+      <p:pic>
+        <p:nvPicPr>
+          <p:cNvPr id="13" name="Grafik 12">
+            <a:extLst>
+              <a:ext uri="{FF2B5EF4-FFF2-40B4-BE49-F238E27FC236}">
+                <a16:creationId xmlns:a16="http://schemas.microsoft.com/office/drawing/2014/main" id="{20EC5F71-00D1-292C-7056-5738D4D6A3A3}"/>
+              </a:ext>
+            </a:extLst>
+          </p:cNvPr>
+          <p:cNvPicPr>
+            <a:picLocks noChangeAspect="1"/>
+          </p:cNvPicPr>
+          <p:nvPr/>
+        </p:nvPicPr>
+        <p:blipFill>
+          <a:blip r:embed="rId5">
+            <a:extLst>
+              <a:ext uri="{28A0092B-C50C-407E-A947-70E740481C1C}">
+                <a14:useLocalDpi xmlns:a14="http://schemas.microsoft.com/office/drawing/2010/main" val="0"/>
+              </a:ext>
+            </a:extLst>
+          </a:blip>
+          <a:stretch>
+            <a:fillRect/>
+          </a:stretch>
+        </p:blipFill>
+        <p:spPr>
+          <a:xfrm>
+            <a:off x="581191" y="3648730"/>
+            <a:ext cx="1490653" cy="2188065"/>
+          </a:xfrm>
+          <a:prstGeom prst="roundRect">
+            <a:avLst/>
+          </a:prstGeom>
+        </p:spPr>
+      </p:pic>
+      <p:pic>
+        <p:nvPicPr>
+          <p:cNvPr id="15" name="Grafik 14">
+            <a:extLst>
+              <a:ext uri="{FF2B5EF4-FFF2-40B4-BE49-F238E27FC236}">
+                <a16:creationId xmlns:a16="http://schemas.microsoft.com/office/drawing/2014/main" id="{F7EAEBC6-C683-97C5-2053-51C25326C703}"/>
+              </a:ext>
+            </a:extLst>
+          </p:cNvPr>
+          <p:cNvPicPr>
+            <a:picLocks noChangeAspect="1"/>
+          </p:cNvPicPr>
+          <p:nvPr/>
+        </p:nvPicPr>
+        <p:blipFill>
+          <a:blip r:embed="rId6">
+            <a:extLst>
+              <a:ext uri="{28A0092B-C50C-407E-A947-70E740481C1C}">
+                <a14:useLocalDpi xmlns:a14="http://schemas.microsoft.com/office/drawing/2010/main" val="0"/>
+              </a:ext>
+            </a:extLst>
+          </a:blip>
+          <a:stretch>
+            <a:fillRect/>
+          </a:stretch>
+        </p:blipFill>
+        <p:spPr>
+          <a:xfrm>
+            <a:off x="3105923" y="4194227"/>
+            <a:ext cx="1480005" cy="2385044"/>
+          </a:xfrm>
+          <a:prstGeom prst="roundRect">
+            <a:avLst/>
+          </a:prstGeom>
+        </p:spPr>
+      </p:pic>
+      <p:pic>
+        <p:nvPicPr>
+          <p:cNvPr id="17" name="Grafik 16">
+            <a:extLst>
+              <a:ext uri="{FF2B5EF4-FFF2-40B4-BE49-F238E27FC236}">
+                <a16:creationId xmlns:a16="http://schemas.microsoft.com/office/drawing/2014/main" id="{D9E33950-BB5B-EBB7-DECA-054B60CF4000}"/>
+              </a:ext>
+            </a:extLst>
+          </p:cNvPr>
+          <p:cNvPicPr>
+            <a:picLocks noChangeAspect="1"/>
+          </p:cNvPicPr>
+          <p:nvPr/>
+        </p:nvPicPr>
+        <p:blipFill>
+          <a:blip r:embed="rId7">
+            <a:extLst>
+              <a:ext uri="{28A0092B-C50C-407E-A947-70E740481C1C}">
+                <a14:useLocalDpi xmlns:a14="http://schemas.microsoft.com/office/drawing/2010/main" val="0"/>
+              </a:ext>
+            </a:extLst>
+          </a:blip>
+          <a:stretch>
+            <a:fillRect/>
+          </a:stretch>
+        </p:blipFill>
+        <p:spPr>
+          <a:xfrm>
+            <a:off x="7705441" y="102094"/>
+            <a:ext cx="2395691" cy="3194255"/>
+          </a:xfrm>
+          <a:prstGeom prst="roundRect">
+            <a:avLst/>
+          </a:prstGeom>
+        </p:spPr>
+      </p:pic>
+      <p:pic>
+        <p:nvPicPr>
+          <p:cNvPr id="5" name="Grafik 4">
+            <a:extLst>
+              <a:ext uri="{FF2B5EF4-FFF2-40B4-BE49-F238E27FC236}">
+                <a16:creationId xmlns:a16="http://schemas.microsoft.com/office/drawing/2014/main" id="{F79BCB5A-F870-9464-F99A-35D5295267A0}"/>
+              </a:ext>
+            </a:extLst>
+          </p:cNvPr>
+          <p:cNvPicPr>
+            <a:picLocks noChangeAspect="1"/>
+          </p:cNvPicPr>
+          <p:nvPr/>
+        </p:nvPicPr>
+        <p:blipFill>
+          <a:blip r:embed="rId8">
+            <a:extLst>
+              <a:ext uri="{28A0092B-C50C-407E-A947-70E740481C1C}">
+                <a14:useLocalDpi xmlns:a14="http://schemas.microsoft.com/office/drawing/2010/main" val="0"/>
+              </a:ext>
+            </a:extLst>
+          </a:blip>
+          <a:stretch>
+            <a:fillRect/>
+          </a:stretch>
+        </p:blipFill>
+        <p:spPr>
+          <a:xfrm>
+            <a:off x="4921941" y="1686036"/>
+            <a:ext cx="2944042" cy="3925388"/>
+          </a:xfrm>
+          <a:prstGeom prst="roundRect">
+            <a:avLst/>
+          </a:prstGeom>
+        </p:spPr>
+      </p:pic>
+      <p:pic>
+        <p:nvPicPr>
+          <p:cNvPr id="19" name="Grafik 18" descr="Fragezeichen mit einfarbiger Füllung">
+            <a:extLst>
+              <a:ext uri="{FF2B5EF4-FFF2-40B4-BE49-F238E27FC236}">
+                <a16:creationId xmlns:a16="http://schemas.microsoft.com/office/drawing/2014/main" id="{EFFB2E0C-1052-1B97-14E3-F9E964C91868}"/>
+              </a:ext>
+            </a:extLst>
+          </p:cNvPr>
+          <p:cNvPicPr>
+            <a:picLocks noChangeAspect="1"/>
+          </p:cNvPicPr>
+          <p:nvPr/>
+        </p:nvPicPr>
+        <p:blipFill>
+          <a:blip>
+            <a:extLst>
+              <a:ext uri="{96DAC541-7B7A-43D3-8B79-37D633B846F1}">
+                <asvg:svgBlip xmlns:asvg="http://schemas.microsoft.com/office/drawing/2016/SVG/main" r:embed="rId9"/>
+              </a:ext>
+            </a:extLst>
+          </a:blip>
+          <a:stretch>
+            <a:fillRect/>
+          </a:stretch>
+        </p:blipFill>
+        <p:spPr>
+          <a:xfrm>
+            <a:off x="2901099" y="2105580"/>
+            <a:ext cx="2129503" cy="2129503"/>
+          </a:xfrm>
+          <a:prstGeom prst="rect">
+            <a:avLst/>
+          </a:prstGeom>
+        </p:spPr>
+      </p:pic>
+      <p:sp>
+        <p:nvSpPr>
+          <p:cNvPr id="21" name="Textfeld 20">
+            <a:extLst>
+              <a:ext uri="{FF2B5EF4-FFF2-40B4-BE49-F238E27FC236}">
+                <a16:creationId xmlns:a16="http://schemas.microsoft.com/office/drawing/2014/main" id="{12B2EDF0-B3F7-E853-AB22-EA3E49A1169F}"/>
+              </a:ext>
+            </a:extLst>
+          </p:cNvPr>
+          <p:cNvSpPr txBox="1"/>
+          <p:nvPr/>
+        </p:nvSpPr>
+        <p:spPr>
+          <a:xfrm>
+            <a:off x="8613057" y="3697689"/>
+            <a:ext cx="2005781" cy="369332"/>
+          </a:xfrm>
+          <a:prstGeom prst="rect">
+            <a:avLst/>
+          </a:prstGeom>
+          <a:noFill/>
+        </p:spPr>
+        <p:txBody>
+          <a:bodyPr wrap="square" rtlCol="0">
+            <a:spAutoFit/>
+          </a:bodyPr>
+          <a:lstStyle/>
+          <a:p>
+            <a:r>
+              <a:rPr lang="de-DE" dirty="0">
+                <a:solidFill>
+                  <a:schemeClr val="bg1"/>
+                </a:solidFill>
+              </a:rPr>
+              <a:t>…</a:t>
+            </a:r>
+            <a:r>
+              <a:rPr lang="de-DE" dirty="0" err="1">
+                <a:solidFill>
+                  <a:schemeClr val="bg1"/>
+                </a:solidFill>
+              </a:rPr>
+              <a:t>What</a:t>
+            </a:r>
+            <a:r>
+              <a:rPr lang="de-DE" dirty="0">
+                <a:solidFill>
+                  <a:schemeClr val="bg1"/>
+                </a:solidFill>
+              </a:rPr>
+              <a:t> Dog am I?</a:t>
+            </a:r>
+          </a:p>
+        </p:txBody>
+      </p:sp>
+      <p:sp>
+        <p:nvSpPr>
+          <p:cNvPr id="25" name="Rechteck: abgerundete Ecken 24">
+            <a:extLst>
+              <a:ext uri="{FF2B5EF4-FFF2-40B4-BE49-F238E27FC236}">
+                <a16:creationId xmlns:a16="http://schemas.microsoft.com/office/drawing/2014/main" id="{ED92210C-4927-1392-FE4F-FAA9DF9E23A0}"/>
+              </a:ext>
+            </a:extLst>
+          </p:cNvPr>
+          <p:cNvSpPr/>
+          <p:nvPr/>
+        </p:nvSpPr>
+        <p:spPr>
+          <a:xfrm>
+            <a:off x="10432025" y="6331974"/>
+            <a:ext cx="1563329" cy="432620"/>
+          </a:xfrm>
+          <a:prstGeom prst="roundRect">
+            <a:avLst/>
+          </a:prstGeom>
+          <a:solidFill>
+            <a:srgbClr val="002060"/>
+          </a:solidFill>
+        </p:spPr>
+        <p:style>
+          <a:lnRef idx="2">
+            <a:schemeClr val="accent1">
+              <a:shade val="15000"/>
+            </a:schemeClr>
+          </a:lnRef>
+          <a:fillRef idx="1">
+            <a:schemeClr val="accent1"/>
+          </a:fillRef>
+          <a:effectRef idx="0">
+            <a:schemeClr val="accent1"/>
+          </a:effectRef>
+          <a:fontRef idx="minor">
+            <a:schemeClr val="lt1"/>
+          </a:fontRef>
+        </p:style>
+        <p:txBody>
+          <a:bodyPr rtlCol="0" anchor="ctr"/>
+          <a:lstStyle/>
+          <a:p>
+            <a:pPr algn="ctr"/>
+            <a:endParaRPr lang="de-DE"/>
+          </a:p>
+        </p:txBody>
+      </p:sp>
+      <p:sp>
+        <p:nvSpPr>
+          <p:cNvPr id="27" name="Textfeld 26">
+            <a:extLst>
+              <a:ext uri="{FF2B5EF4-FFF2-40B4-BE49-F238E27FC236}">
+                <a16:creationId xmlns:a16="http://schemas.microsoft.com/office/drawing/2014/main" id="{FA99983B-8FD4-9C8C-871B-AA1417EACE72}"/>
+              </a:ext>
+            </a:extLst>
+          </p:cNvPr>
+          <p:cNvSpPr txBox="1"/>
+          <p:nvPr/>
+        </p:nvSpPr>
+        <p:spPr>
+          <a:xfrm>
+            <a:off x="10432026" y="6363618"/>
+            <a:ext cx="1759974" cy="369332"/>
+          </a:xfrm>
+          <a:prstGeom prst="rect">
+            <a:avLst/>
+          </a:prstGeom>
+          <a:noFill/>
+        </p:spPr>
+        <p:txBody>
+          <a:bodyPr wrap="square" rtlCol="0">
+            <a:spAutoFit/>
+          </a:bodyPr>
+          <a:lstStyle/>
+          <a:p>
+            <a:r>
+              <a:rPr lang="de-DE" dirty="0">
+                <a:solidFill>
+                  <a:schemeClr val="bg1"/>
+                </a:solidFill>
+              </a:rPr>
+              <a:t>Tobias Daiger</a:t>
+            </a:r>
+          </a:p>
+        </p:txBody>
+      </p:sp>
+    </p:spTree>
+    <p:extLst>
+      <p:ext uri="{BB962C8B-B14F-4D97-AF65-F5344CB8AC3E}">
+        <p14:creationId xmlns:p14="http://schemas.microsoft.com/office/powerpoint/2010/main" val="257916748"/>
+      </p:ext>
+    </p:extLst>
+  </p:cSld>
+  <p:clrMapOvr>
+    <a:masterClrMapping/>
+  </p:clrMapOvr>
+</p:sld>
+</file>
+
+<file path=ppt/slides/slide3.xml><?xml version="1.0" encoding="utf-8"?>
+<p:sld xmlns:a="http://schemas.openxmlformats.org/drawingml/2006/main" xmlns:r="http://schemas.openxmlformats.org/officeDocument/2006/relationships" xmlns:p="http://schemas.openxmlformats.org/presentationml/2006/main">
+  <p:cSld>
+    <p:spTree>
+      <p:nvGrpSpPr>
+        <p:cNvPr id="1" name=""/>
+        <p:cNvGrpSpPr/>
+        <p:nvPr/>
+      </p:nvGrpSpPr>
+      <p:grpSpPr>
+        <a:xfrm>
+          <a:off x="0" y="0"/>
+          <a:ext cx="0" cy="0"/>
+          <a:chOff x="0" y="0"/>
+          <a:chExt cx="0" cy="0"/>
+        </a:xfrm>
+      </p:grpSpPr>
+      <p:pic>
+        <p:nvPicPr>
+          <p:cNvPr id="5" name="Grafik 4">
+            <a:extLst>
+              <a:ext uri="{FF2B5EF4-FFF2-40B4-BE49-F238E27FC236}">
+                <a16:creationId xmlns:a16="http://schemas.microsoft.com/office/drawing/2014/main" id="{C8C72318-086A-5784-FF72-39AF4F04BD9B}"/>
+              </a:ext>
+            </a:extLst>
+          </p:cNvPr>
+          <p:cNvPicPr>
+            <a:picLocks noChangeAspect="1"/>
+          </p:cNvPicPr>
+          <p:nvPr/>
+        </p:nvPicPr>
+        <p:blipFill>
+          <a:blip r:embed="rId2">
+            <a:extLst>
+              <a:ext uri="{28A0092B-C50C-407E-A947-70E740481C1C}">
+                <a14:useLocalDpi xmlns:a14="http://schemas.microsoft.com/office/drawing/2010/main" val="0"/>
+              </a:ext>
+            </a:extLst>
+          </a:blip>
+          <a:stretch>
+            <a:fillRect/>
+          </a:stretch>
+        </p:blipFill>
+        <p:spPr>
+          <a:xfrm>
+            <a:off x="850222" y="4176252"/>
+            <a:ext cx="748622" cy="638200"/>
+          </a:xfrm>
+          <a:prstGeom prst="roundRect">
+            <a:avLst/>
+          </a:prstGeom>
+        </p:spPr>
+      </p:pic>
+      <p:pic>
+        <p:nvPicPr>
+          <p:cNvPr id="7" name="Grafik 6">
+            <a:extLst>
+              <a:ext uri="{FF2B5EF4-FFF2-40B4-BE49-F238E27FC236}">
+                <a16:creationId xmlns:a16="http://schemas.microsoft.com/office/drawing/2014/main" id="{099BBA4D-3C49-12FD-9E8E-3F2721BDCB6F}"/>
+              </a:ext>
+            </a:extLst>
+          </p:cNvPr>
+          <p:cNvPicPr>
+            <a:picLocks noChangeAspect="1"/>
+          </p:cNvPicPr>
+          <p:nvPr/>
+        </p:nvPicPr>
+        <p:blipFill>
+          <a:blip r:embed="rId3">
+            <a:extLst>
+              <a:ext uri="{28A0092B-C50C-407E-A947-70E740481C1C}">
+                <a14:useLocalDpi xmlns:a14="http://schemas.microsoft.com/office/drawing/2010/main" val="0"/>
+              </a:ext>
+            </a:extLst>
+          </a:blip>
+          <a:stretch>
+            <a:fillRect/>
+          </a:stretch>
+        </p:blipFill>
+        <p:spPr>
+          <a:xfrm>
+            <a:off x="2509465" y="2888278"/>
+            <a:ext cx="1150728" cy="926074"/>
+          </a:xfrm>
+          <a:prstGeom prst="roundRect">
+            <a:avLst/>
+          </a:prstGeom>
+        </p:spPr>
+      </p:pic>
+      <p:pic>
+        <p:nvPicPr>
+          <p:cNvPr id="9" name="Grafik 8">
+            <a:extLst>
+              <a:ext uri="{FF2B5EF4-FFF2-40B4-BE49-F238E27FC236}">
+                <a16:creationId xmlns:a16="http://schemas.microsoft.com/office/drawing/2014/main" id="{EC61651E-62D0-028A-11BF-DDE591874BEB}"/>
+              </a:ext>
+            </a:extLst>
+          </p:cNvPr>
+          <p:cNvPicPr>
+            <a:picLocks noChangeAspect="1"/>
+          </p:cNvPicPr>
+          <p:nvPr/>
+        </p:nvPicPr>
+        <p:blipFill>
+          <a:blip r:embed="rId4">
+            <a:extLst>
+              <a:ext uri="{28A0092B-C50C-407E-A947-70E740481C1C}">
+                <a14:useLocalDpi xmlns:a14="http://schemas.microsoft.com/office/drawing/2010/main" val="0"/>
+              </a:ext>
+            </a:extLst>
+          </a:blip>
+          <a:stretch>
+            <a:fillRect/>
+          </a:stretch>
+        </p:blipFill>
+        <p:spPr>
+          <a:xfrm>
+            <a:off x="1805763" y="3454321"/>
+            <a:ext cx="594218" cy="957589"/>
+          </a:xfrm>
+          <a:prstGeom prst="roundRect">
+            <a:avLst/>
+          </a:prstGeom>
+        </p:spPr>
+      </p:pic>
+      <p:pic>
+        <p:nvPicPr>
+          <p:cNvPr id="11" name="Grafik 10">
+            <a:extLst>
+              <a:ext uri="{FF2B5EF4-FFF2-40B4-BE49-F238E27FC236}">
+                <a16:creationId xmlns:a16="http://schemas.microsoft.com/office/drawing/2014/main" id="{E3FE8792-9520-2197-7067-4AD2F7368673}"/>
+              </a:ext>
+            </a:extLst>
+          </p:cNvPr>
+          <p:cNvPicPr>
+            <a:picLocks noChangeAspect="1"/>
+          </p:cNvPicPr>
+          <p:nvPr/>
+        </p:nvPicPr>
+        <p:blipFill>
+          <a:blip r:embed="rId5">
+            <a:extLst>
+              <a:ext uri="{28A0092B-C50C-407E-A947-70E740481C1C}">
+                <a14:useLocalDpi xmlns:a14="http://schemas.microsoft.com/office/drawing/2010/main" val="0"/>
+              </a:ext>
+            </a:extLst>
+          </a:blip>
+          <a:stretch>
+            <a:fillRect/>
+          </a:stretch>
+        </p:blipFill>
+        <p:spPr>
+          <a:xfrm>
+            <a:off x="673733" y="2979642"/>
+            <a:ext cx="718192" cy="957589"/>
+          </a:xfrm>
+          <a:prstGeom prst="roundRect">
+            <a:avLst/>
+          </a:prstGeom>
+        </p:spPr>
+      </p:pic>
+      <p:pic>
+        <p:nvPicPr>
+          <p:cNvPr id="13" name="Grafik 12">
+            <a:extLst>
+              <a:ext uri="{FF2B5EF4-FFF2-40B4-BE49-F238E27FC236}">
+                <a16:creationId xmlns:a16="http://schemas.microsoft.com/office/drawing/2014/main" id="{1A29CEC7-AB38-3ABD-061C-0A8DD88D95DE}"/>
+              </a:ext>
+            </a:extLst>
+          </p:cNvPr>
+          <p:cNvPicPr>
+            <a:picLocks noChangeAspect="1"/>
+          </p:cNvPicPr>
+          <p:nvPr/>
+        </p:nvPicPr>
+        <p:blipFill>
+          <a:blip r:embed="rId6">
+            <a:extLst>
+              <a:ext uri="{28A0092B-C50C-407E-A947-70E740481C1C}">
+                <a14:useLocalDpi xmlns:a14="http://schemas.microsoft.com/office/drawing/2010/main" val="0"/>
+              </a:ext>
+            </a:extLst>
+          </a:blip>
+          <a:stretch>
+            <a:fillRect/>
+          </a:stretch>
+        </p:blipFill>
+        <p:spPr>
+          <a:xfrm>
+            <a:off x="1515091" y="2171462"/>
+            <a:ext cx="884890" cy="1179853"/>
+          </a:xfrm>
+          <a:prstGeom prst="roundRect">
+            <a:avLst/>
+          </a:prstGeom>
+        </p:spPr>
+      </p:pic>
+      <p:sp>
+        <p:nvSpPr>
+          <p:cNvPr id="14" name="Pfeil: nach rechts 13">
+            <a:extLst>
+              <a:ext uri="{FF2B5EF4-FFF2-40B4-BE49-F238E27FC236}">
+                <a16:creationId xmlns:a16="http://schemas.microsoft.com/office/drawing/2014/main" id="{F45CE69A-36C1-7046-102F-CD8B3DD369C1}"/>
+              </a:ext>
+            </a:extLst>
+          </p:cNvPr>
+          <p:cNvSpPr/>
+          <p:nvPr/>
+        </p:nvSpPr>
+        <p:spPr>
+          <a:xfrm>
+            <a:off x="4095717" y="3272976"/>
+            <a:ext cx="2153920" cy="660139"/>
+          </a:xfrm>
+          <a:prstGeom prst="rightArrow">
+            <a:avLst/>
+          </a:prstGeom>
+        </p:spPr>
+        <p:style>
+          <a:lnRef idx="2">
+            <a:schemeClr val="accent1">
+              <a:shade val="15000"/>
+            </a:schemeClr>
+          </a:lnRef>
+          <a:fillRef idx="1">
+            <a:schemeClr val="accent1"/>
+          </a:fillRef>
+          <a:effectRef idx="0">
+            <a:schemeClr val="accent1"/>
+          </a:effectRef>
+          <a:fontRef idx="minor">
+            <a:schemeClr val="lt1"/>
+          </a:fontRef>
+        </p:style>
+        <p:txBody>
+          <a:bodyPr rtlCol="0" anchor="ctr"/>
+          <a:lstStyle/>
+          <a:p>
+            <a:pPr algn="ctr"/>
+            <a:endParaRPr lang="de-DE"/>
+          </a:p>
+        </p:txBody>
+      </p:sp>
+      <p:pic>
+        <p:nvPicPr>
+          <p:cNvPr id="16" name="Grafik 15" descr="Netzwerk mit einfarbiger Füllung">
+            <a:extLst>
+              <a:ext uri="{FF2B5EF4-FFF2-40B4-BE49-F238E27FC236}">
+                <a16:creationId xmlns:a16="http://schemas.microsoft.com/office/drawing/2014/main" id="{B2C34069-2C55-25FE-F3FA-7A5A50AF0283}"/>
+              </a:ext>
+            </a:extLst>
+          </p:cNvPr>
+          <p:cNvPicPr>
+            <a:picLocks noChangeAspect="1"/>
+          </p:cNvPicPr>
+          <p:nvPr/>
+        </p:nvPicPr>
+        <p:blipFill>
+          <a:blip>
+            <a:extLst>
+              <a:ext uri="{96DAC541-7B7A-43D3-8B79-37D633B846F1}">
+                <asvg:svgBlip xmlns:asvg="http://schemas.microsoft.com/office/drawing/2016/SVG/main" r:embed="rId7"/>
+              </a:ext>
+            </a:extLst>
+          </a:blip>
+          <a:stretch>
+            <a:fillRect/>
+          </a:stretch>
+        </p:blipFill>
+        <p:spPr>
+          <a:xfrm>
+            <a:off x="6545246" y="2608067"/>
+            <a:ext cx="2053064" cy="2053064"/>
+          </a:xfrm>
+          <a:prstGeom prst="rect">
+            <a:avLst/>
+          </a:prstGeom>
+        </p:spPr>
+      </p:pic>
+      <p:sp>
+        <p:nvSpPr>
+          <p:cNvPr id="18" name="Textfeld 17">
+            <a:extLst>
+              <a:ext uri="{FF2B5EF4-FFF2-40B4-BE49-F238E27FC236}">
+                <a16:creationId xmlns:a16="http://schemas.microsoft.com/office/drawing/2014/main" id="{4ADF578E-FDC6-660A-2F6A-DB7581531C15}"/>
+              </a:ext>
+            </a:extLst>
+          </p:cNvPr>
+          <p:cNvSpPr txBox="1"/>
+          <p:nvPr/>
+        </p:nvSpPr>
+        <p:spPr>
+          <a:xfrm>
+            <a:off x="6626942" y="4495352"/>
+            <a:ext cx="2053064" cy="584775"/>
+          </a:xfrm>
+          <a:prstGeom prst="rect">
+            <a:avLst/>
+          </a:prstGeom>
+          <a:noFill/>
+        </p:spPr>
+        <p:txBody>
+          <a:bodyPr wrap="square">
+            <a:spAutoFit/>
+          </a:bodyPr>
+          <a:lstStyle/>
+          <a:p>
+            <a:r>
+              <a:rPr lang="de-DE" sz="3200" dirty="0">
+                <a:solidFill>
+                  <a:srgbClr val="0070C0"/>
+                </a:solidFill>
+              </a:rPr>
+              <a:t>ResNet18</a:t>
+            </a:r>
+            <a:endParaRPr lang="de-DE" dirty="0">
+              <a:solidFill>
+                <a:srgbClr val="0070C0"/>
+              </a:solidFill>
+            </a:endParaRPr>
+          </a:p>
+        </p:txBody>
+      </p:sp>
+      <p:sp>
+        <p:nvSpPr>
+          <p:cNvPr id="20" name="Textfeld 19">
+            <a:extLst>
+              <a:ext uri="{FF2B5EF4-FFF2-40B4-BE49-F238E27FC236}">
+                <a16:creationId xmlns:a16="http://schemas.microsoft.com/office/drawing/2014/main" id="{256EEC7F-D496-7097-5808-2BD75D133318}"/>
+              </a:ext>
+            </a:extLst>
+          </p:cNvPr>
+          <p:cNvSpPr txBox="1"/>
+          <p:nvPr/>
+        </p:nvSpPr>
+        <p:spPr>
+          <a:xfrm>
+            <a:off x="9006349" y="3058927"/>
+            <a:ext cx="3048000" cy="584775"/>
+          </a:xfrm>
+          <a:prstGeom prst="rect">
+            <a:avLst/>
+          </a:prstGeom>
+          <a:noFill/>
+        </p:spPr>
+        <p:txBody>
+          <a:bodyPr wrap="square">
+            <a:spAutoFit/>
+          </a:bodyPr>
+          <a:lstStyle/>
+          <a:p>
+            <a:r>
+              <a:rPr lang="de-DE" sz="3200" dirty="0">
+                <a:solidFill>
+                  <a:srgbClr val="FF0000"/>
+                </a:solidFill>
+              </a:rPr>
+              <a:t>EfficientNet-B0</a:t>
+            </a:r>
+            <a:endParaRPr lang="de-DE" dirty="0">
+              <a:solidFill>
+                <a:srgbClr val="FF0000"/>
+              </a:solidFill>
+            </a:endParaRPr>
+          </a:p>
+        </p:txBody>
+      </p:sp>
+      <p:pic>
+        <p:nvPicPr>
+          <p:cNvPr id="21" name="Grafik 20" descr="Netzwerk mit einfarbiger Füllung">
+            <a:extLst>
+              <a:ext uri="{FF2B5EF4-FFF2-40B4-BE49-F238E27FC236}">
+                <a16:creationId xmlns:a16="http://schemas.microsoft.com/office/drawing/2014/main" id="{F44CDF1E-3FA3-20CF-E87C-8EBDE1E9EF79}"/>
+              </a:ext>
+            </a:extLst>
+          </p:cNvPr>
+          <p:cNvPicPr>
+            <a:picLocks noChangeAspect="1"/>
+          </p:cNvPicPr>
+          <p:nvPr/>
+        </p:nvPicPr>
+        <p:blipFill>
+          <a:blip>
+            <a:extLst>
+              <a:ext uri="{96DAC541-7B7A-43D3-8B79-37D633B846F1}">
+                <asvg:svgBlip xmlns:asvg="http://schemas.microsoft.com/office/drawing/2016/SVG/main" r:embed="rId8"/>
+              </a:ext>
+            </a:extLst>
+          </a:blip>
+          <a:stretch>
+            <a:fillRect/>
+          </a:stretch>
+        </p:blipFill>
+        <p:spPr>
+          <a:xfrm>
+            <a:off x="9375075" y="1144930"/>
+            <a:ext cx="2053064" cy="2053064"/>
+          </a:xfrm>
+          <a:prstGeom prst="rect">
+            <a:avLst/>
+          </a:prstGeom>
+        </p:spPr>
+      </p:pic>
+      <p:sp>
+        <p:nvSpPr>
+          <p:cNvPr id="23" name="Rechteck: abgerundete Ecken 22">
+            <a:extLst>
+              <a:ext uri="{FF2B5EF4-FFF2-40B4-BE49-F238E27FC236}">
+                <a16:creationId xmlns:a16="http://schemas.microsoft.com/office/drawing/2014/main" id="{D28BA899-51D8-13FE-4D4F-14804084D1A2}"/>
+              </a:ext>
+            </a:extLst>
+          </p:cNvPr>
+          <p:cNvSpPr/>
+          <p:nvPr/>
+        </p:nvSpPr>
+        <p:spPr>
+          <a:xfrm>
+            <a:off x="10432025" y="6331974"/>
+            <a:ext cx="1563329" cy="432620"/>
+          </a:xfrm>
+          <a:prstGeom prst="roundRect">
+            <a:avLst/>
+          </a:prstGeom>
+          <a:solidFill>
+            <a:srgbClr val="002060"/>
+          </a:solidFill>
+        </p:spPr>
+        <p:style>
+          <a:lnRef idx="2">
+            <a:schemeClr val="accent1">
+              <a:shade val="15000"/>
+            </a:schemeClr>
+          </a:lnRef>
+          <a:fillRef idx="1">
+            <a:schemeClr val="accent1"/>
+          </a:fillRef>
+          <a:effectRef idx="0">
+            <a:schemeClr val="accent1"/>
+          </a:effectRef>
+          <a:fontRef idx="minor">
+            <a:schemeClr val="lt1"/>
+          </a:fontRef>
+        </p:style>
+        <p:txBody>
+          <a:bodyPr rtlCol="0" anchor="ctr"/>
+          <a:lstStyle/>
+          <a:p>
+            <a:pPr algn="ctr"/>
+            <a:endParaRPr lang="de-DE"/>
+          </a:p>
+        </p:txBody>
+      </p:sp>
+      <p:sp>
+        <p:nvSpPr>
+          <p:cNvPr id="25" name="Textfeld 24">
+            <a:extLst>
+              <a:ext uri="{FF2B5EF4-FFF2-40B4-BE49-F238E27FC236}">
+                <a16:creationId xmlns:a16="http://schemas.microsoft.com/office/drawing/2014/main" id="{BE6C63C9-F865-D051-05E5-1EB5AA771FDF}"/>
+              </a:ext>
+            </a:extLst>
+          </p:cNvPr>
+          <p:cNvSpPr txBox="1"/>
+          <p:nvPr/>
+        </p:nvSpPr>
+        <p:spPr>
+          <a:xfrm>
+            <a:off x="10432026" y="6363618"/>
+            <a:ext cx="1759974" cy="369332"/>
+          </a:xfrm>
+          <a:prstGeom prst="rect">
+            <a:avLst/>
+          </a:prstGeom>
+          <a:noFill/>
+        </p:spPr>
+        <p:txBody>
+          <a:bodyPr wrap="square" rtlCol="0">
+            <a:spAutoFit/>
+          </a:bodyPr>
+          <a:lstStyle/>
+          <a:p>
+            <a:r>
+              <a:rPr lang="de-DE" dirty="0">
+                <a:solidFill>
+                  <a:schemeClr val="bg1"/>
+                </a:solidFill>
+              </a:rPr>
+              <a:t>Tobias Daiger</a:t>
+            </a:r>
+          </a:p>
+        </p:txBody>
+      </p:sp>
+      <p:sp>
+        <p:nvSpPr>
+          <p:cNvPr id="26" name="Textfeld 25">
+            <a:extLst>
+              <a:ext uri="{FF2B5EF4-FFF2-40B4-BE49-F238E27FC236}">
+                <a16:creationId xmlns:a16="http://schemas.microsoft.com/office/drawing/2014/main" id="{A28BCB76-EE50-7F0F-DEE6-DF64EB7A36D4}"/>
+              </a:ext>
+            </a:extLst>
+          </p:cNvPr>
+          <p:cNvSpPr txBox="1"/>
+          <p:nvPr/>
+        </p:nvSpPr>
+        <p:spPr>
+          <a:xfrm>
+            <a:off x="4103800" y="2608067"/>
+            <a:ext cx="2053064" cy="523220"/>
+          </a:xfrm>
+          <a:prstGeom prst="rect">
+            <a:avLst/>
+          </a:prstGeom>
+          <a:noFill/>
+        </p:spPr>
+        <p:txBody>
+          <a:bodyPr wrap="square" rtlCol="0">
+            <a:spAutoFit/>
+          </a:bodyPr>
+          <a:lstStyle/>
+          <a:p>
+            <a:r>
+              <a:rPr lang="de-DE" sz="2800" b="1" dirty="0"/>
+              <a:t>TRAINING</a:t>
+            </a:r>
+          </a:p>
+        </p:txBody>
+      </p:sp>
+      <p:sp>
+        <p:nvSpPr>
+          <p:cNvPr id="27" name="Textfeld 26">
+            <a:extLst>
+              <a:ext uri="{FF2B5EF4-FFF2-40B4-BE49-F238E27FC236}">
+                <a16:creationId xmlns:a16="http://schemas.microsoft.com/office/drawing/2014/main" id="{92065F0B-2424-020E-F884-8C3BB7E4D7ED}"/>
+              </a:ext>
+            </a:extLst>
+          </p:cNvPr>
+          <p:cNvSpPr txBox="1"/>
+          <p:nvPr/>
+        </p:nvSpPr>
+        <p:spPr>
+          <a:xfrm>
+            <a:off x="7769371" y="5111771"/>
+            <a:ext cx="3658768" cy="954107"/>
+          </a:xfrm>
+          <a:prstGeom prst="rect">
+            <a:avLst/>
+          </a:prstGeom>
+          <a:noFill/>
+        </p:spPr>
+        <p:txBody>
+          <a:bodyPr wrap="square" rtlCol="0">
+            <a:spAutoFit/>
+          </a:bodyPr>
+          <a:lstStyle/>
+          <a:p>
+            <a:r>
+              <a:rPr lang="de-DE" sz="2800" b="1" dirty="0"/>
+              <a:t>4 + 4 </a:t>
+            </a:r>
+            <a:r>
+              <a:rPr lang="de-DE" sz="2800" b="1" dirty="0" err="1"/>
+              <a:t>Epoches</a:t>
+            </a:r>
+            <a:endParaRPr lang="de-DE" sz="2800" b="1" dirty="0"/>
+          </a:p>
+          <a:p>
+            <a:r>
+              <a:rPr lang="de-DE" sz="2800" b="1" dirty="0"/>
+              <a:t>Head + Finetuning</a:t>
+            </a:r>
+          </a:p>
+        </p:txBody>
+      </p:sp>
+    </p:spTree>
+    <p:extLst>
+      <p:ext uri="{BB962C8B-B14F-4D97-AF65-F5344CB8AC3E}">
+        <p14:creationId xmlns:p14="http://schemas.microsoft.com/office/powerpoint/2010/main" val="859326717"/>
+      </p:ext>
+    </p:extLst>
+  </p:cSld>
+  <p:clrMapOvr>
+    <a:masterClrMapping/>
+  </p:clrMapOvr>
+</p:sld>
+</file>
+
+<file path=ppt/slides/slide4.xml><?xml version="1.0" encoding="utf-8"?>
+<p:sld xmlns:a="http://schemas.openxmlformats.org/drawingml/2006/main" xmlns:r="http://schemas.openxmlformats.org/officeDocument/2006/relationships" xmlns:p="http://schemas.openxmlformats.org/presentationml/2006/main">
+  <p:cSld>
+    <p:spTree>
+      <p:nvGrpSpPr>
+        <p:cNvPr id="1" name="">
+          <a:extLst>
+            <a:ext uri="{FF2B5EF4-FFF2-40B4-BE49-F238E27FC236}">
+              <a16:creationId xmlns:a16="http://schemas.microsoft.com/office/drawing/2014/main" id="{E7FA67A5-7532-BC0F-D5B8-E8CDA59E5856}"/>
+            </a:ext>
+          </a:extLst>
+        </p:cNvPr>
+        <p:cNvGrpSpPr/>
+        <p:nvPr/>
+      </p:nvGrpSpPr>
+      <p:grpSpPr>
+        <a:xfrm>
+          <a:off x="0" y="0"/>
+          <a:ext cx="0" cy="0"/>
+          <a:chOff x="0" y="0"/>
+          <a:chExt cx="0" cy="0"/>
+        </a:xfrm>
+      </p:grpSpPr>
+      <p:pic>
+        <p:nvPicPr>
+          <p:cNvPr id="13" name="Grafik 12">
+            <a:extLst>
+              <a:ext uri="{FF2B5EF4-FFF2-40B4-BE49-F238E27FC236}">
+                <a16:creationId xmlns:a16="http://schemas.microsoft.com/office/drawing/2014/main" id="{E876F760-A1E1-9B4A-03D9-5E6C9D87A0F0}"/>
+              </a:ext>
+            </a:extLst>
+          </p:cNvPr>
+          <p:cNvPicPr>
+            <a:picLocks noChangeAspect="1"/>
+          </p:cNvPicPr>
+          <p:nvPr/>
+        </p:nvPicPr>
+        <p:blipFill>
+          <a:blip r:embed="rId2">
+            <a:extLst>
+              <a:ext uri="{28A0092B-C50C-407E-A947-70E740481C1C}">
+                <a14:useLocalDpi xmlns:a14="http://schemas.microsoft.com/office/drawing/2010/main" val="0"/>
+              </a:ext>
+            </a:extLst>
+          </a:blip>
+          <a:stretch>
+            <a:fillRect/>
+          </a:stretch>
+        </p:blipFill>
+        <p:spPr>
+          <a:xfrm>
+            <a:off x="499036" y="1728677"/>
+            <a:ext cx="1711498" cy="2281997"/>
+          </a:xfrm>
+          <a:prstGeom prst="roundRect">
+            <a:avLst/>
+          </a:prstGeom>
+        </p:spPr>
+      </p:pic>
+      <p:sp>
+        <p:nvSpPr>
+          <p:cNvPr id="14" name="Pfeil: nach rechts 13">
+            <a:extLst>
+              <a:ext uri="{FF2B5EF4-FFF2-40B4-BE49-F238E27FC236}">
+                <a16:creationId xmlns:a16="http://schemas.microsoft.com/office/drawing/2014/main" id="{B85F0AC8-ECDE-1723-072D-10CCB9EB3923}"/>
+              </a:ext>
+            </a:extLst>
+          </p:cNvPr>
+          <p:cNvSpPr/>
+          <p:nvPr/>
+        </p:nvSpPr>
+        <p:spPr>
+          <a:xfrm>
+            <a:off x="2546554" y="2539607"/>
+            <a:ext cx="1475549" cy="660139"/>
+          </a:xfrm>
+          <a:prstGeom prst="rightArrow">
+            <a:avLst/>
+          </a:prstGeom>
+          <a:solidFill>
+            <a:srgbClr val="FFC000"/>
+          </a:solidFill>
+        </p:spPr>
+        <p:style>
+          <a:lnRef idx="2">
+            <a:schemeClr val="accent1">
+              <a:shade val="15000"/>
+            </a:schemeClr>
+          </a:lnRef>
+          <a:fillRef idx="1">
+            <a:schemeClr val="accent1"/>
+          </a:fillRef>
+          <a:effectRef idx="0">
+            <a:schemeClr val="accent1"/>
+          </a:effectRef>
+          <a:fontRef idx="minor">
+            <a:schemeClr val="lt1"/>
+          </a:fontRef>
+        </p:style>
+        <p:txBody>
+          <a:bodyPr rtlCol="0" anchor="ctr"/>
+          <a:lstStyle/>
+          <a:p>
+            <a:pPr algn="ctr"/>
+            <a:endParaRPr lang="de-DE" dirty="0"/>
+          </a:p>
+        </p:txBody>
+      </p:sp>
+      <p:pic>
+        <p:nvPicPr>
+          <p:cNvPr id="16" name="Grafik 15" descr="Netzwerk mit einfarbiger Füllung">
+            <a:extLst>
+              <a:ext uri="{FF2B5EF4-FFF2-40B4-BE49-F238E27FC236}">
+                <a16:creationId xmlns:a16="http://schemas.microsoft.com/office/drawing/2014/main" id="{2495ECAF-B56C-010C-8AE0-54473533F276}"/>
+              </a:ext>
+            </a:extLst>
+          </p:cNvPr>
+          <p:cNvPicPr>
+            <a:picLocks noChangeAspect="1"/>
+          </p:cNvPicPr>
+          <p:nvPr/>
+        </p:nvPicPr>
+        <p:blipFill>
+          <a:blip>
+            <a:extLst>
+              <a:ext uri="{96DAC541-7B7A-43D3-8B79-37D633B846F1}">
+                <asvg:svgBlip xmlns:asvg="http://schemas.microsoft.com/office/drawing/2016/SVG/main" r:embed="rId3"/>
+              </a:ext>
+            </a:extLst>
+          </a:blip>
+          <a:stretch>
+            <a:fillRect/>
+          </a:stretch>
+        </p:blipFill>
+        <p:spPr>
+          <a:xfrm>
+            <a:off x="4265093" y="2670808"/>
+            <a:ext cx="1179853" cy="1179853"/>
+          </a:xfrm>
+          <a:prstGeom prst="rect">
+            <a:avLst/>
+          </a:prstGeom>
+        </p:spPr>
+      </p:pic>
+      <p:sp>
+        <p:nvSpPr>
+          <p:cNvPr id="18" name="Textfeld 17">
+            <a:extLst>
+              <a:ext uri="{FF2B5EF4-FFF2-40B4-BE49-F238E27FC236}">
+                <a16:creationId xmlns:a16="http://schemas.microsoft.com/office/drawing/2014/main" id="{8FC3E194-30AD-93F1-1D1D-C46A30595683}"/>
+              </a:ext>
+            </a:extLst>
+          </p:cNvPr>
+          <p:cNvSpPr txBox="1"/>
+          <p:nvPr/>
+        </p:nvSpPr>
+        <p:spPr>
+          <a:xfrm>
+            <a:off x="4181509" y="3850661"/>
+            <a:ext cx="1347019" cy="400110"/>
+          </a:xfrm>
+          <a:prstGeom prst="rect">
+            <a:avLst/>
+          </a:prstGeom>
+          <a:noFill/>
+        </p:spPr>
+        <p:txBody>
+          <a:bodyPr wrap="square">
+            <a:spAutoFit/>
+          </a:bodyPr>
+          <a:lstStyle/>
+          <a:p>
+            <a:r>
+              <a:rPr lang="de-DE" sz="2000" dirty="0">
+                <a:solidFill>
+                  <a:srgbClr val="0070C0"/>
+                </a:solidFill>
+              </a:rPr>
+              <a:t>ResNet18</a:t>
+            </a:r>
+            <a:endParaRPr lang="de-DE" sz="1200" dirty="0">
+              <a:solidFill>
+                <a:srgbClr val="0070C0"/>
+              </a:solidFill>
+            </a:endParaRPr>
+          </a:p>
+        </p:txBody>
+      </p:sp>
+      <p:sp>
+        <p:nvSpPr>
+          <p:cNvPr id="20" name="Textfeld 19">
+            <a:extLst>
+              <a:ext uri="{FF2B5EF4-FFF2-40B4-BE49-F238E27FC236}">
+                <a16:creationId xmlns:a16="http://schemas.microsoft.com/office/drawing/2014/main" id="{A2513CBD-5F43-22F6-F373-AD7463E2EF89}"/>
+              </a:ext>
+            </a:extLst>
+          </p:cNvPr>
+          <p:cNvSpPr txBox="1"/>
+          <p:nvPr/>
+        </p:nvSpPr>
+        <p:spPr>
+          <a:xfrm>
+            <a:off x="5747157" y="3129533"/>
+            <a:ext cx="1999798" cy="400110"/>
+          </a:xfrm>
+          <a:prstGeom prst="rect">
+            <a:avLst/>
+          </a:prstGeom>
+          <a:noFill/>
+        </p:spPr>
+        <p:txBody>
+          <a:bodyPr wrap="square">
+            <a:spAutoFit/>
+          </a:bodyPr>
+          <a:lstStyle/>
+          <a:p>
+            <a:r>
+              <a:rPr lang="de-DE" sz="2000" dirty="0">
+                <a:solidFill>
+                  <a:srgbClr val="FF0000"/>
+                </a:solidFill>
+              </a:rPr>
+              <a:t>EfficientNet-B0</a:t>
+            </a:r>
+            <a:endParaRPr lang="de-DE" sz="1200" dirty="0">
+              <a:solidFill>
+                <a:srgbClr val="FF0000"/>
+              </a:solidFill>
+            </a:endParaRPr>
+          </a:p>
+        </p:txBody>
+      </p:sp>
+      <p:pic>
+        <p:nvPicPr>
+          <p:cNvPr id="21" name="Grafik 20" descr="Netzwerk mit einfarbiger Füllung">
+            <a:extLst>
+              <a:ext uri="{FF2B5EF4-FFF2-40B4-BE49-F238E27FC236}">
+                <a16:creationId xmlns:a16="http://schemas.microsoft.com/office/drawing/2014/main" id="{75E8B5F7-663A-88C0-3C1F-BA5B035AB856}"/>
+              </a:ext>
+            </a:extLst>
+          </p:cNvPr>
+          <p:cNvPicPr>
+            <a:picLocks noChangeAspect="1"/>
+          </p:cNvPicPr>
+          <p:nvPr/>
+        </p:nvPicPr>
+        <p:blipFill>
+          <a:blip>
+            <a:extLst>
+              <a:ext uri="{96DAC541-7B7A-43D3-8B79-37D633B846F1}">
+                <asvg:svgBlip xmlns:asvg="http://schemas.microsoft.com/office/drawing/2016/SVG/main" r:embed="rId4"/>
+              </a:ext>
+            </a:extLst>
+          </a:blip>
+          <a:stretch>
+            <a:fillRect/>
+          </a:stretch>
+        </p:blipFill>
+        <p:spPr>
+          <a:xfrm>
+            <a:off x="6083177" y="1949680"/>
+            <a:ext cx="1179853" cy="1179853"/>
+          </a:xfrm>
+          <a:prstGeom prst="rect">
+            <a:avLst/>
+          </a:prstGeom>
+        </p:spPr>
+      </p:pic>
+      <p:sp>
+        <p:nvSpPr>
+          <p:cNvPr id="23" name="Rechteck: abgerundete Ecken 22">
+            <a:extLst>
+              <a:ext uri="{FF2B5EF4-FFF2-40B4-BE49-F238E27FC236}">
+                <a16:creationId xmlns:a16="http://schemas.microsoft.com/office/drawing/2014/main" id="{F352DE2E-8CFD-5B61-1A85-A4381E6C593A}"/>
+              </a:ext>
+            </a:extLst>
+          </p:cNvPr>
+          <p:cNvSpPr/>
+          <p:nvPr/>
+        </p:nvSpPr>
+        <p:spPr>
+          <a:xfrm>
+            <a:off x="10432025" y="6331974"/>
+            <a:ext cx="1563329" cy="432620"/>
+          </a:xfrm>
+          <a:prstGeom prst="roundRect">
+            <a:avLst/>
+          </a:prstGeom>
+          <a:solidFill>
+            <a:srgbClr val="002060"/>
+          </a:solidFill>
+        </p:spPr>
+        <p:style>
+          <a:lnRef idx="2">
+            <a:schemeClr val="accent1">
+              <a:shade val="15000"/>
+            </a:schemeClr>
+          </a:lnRef>
+          <a:fillRef idx="1">
+            <a:schemeClr val="accent1"/>
+          </a:fillRef>
+          <a:effectRef idx="0">
+            <a:schemeClr val="accent1"/>
+          </a:effectRef>
+          <a:fontRef idx="minor">
+            <a:schemeClr val="lt1"/>
+          </a:fontRef>
+        </p:style>
+        <p:txBody>
+          <a:bodyPr rtlCol="0" anchor="ctr"/>
+          <a:lstStyle/>
+          <a:p>
+            <a:pPr algn="ctr"/>
+            <a:endParaRPr lang="de-DE"/>
+          </a:p>
+        </p:txBody>
+      </p:sp>
+      <p:sp>
+        <p:nvSpPr>
+          <p:cNvPr id="25" name="Textfeld 24">
+            <a:extLst>
+              <a:ext uri="{FF2B5EF4-FFF2-40B4-BE49-F238E27FC236}">
+                <a16:creationId xmlns:a16="http://schemas.microsoft.com/office/drawing/2014/main" id="{4DD5E7A5-1D0F-B53D-4AC2-510AE4F28932}"/>
+              </a:ext>
+            </a:extLst>
+          </p:cNvPr>
+          <p:cNvSpPr txBox="1"/>
+          <p:nvPr/>
+        </p:nvSpPr>
+        <p:spPr>
+          <a:xfrm>
+            <a:off x="10432026" y="6363618"/>
+            <a:ext cx="1759974" cy="369332"/>
+          </a:xfrm>
+          <a:prstGeom prst="rect">
+            <a:avLst/>
+          </a:prstGeom>
+          <a:noFill/>
+        </p:spPr>
+        <p:txBody>
+          <a:bodyPr wrap="square" rtlCol="0">
+            <a:spAutoFit/>
+          </a:bodyPr>
+          <a:lstStyle/>
+          <a:p>
+            <a:r>
+              <a:rPr lang="de-DE" dirty="0">
+                <a:solidFill>
+                  <a:schemeClr val="bg1"/>
+                </a:solidFill>
+              </a:rPr>
+              <a:t>Tobias Daiger</a:t>
+            </a:r>
+          </a:p>
+        </p:txBody>
+      </p:sp>
+      <p:sp>
+        <p:nvSpPr>
+          <p:cNvPr id="26" name="Textfeld 25">
+            <a:extLst>
+              <a:ext uri="{FF2B5EF4-FFF2-40B4-BE49-F238E27FC236}">
+                <a16:creationId xmlns:a16="http://schemas.microsoft.com/office/drawing/2014/main" id="{1A24F56B-C6CC-A393-8A49-9EBFB7E152C0}"/>
+              </a:ext>
+            </a:extLst>
+          </p:cNvPr>
+          <p:cNvSpPr txBox="1"/>
+          <p:nvPr/>
+        </p:nvSpPr>
+        <p:spPr>
+          <a:xfrm>
+            <a:off x="5056645" y="1426460"/>
+            <a:ext cx="2053064" cy="523220"/>
+          </a:xfrm>
+          <a:prstGeom prst="rect">
+            <a:avLst/>
+          </a:prstGeom>
+          <a:noFill/>
+        </p:spPr>
+        <p:txBody>
+          <a:bodyPr wrap="square" rtlCol="0">
+            <a:spAutoFit/>
+          </a:bodyPr>
+          <a:lstStyle/>
+          <a:p>
+            <a:r>
+              <a:rPr lang="de-DE" sz="2800" b="1" dirty="0"/>
+              <a:t>TESTING</a:t>
+            </a:r>
+          </a:p>
+        </p:txBody>
+      </p:sp>
+      <p:sp>
+        <p:nvSpPr>
+          <p:cNvPr id="2" name="Pfeil: nach rechts 1">
+            <a:extLst>
+              <a:ext uri="{FF2B5EF4-FFF2-40B4-BE49-F238E27FC236}">
+                <a16:creationId xmlns:a16="http://schemas.microsoft.com/office/drawing/2014/main" id="{1F4C50B5-7E49-2203-F60F-3BF8E353D249}"/>
+              </a:ext>
+            </a:extLst>
+          </p:cNvPr>
+          <p:cNvSpPr/>
+          <p:nvPr/>
+        </p:nvSpPr>
+        <p:spPr>
+          <a:xfrm>
+            <a:off x="8082975" y="2669449"/>
+            <a:ext cx="1562471" cy="660139"/>
+          </a:xfrm>
+          <a:prstGeom prst="rightArrow">
+            <a:avLst/>
+          </a:prstGeom>
+          <a:solidFill>
+            <a:srgbClr val="FFC000"/>
+          </a:solidFill>
+        </p:spPr>
+        <p:style>
+          <a:lnRef idx="2">
+            <a:schemeClr val="accent1">
+              <a:shade val="15000"/>
+            </a:schemeClr>
+          </a:lnRef>
+          <a:fillRef idx="1">
+            <a:schemeClr val="accent1"/>
+          </a:fillRef>
+          <a:effectRef idx="0">
+            <a:schemeClr val="accent1"/>
+          </a:effectRef>
+          <a:fontRef idx="minor">
+            <a:schemeClr val="lt1"/>
+          </a:fontRef>
+        </p:style>
+        <p:txBody>
+          <a:bodyPr rtlCol="0" anchor="ctr"/>
+          <a:lstStyle/>
+          <a:p>
+            <a:pPr algn="ctr"/>
+            <a:endParaRPr lang="de-DE" dirty="0"/>
+          </a:p>
+        </p:txBody>
+      </p:sp>
+      <p:pic>
+        <p:nvPicPr>
+          <p:cNvPr id="3" name="Grafik 2">
+            <a:extLst>
+              <a:ext uri="{FF2B5EF4-FFF2-40B4-BE49-F238E27FC236}">
+                <a16:creationId xmlns:a16="http://schemas.microsoft.com/office/drawing/2014/main" id="{2CE5842C-A74E-D540-2BDE-C8FBE161538B}"/>
+              </a:ext>
+            </a:extLst>
+          </p:cNvPr>
+          <p:cNvPicPr>
+            <a:picLocks noChangeAspect="1"/>
+          </p:cNvPicPr>
+          <p:nvPr/>
+        </p:nvPicPr>
+        <p:blipFill>
+          <a:blip r:embed="rId2">
+            <a:extLst>
+              <a:ext uri="{28A0092B-C50C-407E-A947-70E740481C1C}">
+                <a14:useLocalDpi xmlns:a14="http://schemas.microsoft.com/office/drawing/2010/main" val="0"/>
+              </a:ext>
+            </a:extLst>
+          </a:blip>
+          <a:stretch>
+            <a:fillRect/>
+          </a:stretch>
+        </p:blipFill>
+        <p:spPr>
+          <a:xfrm>
+            <a:off x="10008184" y="1906555"/>
+            <a:ext cx="1711498" cy="2281997"/>
+          </a:xfrm>
+          <a:prstGeom prst="roundRect">
+            <a:avLst/>
+          </a:prstGeom>
+        </p:spPr>
+      </p:pic>
+      <p:pic>
+        <p:nvPicPr>
+          <p:cNvPr id="6" name="Grafik 5" descr="Häkchen mit einfarbiger Füllung">
+            <a:extLst>
+              <a:ext uri="{FF2B5EF4-FFF2-40B4-BE49-F238E27FC236}">
+                <a16:creationId xmlns:a16="http://schemas.microsoft.com/office/drawing/2014/main" id="{6A293E11-0201-035D-7A6F-D1569F064ACF}"/>
+              </a:ext>
+            </a:extLst>
+          </p:cNvPr>
+          <p:cNvPicPr>
+            <a:picLocks noChangeAspect="1"/>
+          </p:cNvPicPr>
+          <p:nvPr/>
+        </p:nvPicPr>
+        <p:blipFill>
+          <a:blip>
+            <a:extLst>
+              <a:ext uri="{96DAC541-7B7A-43D3-8B79-37D633B846F1}">
+                <asvg:svgBlip xmlns:asvg="http://schemas.microsoft.com/office/drawing/2016/SVG/main" r:embed="rId5"/>
+              </a:ext>
+            </a:extLst>
+          </a:blip>
+          <a:stretch>
+            <a:fillRect/>
+          </a:stretch>
+        </p:blipFill>
+        <p:spPr>
+          <a:xfrm>
+            <a:off x="8400611" y="949230"/>
+            <a:ext cx="1607573" cy="1607573"/>
+          </a:xfrm>
+          <a:prstGeom prst="rect">
+            <a:avLst/>
+          </a:prstGeom>
+        </p:spPr>
+      </p:pic>
+    </p:spTree>
+    <p:extLst>
+      <p:ext uri="{BB962C8B-B14F-4D97-AF65-F5344CB8AC3E}">
+        <p14:creationId xmlns:p14="http://schemas.microsoft.com/office/powerpoint/2010/main" val="1916383499"/>
+      </p:ext>
+    </p:extLst>
+  </p:cSld>
+  <p:clrMapOvr>
+    <a:masterClrMapping/>
+  </p:clrMapOvr>
+</p:sld>
+</file>
+
+<file path=ppt/slides/slide5.xml><?xml version="1.0" encoding="utf-8"?>
+<p:sld xmlns:a="http://schemas.openxmlformats.org/drawingml/2006/main" xmlns:r="http://schemas.openxmlformats.org/officeDocument/2006/relationships" xmlns:p="http://schemas.openxmlformats.org/presentationml/2006/main">
+  <p:cSld>
+    <p:spTree>
+      <p:nvGrpSpPr>
+        <p:cNvPr id="1" name="">
+          <a:extLst>
+            <a:ext uri="{FF2B5EF4-FFF2-40B4-BE49-F238E27FC236}">
+              <a16:creationId xmlns:a16="http://schemas.microsoft.com/office/drawing/2014/main" id="{D2FE29ED-83BE-52E1-22C8-1CE347DF7E3E}"/>
+            </a:ext>
+          </a:extLst>
+        </p:cNvPr>
+        <p:cNvGrpSpPr/>
+        <p:nvPr/>
+      </p:nvGrpSpPr>
+      <p:grpSpPr>
+        <a:xfrm>
+          <a:off x="0" y="0"/>
+          <a:ext cx="0" cy="0"/>
+          <a:chOff x="0" y="0"/>
+          <a:chExt cx="0" cy="0"/>
+        </a:xfrm>
+      </p:grpSpPr>
+      <p:sp>
+        <p:nvSpPr>
+          <p:cNvPr id="5" name="Rechteck: abgerundete Ecken 4">
+            <a:extLst>
+              <a:ext uri="{FF2B5EF4-FFF2-40B4-BE49-F238E27FC236}">
+                <a16:creationId xmlns:a16="http://schemas.microsoft.com/office/drawing/2014/main" id="{1E388296-D728-2024-ADB0-EEC258160A19}"/>
+              </a:ext>
+            </a:extLst>
+          </p:cNvPr>
+          <p:cNvSpPr/>
+          <p:nvPr/>
+        </p:nvSpPr>
+        <p:spPr>
+          <a:xfrm>
+            <a:off x="10432025" y="6331974"/>
+            <a:ext cx="1563329" cy="432620"/>
+          </a:xfrm>
+          <a:prstGeom prst="roundRect">
+            <a:avLst/>
+          </a:prstGeom>
+          <a:solidFill>
+            <a:srgbClr val="002060"/>
+          </a:solidFill>
+        </p:spPr>
+        <p:style>
+          <a:lnRef idx="2">
+            <a:schemeClr val="accent1">
+              <a:shade val="15000"/>
+            </a:schemeClr>
+          </a:lnRef>
+          <a:fillRef idx="1">
+            <a:schemeClr val="accent1"/>
+          </a:fillRef>
+          <a:effectRef idx="0">
+            <a:schemeClr val="accent1"/>
+          </a:effectRef>
+          <a:fontRef idx="minor">
+            <a:schemeClr val="lt1"/>
+          </a:fontRef>
+        </p:style>
+        <p:txBody>
+          <a:bodyPr rtlCol="0" anchor="ctr"/>
+          <a:lstStyle/>
+          <a:p>
+            <a:pPr algn="ctr"/>
+            <a:endParaRPr lang="de-DE"/>
+          </a:p>
+        </p:txBody>
+      </p:sp>
+      <p:sp>
+        <p:nvSpPr>
+          <p:cNvPr id="7" name="Textfeld 6">
+            <a:extLst>
+              <a:ext uri="{FF2B5EF4-FFF2-40B4-BE49-F238E27FC236}">
+                <a16:creationId xmlns:a16="http://schemas.microsoft.com/office/drawing/2014/main" id="{87C67DD6-9C63-3569-403D-08981BAF1C1D}"/>
+              </a:ext>
+            </a:extLst>
+          </p:cNvPr>
+          <p:cNvSpPr txBox="1"/>
+          <p:nvPr/>
+        </p:nvSpPr>
+        <p:spPr>
+          <a:xfrm>
+            <a:off x="10432026" y="6363618"/>
+            <a:ext cx="1759974" cy="369332"/>
+          </a:xfrm>
+          <a:prstGeom prst="rect">
+            <a:avLst/>
+          </a:prstGeom>
+          <a:noFill/>
+        </p:spPr>
+        <p:txBody>
+          <a:bodyPr wrap="square" rtlCol="0">
+            <a:spAutoFit/>
+          </a:bodyPr>
+          <a:lstStyle/>
+          <a:p>
+            <a:r>
+              <a:rPr lang="de-DE" dirty="0">
+                <a:solidFill>
+                  <a:schemeClr val="bg1"/>
+                </a:solidFill>
+              </a:rPr>
+              <a:t>Tobias Daiger</a:t>
+            </a:r>
+          </a:p>
+        </p:txBody>
+      </p:sp>
+      <p:pic>
+        <p:nvPicPr>
+          <p:cNvPr id="3" name="Grafik 2">
+            <a:extLst>
+              <a:ext uri="{FF2B5EF4-FFF2-40B4-BE49-F238E27FC236}">
+                <a16:creationId xmlns:a16="http://schemas.microsoft.com/office/drawing/2014/main" id="{0EBBC054-9103-9E4A-D162-498267138E0B}"/>
+              </a:ext>
+            </a:extLst>
+          </p:cNvPr>
+          <p:cNvPicPr>
+            <a:picLocks noChangeAspect="1"/>
+          </p:cNvPicPr>
+          <p:nvPr/>
+        </p:nvPicPr>
+        <p:blipFill>
+          <a:blip r:embed="rId2">
+            <a:extLst>
+              <a:ext uri="{28A0092B-C50C-407E-A947-70E740481C1C}">
+                <a14:useLocalDpi xmlns:a14="http://schemas.microsoft.com/office/drawing/2010/main" val="0"/>
+              </a:ext>
+            </a:extLst>
+          </a:blip>
+          <a:stretch>
+            <a:fillRect/>
+          </a:stretch>
+        </p:blipFill>
+        <p:spPr>
+          <a:xfrm>
+            <a:off x="1061687" y="310595"/>
+            <a:ext cx="10440941" cy="5873029"/>
+          </a:xfrm>
+          <a:prstGeom prst="rect">
+            <a:avLst/>
+          </a:prstGeom>
+        </p:spPr>
+      </p:pic>
+      <p:sp>
+        <p:nvSpPr>
+          <p:cNvPr id="4" name="Textfeld 3">
+            <a:extLst>
+              <a:ext uri="{FF2B5EF4-FFF2-40B4-BE49-F238E27FC236}">
+                <a16:creationId xmlns:a16="http://schemas.microsoft.com/office/drawing/2014/main" id="{C2925611-D5FF-FA39-9480-8B206A0EA52A}"/>
+              </a:ext>
+            </a:extLst>
+          </p:cNvPr>
+          <p:cNvSpPr txBox="1"/>
+          <p:nvPr/>
+        </p:nvSpPr>
+        <p:spPr>
+          <a:xfrm>
+            <a:off x="296855" y="5706570"/>
+            <a:ext cx="3658768" cy="954107"/>
+          </a:xfrm>
+          <a:prstGeom prst="rect">
+            <a:avLst/>
+          </a:prstGeom>
+          <a:noFill/>
+        </p:spPr>
+        <p:txBody>
+          <a:bodyPr wrap="square" rtlCol="0">
+            <a:spAutoFit/>
+          </a:bodyPr>
+          <a:lstStyle/>
+          <a:p>
+            <a:r>
+              <a:rPr lang="de-DE" sz="2800" b="1" dirty="0"/>
+              <a:t>4 + 4 </a:t>
+            </a:r>
+            <a:r>
+              <a:rPr lang="de-DE" sz="2800" b="1" dirty="0" err="1"/>
+              <a:t>Epoches</a:t>
+            </a:r>
+            <a:endParaRPr lang="de-DE" sz="2800" b="1" dirty="0"/>
+          </a:p>
+          <a:p>
+            <a:r>
+              <a:rPr lang="de-DE" sz="2800" b="1" dirty="0"/>
+              <a:t>Head + Finetuning</a:t>
+            </a:r>
+          </a:p>
+        </p:txBody>
+      </p:sp>
+    </p:spTree>
+    <p:extLst>
+      <p:ext uri="{BB962C8B-B14F-4D97-AF65-F5344CB8AC3E}">
+        <p14:creationId xmlns:p14="http://schemas.microsoft.com/office/powerpoint/2010/main" val="969845168"/>
+      </p:ext>
+    </p:extLst>
+  </p:cSld>
+  <p:clrMapOvr>
+    <a:masterClrMapping/>
+  </p:clrMapOvr>
+</p:sld>
+</file>
+
+<file path=ppt/slides/slide6.xml><?xml version="1.0" encoding="utf-8"?>
+<p:sld xmlns:a="http://schemas.openxmlformats.org/drawingml/2006/main" xmlns:r="http://schemas.openxmlformats.org/officeDocument/2006/relationships" xmlns:p="http://schemas.openxmlformats.org/presentationml/2006/main">
+  <p:cSld>
+    <p:spTree>
+      <p:nvGrpSpPr>
+        <p:cNvPr id="1" name="">
+          <a:extLst>
+            <a:ext uri="{FF2B5EF4-FFF2-40B4-BE49-F238E27FC236}">
+              <a16:creationId xmlns:a16="http://schemas.microsoft.com/office/drawing/2014/main" id="{C9DC0F14-AA66-4CD9-5411-E7DEAF170A26}"/>
+            </a:ext>
+          </a:extLst>
+        </p:cNvPr>
+        <p:cNvGrpSpPr/>
+        <p:nvPr/>
+      </p:nvGrpSpPr>
+      <p:grpSpPr>
+        <a:xfrm>
+          <a:off x="0" y="0"/>
+          <a:ext cx="0" cy="0"/>
+          <a:chOff x="0" y="0"/>
+          <a:chExt cx="0" cy="0"/>
+        </a:xfrm>
+      </p:grpSpPr>
+      <p:sp>
+        <p:nvSpPr>
+          <p:cNvPr id="5" name="Rechteck: abgerundete Ecken 4">
+            <a:extLst>
+              <a:ext uri="{FF2B5EF4-FFF2-40B4-BE49-F238E27FC236}">
+                <a16:creationId xmlns:a16="http://schemas.microsoft.com/office/drawing/2014/main" id="{F49622D1-15D0-8A20-26A3-B6BC8D44F758}"/>
+              </a:ext>
+            </a:extLst>
+          </p:cNvPr>
+          <p:cNvSpPr/>
+          <p:nvPr/>
+        </p:nvSpPr>
+        <p:spPr>
+          <a:xfrm>
+            <a:off x="10432025" y="6331974"/>
+            <a:ext cx="1563329" cy="432620"/>
+          </a:xfrm>
+          <a:prstGeom prst="roundRect">
+            <a:avLst/>
+          </a:prstGeom>
+          <a:solidFill>
+            <a:srgbClr val="002060"/>
+          </a:solidFill>
+        </p:spPr>
+        <p:style>
+          <a:lnRef idx="2">
+            <a:schemeClr val="accent1">
+              <a:shade val="15000"/>
+            </a:schemeClr>
+          </a:lnRef>
+          <a:fillRef idx="1">
+            <a:schemeClr val="accent1"/>
+          </a:fillRef>
+          <a:effectRef idx="0">
+            <a:schemeClr val="accent1"/>
+          </a:effectRef>
+          <a:fontRef idx="minor">
+            <a:schemeClr val="lt1"/>
+          </a:fontRef>
+        </p:style>
+        <p:txBody>
+          <a:bodyPr rtlCol="0" anchor="ctr"/>
+          <a:lstStyle/>
+          <a:p>
+            <a:pPr algn="ctr"/>
+            <a:endParaRPr lang="de-DE"/>
+          </a:p>
+        </p:txBody>
+      </p:sp>
+      <p:sp>
+        <p:nvSpPr>
+          <p:cNvPr id="7" name="Textfeld 6">
+            <a:extLst>
+              <a:ext uri="{FF2B5EF4-FFF2-40B4-BE49-F238E27FC236}">
+                <a16:creationId xmlns:a16="http://schemas.microsoft.com/office/drawing/2014/main" id="{E4828F9E-EB1B-FFEC-E594-CD717055576D}"/>
+              </a:ext>
+            </a:extLst>
+          </p:cNvPr>
+          <p:cNvSpPr txBox="1"/>
+          <p:nvPr/>
+        </p:nvSpPr>
+        <p:spPr>
+          <a:xfrm>
+            <a:off x="10432026" y="6363618"/>
+            <a:ext cx="1759974" cy="369332"/>
+          </a:xfrm>
+          <a:prstGeom prst="rect">
+            <a:avLst/>
+          </a:prstGeom>
+          <a:noFill/>
+        </p:spPr>
+        <p:txBody>
+          <a:bodyPr wrap="square" rtlCol="0">
+            <a:spAutoFit/>
+          </a:bodyPr>
+          <a:lstStyle/>
+          <a:p>
+            <a:r>
+              <a:rPr lang="de-DE" dirty="0">
+                <a:solidFill>
+                  <a:schemeClr val="bg1"/>
+                </a:solidFill>
+              </a:rPr>
+              <a:t>Tobias Daiger</a:t>
+            </a:r>
+          </a:p>
+        </p:txBody>
+      </p:sp>
+      <p:pic>
+        <p:nvPicPr>
+          <p:cNvPr id="3" name="Grafik 2">
+            <a:extLst>
+              <a:ext uri="{FF2B5EF4-FFF2-40B4-BE49-F238E27FC236}">
+                <a16:creationId xmlns:a16="http://schemas.microsoft.com/office/drawing/2014/main" id="{BB2AAA90-B8A7-031E-B8FC-91576E50F467}"/>
+              </a:ext>
+            </a:extLst>
+          </p:cNvPr>
+          <p:cNvPicPr>
+            <a:picLocks noChangeAspect="1"/>
+          </p:cNvPicPr>
+          <p:nvPr/>
+        </p:nvPicPr>
+        <p:blipFill>
+          <a:blip r:embed="rId2">
+            <a:extLst>
+              <a:ext uri="{28A0092B-C50C-407E-A947-70E740481C1C}">
+                <a14:useLocalDpi xmlns:a14="http://schemas.microsoft.com/office/drawing/2010/main" val="0"/>
+              </a:ext>
+            </a:extLst>
+          </a:blip>
+          <a:stretch>
+            <a:fillRect/>
+          </a:stretch>
+        </p:blipFill>
+        <p:spPr>
+          <a:xfrm>
+            <a:off x="1276478" y="266951"/>
+            <a:ext cx="10465489" cy="5886837"/>
+          </a:xfrm>
+          <a:prstGeom prst="rect">
+            <a:avLst/>
+          </a:prstGeom>
+        </p:spPr>
+      </p:pic>
+      <p:sp>
+        <p:nvSpPr>
+          <p:cNvPr id="4" name="Textfeld 3">
+            <a:extLst>
+              <a:ext uri="{FF2B5EF4-FFF2-40B4-BE49-F238E27FC236}">
+                <a16:creationId xmlns:a16="http://schemas.microsoft.com/office/drawing/2014/main" id="{1DB87902-B08F-303C-C360-3909DAC61B0F}"/>
+              </a:ext>
+            </a:extLst>
+          </p:cNvPr>
+          <p:cNvSpPr txBox="1"/>
+          <p:nvPr/>
+        </p:nvSpPr>
+        <p:spPr>
+          <a:xfrm>
+            <a:off x="296855" y="5706570"/>
+            <a:ext cx="3658768" cy="954107"/>
+          </a:xfrm>
+          <a:prstGeom prst="rect">
+            <a:avLst/>
+          </a:prstGeom>
+          <a:noFill/>
+        </p:spPr>
+        <p:txBody>
+          <a:bodyPr wrap="square" rtlCol="0">
+            <a:spAutoFit/>
+          </a:bodyPr>
+          <a:lstStyle/>
+          <a:p>
+            <a:r>
+              <a:rPr lang="de-DE" sz="2800" b="1" dirty="0"/>
+              <a:t>4 + 4 </a:t>
+            </a:r>
+            <a:r>
+              <a:rPr lang="de-DE" sz="2800" b="1" dirty="0" err="1"/>
+              <a:t>Epoches</a:t>
+            </a:r>
+            <a:endParaRPr lang="de-DE" sz="2800" b="1" dirty="0"/>
+          </a:p>
+          <a:p>
+            <a:r>
+              <a:rPr lang="de-DE" sz="2800" b="1" dirty="0"/>
+              <a:t>Head + Finetuning</a:t>
+            </a:r>
+          </a:p>
+        </p:txBody>
+      </p:sp>
+    </p:spTree>
+    <p:extLst>
+      <p:ext uri="{BB962C8B-B14F-4D97-AF65-F5344CB8AC3E}">
+        <p14:creationId xmlns:p14="http://schemas.microsoft.com/office/powerpoint/2010/main" val="1315307909"/>
+      </p:ext>
+    </p:extLst>
+  </p:cSld>
+  <p:clrMapOvr>
+    <a:masterClrMapping/>
+  </p:clrMapOvr>
+</p:sld>
+</file>
+
+<file path=ppt/slides/slide7.xml><?xml version="1.0" encoding="utf-8"?>
+<p:sld xmlns:a="http://schemas.openxmlformats.org/drawingml/2006/main" xmlns:r="http://schemas.openxmlformats.org/officeDocument/2006/relationships" xmlns:p="http://schemas.openxmlformats.org/presentationml/2006/main">
+  <p:cSld>
+    <p:spTree>
+      <p:nvGrpSpPr>
+        <p:cNvPr id="1" name=""/>
+        <p:cNvGrpSpPr/>
+        <p:nvPr/>
+      </p:nvGrpSpPr>
+      <p:grpSpPr>
+        <a:xfrm>
+          <a:off x="0" y="0"/>
+          <a:ext cx="0" cy="0"/>
+          <a:chOff x="0" y="0"/>
+          <a:chExt cx="0" cy="0"/>
+        </a:xfrm>
+      </p:grpSpPr>
+      <p:sp>
+        <p:nvSpPr>
+          <p:cNvPr id="5" name="Rechteck: abgerundete Ecken 4">
+            <a:extLst>
+              <a:ext uri="{FF2B5EF4-FFF2-40B4-BE49-F238E27FC236}">
+                <a16:creationId xmlns:a16="http://schemas.microsoft.com/office/drawing/2014/main" id="{F45792B4-6B91-1C2D-41B6-8BABC018F566}"/>
+              </a:ext>
+            </a:extLst>
+          </p:cNvPr>
+          <p:cNvSpPr/>
+          <p:nvPr/>
+        </p:nvSpPr>
+        <p:spPr>
+          <a:xfrm>
+            <a:off x="10432025" y="6331974"/>
+            <a:ext cx="1563329" cy="432620"/>
+          </a:xfrm>
+          <a:prstGeom prst="roundRect">
+            <a:avLst/>
+          </a:prstGeom>
+          <a:solidFill>
+            <a:srgbClr val="002060"/>
+          </a:solidFill>
+        </p:spPr>
+        <p:style>
+          <a:lnRef idx="2">
+            <a:schemeClr val="accent1">
+              <a:shade val="15000"/>
+            </a:schemeClr>
+          </a:lnRef>
+          <a:fillRef idx="1">
+            <a:schemeClr val="accent1"/>
+          </a:fillRef>
+          <a:effectRef idx="0">
+            <a:schemeClr val="accent1"/>
+          </a:effectRef>
+          <a:fontRef idx="minor">
+            <a:schemeClr val="lt1"/>
+          </a:fontRef>
+        </p:style>
+        <p:txBody>
+          <a:bodyPr rtlCol="0" anchor="ctr"/>
+          <a:lstStyle/>
+          <a:p>
+            <a:pPr algn="ctr"/>
+            <a:endParaRPr lang="de-DE"/>
+          </a:p>
+        </p:txBody>
+      </p:sp>
+      <p:sp>
+        <p:nvSpPr>
+          <p:cNvPr id="7" name="Textfeld 6">
+            <a:extLst>
+              <a:ext uri="{FF2B5EF4-FFF2-40B4-BE49-F238E27FC236}">
+                <a16:creationId xmlns:a16="http://schemas.microsoft.com/office/drawing/2014/main" id="{8565CCB5-21F8-2B1E-F77F-85305388AE72}"/>
+              </a:ext>
+            </a:extLst>
+          </p:cNvPr>
+          <p:cNvSpPr txBox="1"/>
+          <p:nvPr/>
+        </p:nvSpPr>
+        <p:spPr>
+          <a:xfrm>
+            <a:off x="10432026" y="6363618"/>
+            <a:ext cx="1759974" cy="369332"/>
+          </a:xfrm>
+          <a:prstGeom prst="rect">
+            <a:avLst/>
+          </a:prstGeom>
+          <a:noFill/>
+        </p:spPr>
+        <p:txBody>
+          <a:bodyPr wrap="square" rtlCol="0">
+            <a:spAutoFit/>
+          </a:bodyPr>
+          <a:lstStyle/>
+          <a:p>
+            <a:r>
+              <a:rPr lang="de-DE" dirty="0">
+                <a:solidFill>
+                  <a:schemeClr val="bg1"/>
+                </a:solidFill>
+              </a:rPr>
+              <a:t>Tobias Daiger</a:t>
+            </a:r>
+          </a:p>
+        </p:txBody>
+      </p:sp>
+      <p:pic>
+        <p:nvPicPr>
+          <p:cNvPr id="9" name="Grafik 8">
+            <a:extLst>
+              <a:ext uri="{FF2B5EF4-FFF2-40B4-BE49-F238E27FC236}">
+                <a16:creationId xmlns:a16="http://schemas.microsoft.com/office/drawing/2014/main" id="{74F02DB5-F33D-AD37-EC67-05F093E20909}"/>
+              </a:ext>
+            </a:extLst>
+          </p:cNvPr>
+          <p:cNvPicPr>
+            <a:picLocks noChangeAspect="1"/>
+          </p:cNvPicPr>
+          <p:nvPr/>
+        </p:nvPicPr>
+        <p:blipFill>
+          <a:blip r:embed="rId2"/>
+          <a:stretch>
+            <a:fillRect/>
+          </a:stretch>
+        </p:blipFill>
+        <p:spPr>
+          <a:xfrm>
+            <a:off x="595282" y="69706"/>
+            <a:ext cx="9712032" cy="6262268"/>
+          </a:xfrm>
+          <a:prstGeom prst="rect">
+            <a:avLst/>
+          </a:prstGeom>
+        </p:spPr>
+      </p:pic>
+      <p:sp>
+        <p:nvSpPr>
+          <p:cNvPr id="11" name="Rechteck: abgerundete Ecken 10">
+            <a:extLst>
+              <a:ext uri="{FF2B5EF4-FFF2-40B4-BE49-F238E27FC236}">
+                <a16:creationId xmlns:a16="http://schemas.microsoft.com/office/drawing/2014/main" id="{2903E302-FC51-E93A-65E2-60B6E8C169D7}"/>
+              </a:ext>
+            </a:extLst>
+          </p:cNvPr>
+          <p:cNvSpPr/>
+          <p:nvPr/>
+        </p:nvSpPr>
+        <p:spPr>
+          <a:xfrm>
+            <a:off x="4264790" y="211393"/>
+            <a:ext cx="1936955" cy="629265"/>
+          </a:xfrm>
+          <a:prstGeom prst="roundRect">
+            <a:avLst/>
+          </a:prstGeom>
+          <a:solidFill>
+            <a:schemeClr val="accent2"/>
+          </a:solidFill>
+        </p:spPr>
+        <p:style>
+          <a:lnRef idx="2">
+            <a:schemeClr val="accent1">
+              <a:shade val="15000"/>
+            </a:schemeClr>
+          </a:lnRef>
+          <a:fillRef idx="1">
+            <a:schemeClr val="accent1"/>
+          </a:fillRef>
+          <a:effectRef idx="0">
+            <a:schemeClr val="accent1"/>
+          </a:effectRef>
+          <a:fontRef idx="minor">
+            <a:schemeClr val="lt1"/>
+          </a:fontRef>
+        </p:style>
+        <p:txBody>
+          <a:bodyPr rtlCol="0" anchor="ctr"/>
+          <a:lstStyle/>
+          <a:p>
+            <a:pPr algn="ctr"/>
+            <a:endParaRPr lang="de-DE"/>
+          </a:p>
+        </p:txBody>
+      </p:sp>
+      <p:sp>
+        <p:nvSpPr>
+          <p:cNvPr id="13" name="Textfeld 12">
+            <a:extLst>
+              <a:ext uri="{FF2B5EF4-FFF2-40B4-BE49-F238E27FC236}">
+                <a16:creationId xmlns:a16="http://schemas.microsoft.com/office/drawing/2014/main" id="{C4C83508-9AA4-90B1-7C54-C0C91AF95019}"/>
+              </a:ext>
+            </a:extLst>
+          </p:cNvPr>
+          <p:cNvSpPr txBox="1"/>
+          <p:nvPr/>
+        </p:nvSpPr>
+        <p:spPr>
+          <a:xfrm>
+            <a:off x="4604002" y="270387"/>
+            <a:ext cx="1774723" cy="461665"/>
+          </a:xfrm>
+          <a:prstGeom prst="rect">
+            <a:avLst/>
+          </a:prstGeom>
+          <a:noFill/>
+        </p:spPr>
+        <p:txBody>
+          <a:bodyPr wrap="square" rtlCol="0">
+            <a:spAutoFit/>
+          </a:bodyPr>
+          <a:lstStyle/>
+          <a:p>
+            <a:r>
+              <a:rPr lang="de-DE" sz="2400" b="1" dirty="0">
+                <a:solidFill>
+                  <a:schemeClr val="bg1"/>
+                </a:solidFill>
+              </a:rPr>
+              <a:t>Testing</a:t>
+            </a:r>
+          </a:p>
+        </p:txBody>
+      </p:sp>
+    </p:spTree>
+    <p:extLst>
+      <p:ext uri="{BB962C8B-B14F-4D97-AF65-F5344CB8AC3E}">
+        <p14:creationId xmlns:p14="http://schemas.microsoft.com/office/powerpoint/2010/main" val="2457927386"/>
+      </p:ext>
+    </p:extLst>
+  </p:cSld>
+  <p:clrMapOvr>
+    <a:masterClrMapping/>
+  </p:clrMapOvr>
+</p:sld>
+</file>
+
+<file path=ppt/slides/slide8.xml><?xml version="1.0" encoding="utf-8"?>
+<p:sld xmlns:a="http://schemas.openxmlformats.org/drawingml/2006/main" xmlns:r="http://schemas.openxmlformats.org/officeDocument/2006/relationships" xmlns:p="http://schemas.openxmlformats.org/presentationml/2006/main">
+  <p:cSld>
+    <p:spTree>
+      <p:nvGrpSpPr>
+        <p:cNvPr id="1" name="">
+          <a:extLst>
+            <a:ext uri="{FF2B5EF4-FFF2-40B4-BE49-F238E27FC236}">
+              <a16:creationId xmlns:a16="http://schemas.microsoft.com/office/drawing/2014/main" id="{51F831FF-6E06-0538-BD9B-D311B1CE648D}"/>
+            </a:ext>
+          </a:extLst>
+        </p:cNvPr>
+        <p:cNvGrpSpPr/>
+        <p:nvPr/>
+      </p:nvGrpSpPr>
+      <p:grpSpPr>
+        <a:xfrm>
+          <a:off x="0" y="0"/>
+          <a:ext cx="0" cy="0"/>
+          <a:chOff x="0" y="0"/>
+          <a:chExt cx="0" cy="0"/>
+        </a:xfrm>
+      </p:grpSpPr>
+      <p:sp>
+        <p:nvSpPr>
+          <p:cNvPr id="12" name="Rechteck: abgerundete Ecken 11">
+            <a:extLst>
+              <a:ext uri="{FF2B5EF4-FFF2-40B4-BE49-F238E27FC236}">
+                <a16:creationId xmlns:a16="http://schemas.microsoft.com/office/drawing/2014/main" id="{046802AD-387D-5C61-948B-D6CF9CC70F37}"/>
+              </a:ext>
+            </a:extLst>
+          </p:cNvPr>
+          <p:cNvSpPr/>
+          <p:nvPr/>
+        </p:nvSpPr>
+        <p:spPr>
+          <a:xfrm>
+            <a:off x="8454820" y="5700533"/>
+            <a:ext cx="1563329" cy="432620"/>
+          </a:xfrm>
+          <a:prstGeom prst="roundRect">
+            <a:avLst/>
+          </a:prstGeom>
+          <a:solidFill>
+            <a:schemeClr val="tx1"/>
+          </a:solidFill>
+        </p:spPr>
+        <p:style>
+          <a:lnRef idx="2">
+            <a:schemeClr val="accent1">
+              <a:shade val="15000"/>
+            </a:schemeClr>
+          </a:lnRef>
+          <a:fillRef idx="1">
+            <a:schemeClr val="accent1"/>
+          </a:fillRef>
+          <a:effectRef idx="0">
+            <a:schemeClr val="accent1"/>
+          </a:effectRef>
+          <a:fontRef idx="minor">
+            <a:schemeClr val="lt1"/>
+          </a:fontRef>
+        </p:style>
+        <p:txBody>
+          <a:bodyPr rtlCol="0" anchor="ctr"/>
+          <a:lstStyle/>
+          <a:p>
+            <a:pPr algn="ctr"/>
+            <a:endParaRPr lang="de-DE"/>
+          </a:p>
+        </p:txBody>
+      </p:sp>
+      <p:sp>
+        <p:nvSpPr>
+          <p:cNvPr id="10" name="Rechteck: abgerundete Ecken 9">
+            <a:extLst>
+              <a:ext uri="{FF2B5EF4-FFF2-40B4-BE49-F238E27FC236}">
+                <a16:creationId xmlns:a16="http://schemas.microsoft.com/office/drawing/2014/main" id="{B4105E77-F55D-5E04-7498-400092521C10}"/>
+              </a:ext>
+            </a:extLst>
+          </p:cNvPr>
+          <p:cNvSpPr/>
+          <p:nvPr/>
+        </p:nvSpPr>
+        <p:spPr>
+          <a:xfrm>
+            <a:off x="1664416" y="5041365"/>
+            <a:ext cx="1563329" cy="432620"/>
+          </a:xfrm>
+          <a:prstGeom prst="roundRect">
+            <a:avLst/>
+          </a:prstGeom>
+          <a:solidFill>
+            <a:schemeClr val="tx1"/>
+          </a:solidFill>
+        </p:spPr>
+        <p:style>
+          <a:lnRef idx="2">
+            <a:schemeClr val="accent1">
+              <a:shade val="15000"/>
+            </a:schemeClr>
+          </a:lnRef>
+          <a:fillRef idx="1">
+            <a:schemeClr val="accent1"/>
+          </a:fillRef>
+          <a:effectRef idx="0">
+            <a:schemeClr val="accent1"/>
+          </a:effectRef>
+          <a:fontRef idx="minor">
+            <a:schemeClr val="lt1"/>
+          </a:fontRef>
+        </p:style>
+        <p:txBody>
+          <a:bodyPr rtlCol="0" anchor="ctr"/>
+          <a:lstStyle/>
+          <a:p>
+            <a:pPr algn="ctr"/>
+            <a:endParaRPr lang="de-DE"/>
+          </a:p>
+        </p:txBody>
+      </p:sp>
+      <p:pic>
+        <p:nvPicPr>
+          <p:cNvPr id="3" name="Grafik 2">
+            <a:extLst>
+              <a:ext uri="{FF2B5EF4-FFF2-40B4-BE49-F238E27FC236}">
+                <a16:creationId xmlns:a16="http://schemas.microsoft.com/office/drawing/2014/main" id="{9F0F8AB2-9E63-5D52-6E9A-1E1CD018E5B5}"/>
+              </a:ext>
+            </a:extLst>
+          </p:cNvPr>
+          <p:cNvPicPr>
+            <a:picLocks noChangeAspect="1"/>
+          </p:cNvPicPr>
+          <p:nvPr/>
+        </p:nvPicPr>
+        <p:blipFill>
+          <a:blip r:embed="rId2">
+            <a:extLst>
+              <a:ext uri="{28A0092B-C50C-407E-A947-70E740481C1C}">
+                <a14:useLocalDpi xmlns:a14="http://schemas.microsoft.com/office/drawing/2010/main" val="0"/>
+              </a:ext>
+            </a:extLst>
+          </a:blip>
+          <a:stretch>
+            <a:fillRect/>
+          </a:stretch>
+        </p:blipFill>
+        <p:spPr>
+          <a:xfrm>
+            <a:off x="1060040" y="1188320"/>
+            <a:ext cx="4762500" cy="3571875"/>
+          </a:xfrm>
+          <a:prstGeom prst="roundRect">
+            <a:avLst/>
+          </a:prstGeom>
+        </p:spPr>
+      </p:pic>
+      <p:pic>
+        <p:nvPicPr>
+          <p:cNvPr id="5" name="Grafik 4">
+            <a:extLst>
+              <a:ext uri="{FF2B5EF4-FFF2-40B4-BE49-F238E27FC236}">
+                <a16:creationId xmlns:a16="http://schemas.microsoft.com/office/drawing/2014/main" id="{ED7B69D5-7422-EA29-918D-CCABFD860DFF}"/>
+              </a:ext>
+            </a:extLst>
+          </p:cNvPr>
+          <p:cNvPicPr>
+            <a:picLocks noChangeAspect="1"/>
+          </p:cNvPicPr>
+          <p:nvPr/>
+        </p:nvPicPr>
+        <p:blipFill>
+          <a:blip r:embed="rId3">
+            <a:extLst>
+              <a:ext uri="{28A0092B-C50C-407E-A947-70E740481C1C}">
+                <a14:useLocalDpi xmlns:a14="http://schemas.microsoft.com/office/drawing/2010/main" val="0"/>
+              </a:ext>
+            </a:extLst>
+          </a:blip>
+          <a:stretch>
+            <a:fillRect/>
+          </a:stretch>
+        </p:blipFill>
+        <p:spPr>
+          <a:xfrm>
+            <a:off x="7341010" y="620639"/>
+            <a:ext cx="3790950" cy="5048250"/>
+          </a:xfrm>
+          <a:prstGeom prst="roundRect">
+            <a:avLst/>
+          </a:prstGeom>
+        </p:spPr>
+      </p:pic>
+      <p:sp>
+        <p:nvSpPr>
+          <p:cNvPr id="7" name="Textfeld 6">
+            <a:extLst>
+              <a:ext uri="{FF2B5EF4-FFF2-40B4-BE49-F238E27FC236}">
+                <a16:creationId xmlns:a16="http://schemas.microsoft.com/office/drawing/2014/main" id="{EA350B8D-D4BB-9AFF-552B-DFEF0A1FD48D}"/>
+              </a:ext>
+            </a:extLst>
+          </p:cNvPr>
+          <p:cNvSpPr txBox="1"/>
+          <p:nvPr/>
+        </p:nvSpPr>
+        <p:spPr>
+          <a:xfrm>
+            <a:off x="8532249" y="5732177"/>
+            <a:ext cx="1575314" cy="369332"/>
+          </a:xfrm>
+          <a:prstGeom prst="rect">
+            <a:avLst/>
+          </a:prstGeom>
+          <a:noFill/>
+        </p:spPr>
+        <p:txBody>
+          <a:bodyPr wrap="square" rtlCol="0">
+            <a:spAutoFit/>
+          </a:bodyPr>
+          <a:lstStyle/>
+          <a:p>
+            <a:r>
+              <a:rPr lang="de-DE" dirty="0">
+                <a:solidFill>
+                  <a:schemeClr val="bg1"/>
+                </a:solidFill>
+              </a:rPr>
+              <a:t>EntleBucher</a:t>
+            </a:r>
+          </a:p>
+        </p:txBody>
+      </p:sp>
+      <p:sp>
+        <p:nvSpPr>
+          <p:cNvPr id="9" name="Textfeld 8">
+            <a:extLst>
+              <a:ext uri="{FF2B5EF4-FFF2-40B4-BE49-F238E27FC236}">
+                <a16:creationId xmlns:a16="http://schemas.microsoft.com/office/drawing/2014/main" id="{D10B3259-4B83-1874-FA06-8290FCFC4B83}"/>
+              </a:ext>
+            </a:extLst>
+          </p:cNvPr>
+          <p:cNvSpPr txBox="1"/>
+          <p:nvPr/>
+        </p:nvSpPr>
+        <p:spPr>
+          <a:xfrm>
+            <a:off x="1762739" y="5041365"/>
+            <a:ext cx="1363920" cy="369332"/>
+          </a:xfrm>
+          <a:prstGeom prst="rect">
+            <a:avLst/>
+          </a:prstGeom>
+          <a:noFill/>
+        </p:spPr>
+        <p:txBody>
+          <a:bodyPr wrap="square" rtlCol="0">
+            <a:spAutoFit/>
+          </a:bodyPr>
+          <a:lstStyle/>
+          <a:p>
+            <a:r>
+              <a:rPr lang="de-DE" dirty="0">
+                <a:solidFill>
+                  <a:schemeClr val="bg1"/>
+                </a:solidFill>
+              </a:rPr>
+              <a:t>Appenzeller</a:t>
+            </a:r>
+          </a:p>
+        </p:txBody>
+      </p:sp>
+      <p:sp>
+        <p:nvSpPr>
+          <p:cNvPr id="11" name="Rechteck: abgerundete Ecken 10">
+            <a:extLst>
+              <a:ext uri="{FF2B5EF4-FFF2-40B4-BE49-F238E27FC236}">
+                <a16:creationId xmlns:a16="http://schemas.microsoft.com/office/drawing/2014/main" id="{3C60246F-A52F-976D-64B5-EC2067068E25}"/>
+              </a:ext>
+            </a:extLst>
+          </p:cNvPr>
+          <p:cNvSpPr/>
+          <p:nvPr/>
+        </p:nvSpPr>
+        <p:spPr>
+          <a:xfrm>
+            <a:off x="4301611" y="330813"/>
+            <a:ext cx="1936955" cy="629265"/>
+          </a:xfrm>
+          <a:prstGeom prst="roundRect">
+            <a:avLst/>
+          </a:prstGeom>
+          <a:solidFill>
+            <a:schemeClr val="accent2"/>
+          </a:solidFill>
+        </p:spPr>
+        <p:style>
+          <a:lnRef idx="2">
+            <a:schemeClr val="accent1">
+              <a:shade val="15000"/>
+            </a:schemeClr>
+          </a:lnRef>
+          <a:fillRef idx="1">
+            <a:schemeClr val="accent1"/>
+          </a:fillRef>
+          <a:effectRef idx="0">
+            <a:schemeClr val="accent1"/>
+          </a:effectRef>
+          <a:fontRef idx="minor">
+            <a:schemeClr val="lt1"/>
+          </a:fontRef>
+        </p:style>
+        <p:txBody>
+          <a:bodyPr rtlCol="0" anchor="ctr"/>
+          <a:lstStyle/>
+          <a:p>
+            <a:pPr algn="ctr"/>
+            <a:endParaRPr lang="de-DE"/>
+          </a:p>
+        </p:txBody>
+      </p:sp>
+      <p:sp>
+        <p:nvSpPr>
+          <p:cNvPr id="13" name="Textfeld 12">
+            <a:extLst>
+              <a:ext uri="{FF2B5EF4-FFF2-40B4-BE49-F238E27FC236}">
+                <a16:creationId xmlns:a16="http://schemas.microsoft.com/office/drawing/2014/main" id="{F33070F6-C8B2-7A5A-384B-E297120A3A9E}"/>
+              </a:ext>
+            </a:extLst>
+          </p:cNvPr>
+          <p:cNvSpPr txBox="1"/>
+          <p:nvPr/>
+        </p:nvSpPr>
+        <p:spPr>
+          <a:xfrm>
+            <a:off x="4640823" y="389807"/>
+            <a:ext cx="1774723" cy="461665"/>
+          </a:xfrm>
+          <a:prstGeom prst="rect">
+            <a:avLst/>
+          </a:prstGeom>
+          <a:noFill/>
+        </p:spPr>
+        <p:txBody>
+          <a:bodyPr wrap="square" rtlCol="0">
+            <a:spAutoFit/>
+          </a:bodyPr>
+          <a:lstStyle/>
+          <a:p>
+            <a:r>
+              <a:rPr lang="de-DE" sz="2400" b="1" dirty="0">
+                <a:solidFill>
+                  <a:schemeClr val="bg1"/>
+                </a:solidFill>
+              </a:rPr>
+              <a:t>Testing</a:t>
+            </a:r>
+          </a:p>
+        </p:txBody>
+      </p:sp>
+      <p:sp>
+        <p:nvSpPr>
+          <p:cNvPr id="4" name="Rechteck: abgerundete Ecken 3">
+            <a:extLst>
+              <a:ext uri="{FF2B5EF4-FFF2-40B4-BE49-F238E27FC236}">
+                <a16:creationId xmlns:a16="http://schemas.microsoft.com/office/drawing/2014/main" id="{FC718E7D-D760-6945-33C5-07123BB63CF0}"/>
+              </a:ext>
+            </a:extLst>
+          </p:cNvPr>
+          <p:cNvSpPr/>
+          <p:nvPr/>
+        </p:nvSpPr>
+        <p:spPr>
+          <a:xfrm>
+            <a:off x="10432025" y="6331974"/>
+            <a:ext cx="1563329" cy="432620"/>
+          </a:xfrm>
+          <a:prstGeom prst="roundRect">
+            <a:avLst/>
+          </a:prstGeom>
+          <a:solidFill>
+            <a:srgbClr val="002060"/>
+          </a:solidFill>
+        </p:spPr>
+        <p:style>
+          <a:lnRef idx="2">
+            <a:schemeClr val="accent1">
+              <a:shade val="15000"/>
+            </a:schemeClr>
+          </a:lnRef>
+          <a:fillRef idx="1">
+            <a:schemeClr val="accent1"/>
+          </a:fillRef>
+          <a:effectRef idx="0">
+            <a:schemeClr val="accent1"/>
+          </a:effectRef>
+          <a:fontRef idx="minor">
+            <a:schemeClr val="lt1"/>
+          </a:fontRef>
+        </p:style>
+        <p:txBody>
+          <a:bodyPr rtlCol="0" anchor="ctr"/>
+          <a:lstStyle/>
+          <a:p>
+            <a:pPr algn="ctr"/>
+            <a:endParaRPr lang="de-DE"/>
+          </a:p>
+        </p:txBody>
+      </p:sp>
+      <p:sp>
+        <p:nvSpPr>
+          <p:cNvPr id="8" name="Textfeld 7">
+            <a:extLst>
+              <a:ext uri="{FF2B5EF4-FFF2-40B4-BE49-F238E27FC236}">
+                <a16:creationId xmlns:a16="http://schemas.microsoft.com/office/drawing/2014/main" id="{F5F6AA3F-B3F7-A8E2-F9B9-30E6E2566B79}"/>
+              </a:ext>
+            </a:extLst>
+          </p:cNvPr>
+          <p:cNvSpPr txBox="1"/>
+          <p:nvPr/>
+        </p:nvSpPr>
+        <p:spPr>
+          <a:xfrm>
+            <a:off x="10432026" y="6363618"/>
+            <a:ext cx="1759974" cy="369332"/>
+          </a:xfrm>
+          <a:prstGeom prst="rect">
+            <a:avLst/>
+          </a:prstGeom>
+          <a:noFill/>
+        </p:spPr>
+        <p:txBody>
+          <a:bodyPr wrap="square" rtlCol="0">
+            <a:spAutoFit/>
+          </a:bodyPr>
+          <a:lstStyle/>
+          <a:p>
+            <a:r>
+              <a:rPr lang="de-DE" dirty="0">
+                <a:solidFill>
+                  <a:schemeClr val="bg1"/>
+                </a:solidFill>
+              </a:rPr>
+              <a:t>Tobias Daiger</a:t>
+            </a:r>
+          </a:p>
+        </p:txBody>
+      </p:sp>
+      <p:sp>
+        <p:nvSpPr>
+          <p:cNvPr id="2" name="Ungleich 1">
+            <a:extLst>
+              <a:ext uri="{FF2B5EF4-FFF2-40B4-BE49-F238E27FC236}">
+                <a16:creationId xmlns:a16="http://schemas.microsoft.com/office/drawing/2014/main" id="{7D7F50D0-AECA-8481-513E-F6C43733F3B4}"/>
+              </a:ext>
+            </a:extLst>
+          </p:cNvPr>
+          <p:cNvSpPr/>
+          <p:nvPr/>
+        </p:nvSpPr>
+        <p:spPr>
+          <a:xfrm>
+            <a:off x="6096000" y="3154373"/>
+            <a:ext cx="920537" cy="767114"/>
+          </a:xfrm>
+          <a:prstGeom prst="mathNotEqual">
+            <a:avLst/>
+          </a:prstGeom>
+        </p:spPr>
+        <p:style>
+          <a:lnRef idx="2">
+            <a:schemeClr val="accent1">
+              <a:shade val="15000"/>
+            </a:schemeClr>
+          </a:lnRef>
+          <a:fillRef idx="1">
+            <a:schemeClr val="accent1"/>
+          </a:fillRef>
+          <a:effectRef idx="0">
+            <a:schemeClr val="accent1"/>
+          </a:effectRef>
+          <a:fontRef idx="minor">
+            <a:schemeClr val="lt1"/>
+          </a:fontRef>
+        </p:style>
+        <p:txBody>
+          <a:bodyPr rtlCol="0" anchor="ctr"/>
+          <a:lstStyle/>
+          <a:p>
+            <a:pPr algn="ctr"/>
+            <a:endParaRPr lang="de-DE">
+              <a:solidFill>
+                <a:schemeClr val="tx1"/>
+              </a:solidFill>
+            </a:endParaRPr>
+          </a:p>
+        </p:txBody>
+      </p:sp>
+    </p:spTree>
+    <p:extLst>
+      <p:ext uri="{BB962C8B-B14F-4D97-AF65-F5344CB8AC3E}">
+        <p14:creationId xmlns:p14="http://schemas.microsoft.com/office/powerpoint/2010/main" val="3984335355"/>
+      </p:ext>
+    </p:extLst>
+  </p:cSld>
+  <p:clrMapOvr>
+    <a:masterClrMapping/>
+  </p:clrMapOvr>
+</p:sld>
+</file>
+
+<file path=ppt/slides/slide9.xml><?xml version="1.0" encoding="utf-8"?>
+<p:sld xmlns:a="http://schemas.openxmlformats.org/drawingml/2006/main" xmlns:r="http://schemas.openxmlformats.org/officeDocument/2006/relationships" xmlns:p="http://schemas.openxmlformats.org/presentationml/2006/main">
+  <p:cSld>
+    <p:spTree>
+      <p:nvGrpSpPr>
+        <p:cNvPr id="1" name="">
+          <a:extLst>
+            <a:ext uri="{FF2B5EF4-FFF2-40B4-BE49-F238E27FC236}">
+              <a16:creationId xmlns:a16="http://schemas.microsoft.com/office/drawing/2014/main" id="{524055C5-3F4C-5D4D-9A2B-A82354B87329}"/>
+            </a:ext>
+          </a:extLst>
+        </p:cNvPr>
+        <p:cNvGrpSpPr/>
+        <p:nvPr/>
+      </p:nvGrpSpPr>
+      <p:grpSpPr>
+        <a:xfrm>
+          <a:off x="0" y="0"/>
+          <a:ext cx="0" cy="0"/>
+          <a:chOff x="0" y="0"/>
+          <a:chExt cx="0" cy="0"/>
+        </a:xfrm>
+      </p:grpSpPr>
+      <p:sp>
+        <p:nvSpPr>
+          <p:cNvPr id="14" name="Rechteck: abgerundete Ecken 13">
+            <a:extLst>
+              <a:ext uri="{FF2B5EF4-FFF2-40B4-BE49-F238E27FC236}">
+                <a16:creationId xmlns:a16="http://schemas.microsoft.com/office/drawing/2014/main" id="{3664B8B0-9172-E0B7-90B1-33E78F571162}"/>
+              </a:ext>
+            </a:extLst>
+          </p:cNvPr>
+          <p:cNvSpPr/>
+          <p:nvPr/>
+        </p:nvSpPr>
+        <p:spPr>
+          <a:xfrm>
+            <a:off x="7612010" y="5511167"/>
+            <a:ext cx="1563329" cy="432620"/>
+          </a:xfrm>
+          <a:prstGeom prst="roundRect">
+            <a:avLst/>
+          </a:prstGeom>
+          <a:solidFill>
+            <a:schemeClr val="tx1"/>
+          </a:solidFill>
+        </p:spPr>
+        <p:style>
+          <a:lnRef idx="2">
+            <a:schemeClr val="accent1">
+              <a:shade val="15000"/>
+            </a:schemeClr>
+          </a:lnRef>
+          <a:fillRef idx="1">
+            <a:schemeClr val="accent1"/>
+          </a:fillRef>
+          <a:effectRef idx="0">
+            <a:schemeClr val="accent1"/>
+          </a:effectRef>
+          <a:fontRef idx="minor">
+            <a:schemeClr val="lt1"/>
+          </a:fontRef>
+        </p:style>
+        <p:txBody>
+          <a:bodyPr rtlCol="0" anchor="ctr"/>
+          <a:lstStyle/>
+          <a:p>
+            <a:pPr algn="ctr"/>
+            <a:endParaRPr lang="de-DE"/>
+          </a:p>
+        </p:txBody>
+      </p:sp>
+      <p:sp>
+        <p:nvSpPr>
+          <p:cNvPr id="10" name="Rechteck: abgerundete Ecken 9">
+            <a:extLst>
+              <a:ext uri="{FF2B5EF4-FFF2-40B4-BE49-F238E27FC236}">
+                <a16:creationId xmlns:a16="http://schemas.microsoft.com/office/drawing/2014/main" id="{191134D9-DA39-4FF4-B133-B7CDB3391355}"/>
+              </a:ext>
+            </a:extLst>
+          </p:cNvPr>
+          <p:cNvSpPr/>
+          <p:nvPr/>
+        </p:nvSpPr>
+        <p:spPr>
+          <a:xfrm>
+            <a:off x="1182636" y="5511167"/>
+            <a:ext cx="1563329" cy="432620"/>
+          </a:xfrm>
+          <a:prstGeom prst="roundRect">
+            <a:avLst/>
+          </a:prstGeom>
+          <a:solidFill>
+            <a:schemeClr val="tx1"/>
+          </a:solidFill>
+        </p:spPr>
+        <p:style>
+          <a:lnRef idx="2">
+            <a:schemeClr val="accent1">
+              <a:shade val="15000"/>
+            </a:schemeClr>
+          </a:lnRef>
+          <a:fillRef idx="1">
+            <a:schemeClr val="accent1"/>
+          </a:fillRef>
+          <a:effectRef idx="0">
+            <a:schemeClr val="accent1"/>
+          </a:effectRef>
+          <a:fontRef idx="minor">
+            <a:schemeClr val="lt1"/>
+          </a:fontRef>
+        </p:style>
+        <p:txBody>
+          <a:bodyPr rtlCol="0" anchor="ctr"/>
+          <a:lstStyle/>
+          <a:p>
+            <a:pPr algn="ctr"/>
+            <a:endParaRPr lang="de-DE"/>
+          </a:p>
+        </p:txBody>
+      </p:sp>
+      <p:pic>
+        <p:nvPicPr>
+          <p:cNvPr id="3" name="Grafik 2">
+            <a:extLst>
+              <a:ext uri="{FF2B5EF4-FFF2-40B4-BE49-F238E27FC236}">
+                <a16:creationId xmlns:a16="http://schemas.microsoft.com/office/drawing/2014/main" id="{9E67B456-BA30-B1DD-D4DE-3D0473C8BB94}"/>
+              </a:ext>
+            </a:extLst>
+          </p:cNvPr>
+          <p:cNvPicPr>
+            <a:picLocks noChangeAspect="1"/>
+          </p:cNvPicPr>
+          <p:nvPr/>
+        </p:nvPicPr>
+        <p:blipFill>
+          <a:blip r:embed="rId2">
+            <a:extLst>
+              <a:ext uri="{28A0092B-C50C-407E-A947-70E740481C1C}">
+                <a14:useLocalDpi xmlns:a14="http://schemas.microsoft.com/office/drawing/2010/main" val="0"/>
+              </a:ext>
+            </a:extLst>
+          </a:blip>
+          <a:stretch>
+            <a:fillRect/>
+          </a:stretch>
+        </p:blipFill>
+        <p:spPr>
+          <a:xfrm>
+            <a:off x="774904" y="1761050"/>
+            <a:ext cx="4762500" cy="3571875"/>
+          </a:xfrm>
+          <a:prstGeom prst="roundRect">
+            <a:avLst/>
+          </a:prstGeom>
+        </p:spPr>
+      </p:pic>
+      <p:pic>
+        <p:nvPicPr>
+          <p:cNvPr id="5" name="Grafik 4">
+            <a:extLst>
+              <a:ext uri="{FF2B5EF4-FFF2-40B4-BE49-F238E27FC236}">
+                <a16:creationId xmlns:a16="http://schemas.microsoft.com/office/drawing/2014/main" id="{EA3CBCBC-B0DF-401F-4343-199468851314}"/>
+              </a:ext>
+            </a:extLst>
+          </p:cNvPr>
+          <p:cNvPicPr>
+            <a:picLocks noChangeAspect="1"/>
+          </p:cNvPicPr>
+          <p:nvPr/>
+        </p:nvPicPr>
+        <p:blipFill>
+          <a:blip r:embed="rId3">
+            <a:extLst>
+              <a:ext uri="{28A0092B-C50C-407E-A947-70E740481C1C}">
+                <a14:useLocalDpi xmlns:a14="http://schemas.microsoft.com/office/drawing/2010/main" val="0"/>
+              </a:ext>
+            </a:extLst>
+          </a:blip>
+          <a:stretch>
+            <a:fillRect/>
+          </a:stretch>
+        </p:blipFill>
+        <p:spPr>
+          <a:xfrm>
+            <a:off x="6751135" y="1761050"/>
+            <a:ext cx="4762500" cy="3571875"/>
+          </a:xfrm>
+          <a:prstGeom prst="roundRect">
+            <a:avLst/>
+          </a:prstGeom>
+        </p:spPr>
+      </p:pic>
+      <p:sp>
+        <p:nvSpPr>
+          <p:cNvPr id="7" name="Textfeld 6">
+            <a:extLst>
+              <a:ext uri="{FF2B5EF4-FFF2-40B4-BE49-F238E27FC236}">
+                <a16:creationId xmlns:a16="http://schemas.microsoft.com/office/drawing/2014/main" id="{89A9045D-9EC2-CB46-623C-BC01A8F7EA9E}"/>
+              </a:ext>
+            </a:extLst>
+          </p:cNvPr>
+          <p:cNvSpPr txBox="1"/>
+          <p:nvPr/>
+        </p:nvSpPr>
+        <p:spPr>
+          <a:xfrm>
+            <a:off x="7808655" y="5542811"/>
+            <a:ext cx="1266519" cy="369332"/>
+          </a:xfrm>
+          <a:prstGeom prst="rect">
+            <a:avLst/>
+          </a:prstGeom>
+          <a:noFill/>
+        </p:spPr>
+        <p:txBody>
+          <a:bodyPr wrap="square" rtlCol="0">
+            <a:spAutoFit/>
+          </a:bodyPr>
+          <a:lstStyle/>
+          <a:p>
+            <a:r>
+              <a:rPr lang="de-DE" dirty="0">
+                <a:solidFill>
+                  <a:schemeClr val="bg1"/>
+                </a:solidFill>
+              </a:rPr>
+              <a:t>Pembroke</a:t>
+            </a:r>
+          </a:p>
+        </p:txBody>
+      </p:sp>
+      <p:sp>
+        <p:nvSpPr>
+          <p:cNvPr id="9" name="Textfeld 8">
+            <a:extLst>
+              <a:ext uri="{FF2B5EF4-FFF2-40B4-BE49-F238E27FC236}">
+                <a16:creationId xmlns:a16="http://schemas.microsoft.com/office/drawing/2014/main" id="{8D8079A4-5CB8-3952-E89B-8E16E2EE0CA5}"/>
+              </a:ext>
+            </a:extLst>
+          </p:cNvPr>
+          <p:cNvSpPr txBox="1"/>
+          <p:nvPr/>
+        </p:nvSpPr>
+        <p:spPr>
+          <a:xfrm>
+            <a:off x="1457937" y="5542811"/>
+            <a:ext cx="1039457" cy="369332"/>
+          </a:xfrm>
+          <a:prstGeom prst="rect">
+            <a:avLst/>
+          </a:prstGeom>
+          <a:noFill/>
+        </p:spPr>
+        <p:txBody>
+          <a:bodyPr wrap="square" rtlCol="0">
+            <a:spAutoFit/>
+          </a:bodyPr>
+          <a:lstStyle/>
+          <a:p>
+            <a:r>
+              <a:rPr lang="de-DE" dirty="0" err="1">
+                <a:solidFill>
+                  <a:schemeClr val="bg1"/>
+                </a:solidFill>
+              </a:rPr>
+              <a:t>Basenji</a:t>
+            </a:r>
+            <a:endParaRPr lang="de-DE" dirty="0">
+              <a:solidFill>
+                <a:schemeClr val="bg1"/>
+              </a:solidFill>
+            </a:endParaRPr>
+          </a:p>
+        </p:txBody>
+      </p:sp>
+      <p:sp>
+        <p:nvSpPr>
+          <p:cNvPr id="11" name="Rechteck: abgerundete Ecken 10">
+            <a:extLst>
+              <a:ext uri="{FF2B5EF4-FFF2-40B4-BE49-F238E27FC236}">
+                <a16:creationId xmlns:a16="http://schemas.microsoft.com/office/drawing/2014/main" id="{65583149-71BB-675C-C768-0076C2CD8977}"/>
+              </a:ext>
+            </a:extLst>
+          </p:cNvPr>
+          <p:cNvSpPr/>
+          <p:nvPr/>
+        </p:nvSpPr>
+        <p:spPr>
+          <a:xfrm>
+            <a:off x="4301611" y="330813"/>
+            <a:ext cx="1936955" cy="629265"/>
+          </a:xfrm>
+          <a:prstGeom prst="roundRect">
+            <a:avLst/>
+          </a:prstGeom>
+          <a:solidFill>
+            <a:schemeClr val="accent2"/>
+          </a:solidFill>
+        </p:spPr>
+        <p:style>
+          <a:lnRef idx="2">
+            <a:schemeClr val="accent1">
+              <a:shade val="15000"/>
+            </a:schemeClr>
+          </a:lnRef>
+          <a:fillRef idx="1">
+            <a:schemeClr val="accent1"/>
+          </a:fillRef>
+          <a:effectRef idx="0">
+            <a:schemeClr val="accent1"/>
+          </a:effectRef>
+          <a:fontRef idx="minor">
+            <a:schemeClr val="lt1"/>
+          </a:fontRef>
+        </p:style>
+        <p:txBody>
+          <a:bodyPr rtlCol="0" anchor="ctr"/>
+          <a:lstStyle/>
+          <a:p>
+            <a:pPr algn="ctr"/>
+            <a:endParaRPr lang="de-DE"/>
+          </a:p>
+        </p:txBody>
+      </p:sp>
+      <p:sp>
+        <p:nvSpPr>
+          <p:cNvPr id="13" name="Textfeld 12">
+            <a:extLst>
+              <a:ext uri="{FF2B5EF4-FFF2-40B4-BE49-F238E27FC236}">
+                <a16:creationId xmlns:a16="http://schemas.microsoft.com/office/drawing/2014/main" id="{33893C1A-6C84-93F4-6BBF-98302923FD32}"/>
+              </a:ext>
+            </a:extLst>
+          </p:cNvPr>
+          <p:cNvSpPr txBox="1"/>
+          <p:nvPr/>
+        </p:nvSpPr>
+        <p:spPr>
+          <a:xfrm>
+            <a:off x="4640823" y="389807"/>
+            <a:ext cx="1774723" cy="461665"/>
+          </a:xfrm>
+          <a:prstGeom prst="rect">
+            <a:avLst/>
+          </a:prstGeom>
+          <a:noFill/>
+        </p:spPr>
+        <p:txBody>
+          <a:bodyPr wrap="square" rtlCol="0">
+            <a:spAutoFit/>
+          </a:bodyPr>
+          <a:lstStyle/>
+          <a:p>
+            <a:r>
+              <a:rPr lang="de-DE" sz="2400" b="1" dirty="0">
+                <a:solidFill>
+                  <a:schemeClr val="bg1"/>
+                </a:solidFill>
+              </a:rPr>
+              <a:t>Testing</a:t>
+            </a:r>
+          </a:p>
+        </p:txBody>
+      </p:sp>
+      <p:sp>
+        <p:nvSpPr>
+          <p:cNvPr id="4" name="Rechteck: abgerundete Ecken 3">
+            <a:extLst>
+              <a:ext uri="{FF2B5EF4-FFF2-40B4-BE49-F238E27FC236}">
+                <a16:creationId xmlns:a16="http://schemas.microsoft.com/office/drawing/2014/main" id="{B5513ADF-AF4C-1262-938D-CBD320179587}"/>
+              </a:ext>
+            </a:extLst>
+          </p:cNvPr>
+          <p:cNvSpPr/>
+          <p:nvPr/>
+        </p:nvSpPr>
+        <p:spPr>
+          <a:xfrm>
+            <a:off x="10432025" y="6331974"/>
+            <a:ext cx="1563329" cy="432620"/>
+          </a:xfrm>
+          <a:prstGeom prst="roundRect">
+            <a:avLst/>
+          </a:prstGeom>
+          <a:solidFill>
+            <a:srgbClr val="002060"/>
+          </a:solidFill>
+        </p:spPr>
+        <p:style>
+          <a:lnRef idx="2">
+            <a:schemeClr val="accent1">
+              <a:shade val="15000"/>
+            </a:schemeClr>
+          </a:lnRef>
+          <a:fillRef idx="1">
+            <a:schemeClr val="accent1"/>
+          </a:fillRef>
+          <a:effectRef idx="0">
+            <a:schemeClr val="accent1"/>
+          </a:effectRef>
+          <a:fontRef idx="minor">
+            <a:schemeClr val="lt1"/>
+          </a:fontRef>
+        </p:style>
+        <p:txBody>
+          <a:bodyPr rtlCol="0" anchor="ctr"/>
+          <a:lstStyle/>
+          <a:p>
+            <a:pPr algn="ctr"/>
+            <a:endParaRPr lang="de-DE"/>
+          </a:p>
+        </p:txBody>
+      </p:sp>
+      <p:sp>
+        <p:nvSpPr>
+          <p:cNvPr id="8" name="Textfeld 7">
+            <a:extLst>
+              <a:ext uri="{FF2B5EF4-FFF2-40B4-BE49-F238E27FC236}">
+                <a16:creationId xmlns:a16="http://schemas.microsoft.com/office/drawing/2014/main" id="{D77068B1-A6AE-B490-B297-E85B80D86973}"/>
+              </a:ext>
+            </a:extLst>
+          </p:cNvPr>
+          <p:cNvSpPr txBox="1"/>
+          <p:nvPr/>
+        </p:nvSpPr>
+        <p:spPr>
+          <a:xfrm>
+            <a:off x="10432026" y="6363618"/>
+            <a:ext cx="1759974" cy="369332"/>
+          </a:xfrm>
+          <a:prstGeom prst="rect">
+            <a:avLst/>
+          </a:prstGeom>
+          <a:noFill/>
+        </p:spPr>
+        <p:txBody>
+          <a:bodyPr wrap="square" rtlCol="0">
+            <a:spAutoFit/>
+          </a:bodyPr>
+          <a:lstStyle/>
+          <a:p>
+            <a:r>
+              <a:rPr lang="de-DE" dirty="0">
+                <a:solidFill>
+                  <a:schemeClr val="bg1"/>
+                </a:solidFill>
+              </a:rPr>
+              <a:t>Tobias Daiger</a:t>
+            </a:r>
+          </a:p>
+        </p:txBody>
+      </p:sp>
+      <p:sp>
+        <p:nvSpPr>
+          <p:cNvPr id="6" name="Ungleich 5">
+            <a:extLst>
+              <a:ext uri="{FF2B5EF4-FFF2-40B4-BE49-F238E27FC236}">
+                <a16:creationId xmlns:a16="http://schemas.microsoft.com/office/drawing/2014/main" id="{D3D57287-6564-759C-441D-A1562F126B0B}"/>
+              </a:ext>
+            </a:extLst>
+          </p:cNvPr>
+          <p:cNvSpPr/>
+          <p:nvPr/>
+        </p:nvSpPr>
+        <p:spPr>
+          <a:xfrm>
+            <a:off x="5635731" y="3163430"/>
+            <a:ext cx="920537" cy="767114"/>
+          </a:xfrm>
+          <a:prstGeom prst="mathNotEqual">
+            <a:avLst/>
+          </a:prstGeom>
+        </p:spPr>
+        <p:style>
+          <a:lnRef idx="2">
+            <a:schemeClr val="accent1">
+              <a:shade val="15000"/>
+            </a:schemeClr>
+          </a:lnRef>
+          <a:fillRef idx="1">
+            <a:schemeClr val="accent1"/>
+          </a:fillRef>
+          <a:effectRef idx="0">
+            <a:schemeClr val="accent1"/>
+          </a:effectRef>
+          <a:fontRef idx="minor">
+            <a:schemeClr val="lt1"/>
+          </a:fontRef>
+        </p:style>
+        <p:txBody>
+          <a:bodyPr rtlCol="0" anchor="ctr"/>
+          <a:lstStyle/>
+          <a:p>
+            <a:pPr algn="ctr"/>
+            <a:endParaRPr lang="de-DE">
+              <a:solidFill>
+                <a:schemeClr val="tx1"/>
+              </a:solidFill>
+            </a:endParaRPr>
+          </a:p>
+        </p:txBody>
+      </p:sp>
+    </p:spTree>
+    <p:extLst>
+      <p:ext uri="{BB962C8B-B14F-4D97-AF65-F5344CB8AC3E}">
+        <p14:creationId xmlns:p14="http://schemas.microsoft.com/office/powerpoint/2010/main" val="2097350114"/>
+      </p:ext>
+    </p:extLst>
+  </p:cSld>
+  <p:clrMapOvr>
+    <a:masterClrMapping/>
+  </p:clrMapOvr>
+</p:sld>
+</file>
+
 <file path=ppt/theme/theme1.xml><?xml version="1.0" encoding="utf-8"?>
 <a:theme xmlns:a="http://schemas.openxmlformats.org/drawingml/2006/main" name="Office">
   <a:themeElements>
@@ -6288,4 +9895,319 @@
     </a:ext>
   </a:extLst>
 </a:theme>
+</file>
+
+<file path=ppt/theme/theme2.xml><?xml version="1.0" encoding="utf-8"?>
+<a:theme xmlns:a="http://schemas.openxmlformats.org/drawingml/2006/main" name="Office">
+  <a:themeElements>
+    <a:clrScheme name="Office">
+      <a:dk1>
+        <a:sysClr val="windowText" lastClr="000000"/>
+      </a:dk1>
+      <a:lt1>
+        <a:sysClr val="window" lastClr="FFFFFF"/>
+      </a:lt1>
+      <a:dk2>
+        <a:srgbClr val="0E2841"/>
+      </a:dk2>
+      <a:lt2>
+        <a:srgbClr val="E8E8E8"/>
+      </a:lt2>
+      <a:accent1>
+        <a:srgbClr val="156082"/>
+      </a:accent1>
+      <a:accent2>
+        <a:srgbClr val="E97132"/>
+      </a:accent2>
+      <a:accent3>
+        <a:srgbClr val="196B24"/>
+      </a:accent3>
+      <a:accent4>
+        <a:srgbClr val="0F9ED5"/>
+      </a:accent4>
+      <a:accent5>
+        <a:srgbClr val="A02B93"/>
+      </a:accent5>
+      <a:accent6>
+        <a:srgbClr val="4EA72E"/>
+      </a:accent6>
+      <a:hlink>
+        <a:srgbClr val="467886"/>
+      </a:hlink>
+      <a:folHlink>
+        <a:srgbClr val="96607D"/>
+      </a:folHlink>
+    </a:clrScheme>
+    <a:fontScheme name="Office">
+      <a:majorFont>
+        <a:latin typeface="Aptos Display" panose="02110004020202020204"/>
+        <a:ea typeface=""/>
+        <a:cs typeface=""/>
+        <a:font script="Jpan" typeface="游ゴシック Light"/>
+        <a:font script="Hang" typeface="맑은 고딕"/>
+        <a:font script="Hans" typeface="等线 Light"/>
+        <a:font script="Hant" typeface="新細明體"/>
+        <a:font script="Arab" typeface="Times New Roman"/>
+        <a:font script="Hebr" typeface="Times New Roman"/>
+        <a:font script="Thai" typeface="Angsana New"/>
+        <a:font script="Ethi" typeface="Nyala"/>
+        <a:font script="Beng" typeface="Vrinda"/>
+        <a:font script="Gujr" typeface="Shruti"/>
+        <a:font script="Khmr" typeface="MoolBoran"/>
+        <a:font script="Knda" typeface="Tunga"/>
+        <a:font script="Guru" typeface="Raavi"/>
+        <a:font script="Cans" typeface="Euphemia"/>
+        <a:font script="Cher" typeface="Plantagenet Cherokee"/>
+        <a:font script="Yiii" typeface="Microsoft Yi Baiti"/>
+        <a:font script="Tibt" typeface="Microsoft Himalaya"/>
+        <a:font script="Thaa" typeface="MV Boli"/>
+        <a:font script="Deva" typeface="Mangal"/>
+        <a:font script="Telu" typeface="Gautami"/>
+        <a:font script="Taml" typeface="Latha"/>
+        <a:font script="Syrc" typeface="Estrangelo Edessa"/>
+        <a:font script="Orya" typeface="Kalinga"/>
+        <a:font script="Mlym" typeface="Kartika"/>
+        <a:font script="Laoo" typeface="DokChampa"/>
+        <a:font script="Sinh" typeface="Iskoola Pota"/>
+        <a:font script="Mong" typeface="Mongolian Baiti"/>
+        <a:font script="Viet" typeface="Times New Roman"/>
+        <a:font script="Uigh" typeface="Microsoft Uighur"/>
+        <a:font script="Geor" typeface="Sylfaen"/>
+        <a:font script="Armn" typeface="Arial"/>
+        <a:font script="Bugi" typeface="Leelawadee UI"/>
+        <a:font script="Bopo" typeface="Microsoft JhengHei"/>
+        <a:font script="Java" typeface="Javanese Text"/>
+        <a:font script="Lisu" typeface="Segoe UI"/>
+        <a:font script="Mymr" typeface="Myanmar Text"/>
+        <a:font script="Nkoo" typeface="Ebrima"/>
+        <a:font script="Olck" typeface="Nirmala UI"/>
+        <a:font script="Osma" typeface="Ebrima"/>
+        <a:font script="Phag" typeface="Phagspa"/>
+        <a:font script="Syrn" typeface="Estrangelo Edessa"/>
+        <a:font script="Syrj" typeface="Estrangelo Edessa"/>
+        <a:font script="Syre" typeface="Estrangelo Edessa"/>
+        <a:font script="Sora" typeface="Nirmala UI"/>
+        <a:font script="Tale" typeface="Microsoft Tai Le"/>
+        <a:font script="Talu" typeface="Microsoft New Tai Lue"/>
+        <a:font script="Tfng" typeface="Ebrima"/>
+      </a:majorFont>
+      <a:minorFont>
+        <a:latin typeface="Aptos" panose="02110004020202020204"/>
+        <a:ea typeface=""/>
+        <a:cs typeface=""/>
+        <a:font script="Jpan" typeface="游ゴシック"/>
+        <a:font script="Hang" typeface="맑은 고딕"/>
+        <a:font script="Hans" typeface="等线"/>
+        <a:font script="Hant" typeface="新細明體"/>
+        <a:font script="Arab" typeface="Arial"/>
+        <a:font script="Hebr" typeface="Arial"/>
+        <a:font script="Thai" typeface="Cordia New"/>
+        <a:font script="Ethi" typeface="Nyala"/>
+        <a:font script="Beng" typeface="Vrinda"/>
+        <a:font script="Gujr" typeface="Shruti"/>
+        <a:font script="Khmr" typeface="DaunPenh"/>
+        <a:font script="Knda" typeface="Tunga"/>
+        <a:font script="Guru" typeface="Raavi"/>
+        <a:font script="Cans" typeface="Euphemia"/>
+        <a:font script="Cher" typeface="Plantagenet Cherokee"/>
+        <a:font script="Yiii" typeface="Microsoft Yi Baiti"/>
+        <a:font script="Tibt" typeface="Microsoft Himalaya"/>
+        <a:font script="Thaa" typeface="MV Boli"/>
+        <a:font script="Deva" typeface="Mangal"/>
+        <a:font script="Telu" typeface="Gautami"/>
+        <a:font script="Taml" typeface="Latha"/>
+        <a:font script="Syrc" typeface="Estrangelo Edessa"/>
+        <a:font script="Orya" typeface="Kalinga"/>
+        <a:font script="Mlym" typeface="Kartika"/>
+        <a:font script="Laoo" typeface="DokChampa"/>
+        <a:font script="Sinh" typeface="Iskoola Pota"/>
+        <a:font script="Mong" typeface="Mongolian Baiti"/>
+        <a:font script="Viet" typeface="Arial"/>
+        <a:font script="Uigh" typeface="Microsoft Uighur"/>
+        <a:font script="Geor" typeface="Sylfaen"/>
+        <a:font script="Armn" typeface="Arial"/>
+        <a:font script="Bugi" typeface="Leelawadee UI"/>
+        <a:font script="Bopo" typeface="Microsoft JhengHei"/>
+        <a:font script="Java" typeface="Javanese Text"/>
+        <a:font script="Lisu" typeface="Segoe UI"/>
+        <a:font script="Mymr" typeface="Myanmar Text"/>
+        <a:font script="Nkoo" typeface="Ebrima"/>
+        <a:font script="Olck" typeface="Nirmala UI"/>
+        <a:font script="Osma" typeface="Ebrima"/>
+        <a:font script="Phag" typeface="Phagspa"/>
+        <a:font script="Syrn" typeface="Estrangelo Edessa"/>
+        <a:font script="Syrj" typeface="Estrangelo Edessa"/>
+        <a:font script="Syre" typeface="Estrangelo Edessa"/>
+        <a:font script="Sora" typeface="Nirmala UI"/>
+        <a:font script="Tale" typeface="Microsoft Tai Le"/>
+        <a:font script="Talu" typeface="Microsoft New Tai Lue"/>
+        <a:font script="Tfng" typeface="Ebrima"/>
+      </a:minorFont>
+    </a:fontScheme>
+    <a:fmtScheme name="Office">
+      <a:fillStyleLst>
+        <a:solidFill>
+          <a:schemeClr val="phClr"/>
+        </a:solidFill>
+        <a:gradFill rotWithShape="1">
+          <a:gsLst>
+            <a:gs pos="0">
+              <a:schemeClr val="phClr">
+                <a:lumMod val="110000"/>
+                <a:satMod val="105000"/>
+                <a:tint val="67000"/>
+              </a:schemeClr>
+            </a:gs>
+            <a:gs pos="50000">
+              <a:schemeClr val="phClr">
+                <a:lumMod val="105000"/>
+                <a:satMod val="103000"/>
+                <a:tint val="73000"/>
+              </a:schemeClr>
+            </a:gs>
+            <a:gs pos="100000">
+              <a:schemeClr val="phClr">
+                <a:lumMod val="105000"/>
+                <a:satMod val="109000"/>
+                <a:tint val="81000"/>
+              </a:schemeClr>
+            </a:gs>
+          </a:gsLst>
+          <a:lin ang="5400000" scaled="0"/>
+        </a:gradFill>
+        <a:gradFill rotWithShape="1">
+          <a:gsLst>
+            <a:gs pos="0">
+              <a:schemeClr val="phClr">
+                <a:satMod val="103000"/>
+                <a:lumMod val="102000"/>
+                <a:tint val="94000"/>
+              </a:schemeClr>
+            </a:gs>
+            <a:gs pos="50000">
+              <a:schemeClr val="phClr">
+                <a:satMod val="110000"/>
+                <a:lumMod val="100000"/>
+                <a:shade val="100000"/>
+              </a:schemeClr>
+            </a:gs>
+            <a:gs pos="100000">
+              <a:schemeClr val="phClr">
+                <a:lumMod val="99000"/>
+                <a:satMod val="120000"/>
+                <a:shade val="78000"/>
+              </a:schemeClr>
+            </a:gs>
+          </a:gsLst>
+          <a:lin ang="5400000" scaled="0"/>
+        </a:gradFill>
+      </a:fillStyleLst>
+      <a:lnStyleLst>
+        <a:ln w="12700" cap="flat" cmpd="sng" algn="ctr">
+          <a:solidFill>
+            <a:schemeClr val="phClr"/>
+          </a:solidFill>
+          <a:prstDash val="solid"/>
+          <a:miter lim="800000"/>
+        </a:ln>
+        <a:ln w="19050" cap="flat" cmpd="sng" algn="ctr">
+          <a:solidFill>
+            <a:schemeClr val="phClr"/>
+          </a:solidFill>
+          <a:prstDash val="solid"/>
+          <a:miter lim="800000"/>
+        </a:ln>
+        <a:ln w="25400" cap="flat" cmpd="sng" algn="ctr">
+          <a:solidFill>
+            <a:schemeClr val="phClr"/>
+          </a:solidFill>
+          <a:prstDash val="solid"/>
+          <a:miter lim="800000"/>
+        </a:ln>
+      </a:lnStyleLst>
+      <a:effectStyleLst>
+        <a:effectStyle>
+          <a:effectLst/>
+        </a:effectStyle>
+        <a:effectStyle>
+          <a:effectLst/>
+        </a:effectStyle>
+        <a:effectStyle>
+          <a:effectLst>
+            <a:outerShdw blurRad="57150" dist="19050" dir="5400000" algn="ctr" rotWithShape="0">
+              <a:srgbClr val="000000">
+                <a:alpha val="63000"/>
+              </a:srgbClr>
+            </a:outerShdw>
+          </a:effectLst>
+        </a:effectStyle>
+      </a:effectStyleLst>
+      <a:bgFillStyleLst>
+        <a:solidFill>
+          <a:schemeClr val="phClr"/>
+        </a:solidFill>
+        <a:solidFill>
+          <a:schemeClr val="phClr">
+            <a:tint val="95000"/>
+            <a:satMod val="170000"/>
+          </a:schemeClr>
+        </a:solidFill>
+        <a:gradFill rotWithShape="1">
+          <a:gsLst>
+            <a:gs pos="0">
+              <a:schemeClr val="phClr">
+                <a:tint val="93000"/>
+                <a:satMod val="150000"/>
+                <a:shade val="98000"/>
+                <a:lumMod val="102000"/>
+              </a:schemeClr>
+            </a:gs>
+            <a:gs pos="50000">
+              <a:schemeClr val="phClr">
+                <a:tint val="98000"/>
+                <a:satMod val="130000"/>
+                <a:shade val="90000"/>
+                <a:lumMod val="103000"/>
+              </a:schemeClr>
+            </a:gs>
+            <a:gs pos="100000">
+              <a:schemeClr val="phClr">
+                <a:shade val="63000"/>
+                <a:satMod val="120000"/>
+              </a:schemeClr>
+            </a:gs>
+          </a:gsLst>
+          <a:lin ang="5400000" scaled="0"/>
+        </a:gradFill>
+      </a:bgFillStyleLst>
+    </a:fmtScheme>
+  </a:themeElements>
+  <a:objectDefaults>
+    <a:lnDef>
+      <a:spPr/>
+      <a:bodyPr/>
+      <a:lstStyle/>
+      <a:style>
+        <a:lnRef idx="2">
+          <a:schemeClr val="accent1"/>
+        </a:lnRef>
+        <a:fillRef idx="0">
+          <a:schemeClr val="accent1"/>
+        </a:fillRef>
+        <a:effectRef idx="1">
+          <a:schemeClr val="accent1"/>
+        </a:effectRef>
+        <a:fontRef idx="minor">
+          <a:schemeClr val="tx1"/>
+        </a:fontRef>
+      </a:style>
+    </a:lnDef>
+  </a:objectDefaults>
+  <a:extraClrSchemeLst/>
+  <a:extLst>
+    <a:ext uri="{05A4C25C-085E-4340-85A3-A5531E510DB2}">
+      <thm15:themeFamily xmlns:thm15="http://schemas.microsoft.com/office/thememl/2012/main" name="Office Theme" id="{2E142A2C-CD16-42D6-873A-C26D2A0506FA}" vid="{1BDDFF52-6CD6-40A5-AB3C-68EB2F1E4D0A}"/>
+    </a:ext>
+  </a:extLst>
+</a:theme>
 </file>